--- a/50_Resources/Physics/InFlightFission/InFlightFission_Intro.pptx
+++ b/50_Resources/Physics/InFlightFission/InFlightFission_Intro.pptx
@@ -2213,7 +2213,7 @@
           <a:ln/>
         </p:spPr>
         <p:txBody>
-          <a:bodyPr wrap="square" lIns="0" tIns="0" rIns="0" bIns="0" rtlCol="0" anchor="ctr"/>
+          <a:bodyPr wrap="square" lIns="0" tIns="0" rIns="0" bIns="0" rtlCol="0" anchor="t"/>
           <a:lstStyle/>
           <a:p>
             <a:pPr indent="0" marL="0">
@@ -2390,7 +2390,41 @@
                 <a:ea typeface="Calibri" pitchFamily="34" charset="-122"/>
                 <a:cs typeface="Calibri" pitchFamily="34" charset="-120"/>
               </a:rPr>
-              <a:t>in-flight fission of 238U</a:t>
+              <a:t>in-flight fission of </a:t>
+            </a:r>
+            <a:pPr indent="0" marL="0">
+              <a:spcAft>
+                <a:spcPts val="800"/>
+              </a:spcAft>
+              <a:buNone/>
+            </a:pPr>
+            <a:r>
+              <a:rPr lang="en-US" sz="1500" b="1" baseline="30000" dirty="0">
+                <a:solidFill>
+                  <a:srgbClr val="1E293B"/>
+                </a:solidFill>
+                <a:latin typeface="Calibri" pitchFamily="34" charset="0"/>
+                <a:ea typeface="Calibri" pitchFamily="34" charset="-122"/>
+                <a:cs typeface="Calibri" pitchFamily="34" charset="-120"/>
+              </a:rPr>
+              <a:t>238</a:t>
+            </a:r>
+            <a:pPr indent="0" marL="0">
+              <a:spcAft>
+                <a:spcPts val="800"/>
+              </a:spcAft>
+              <a:buNone/>
+            </a:pPr>
+            <a:r>
+              <a:rPr lang="en-US" sz="1500" b="1" dirty="0">
+                <a:solidFill>
+                  <a:srgbClr val="1E293B"/>
+                </a:solidFill>
+                <a:latin typeface="Calibri" pitchFamily="34" charset="0"/>
+                <a:ea typeface="Calibri" pitchFamily="34" charset="-122"/>
+                <a:cs typeface="Calibri" pitchFamily="34" charset="-120"/>
+              </a:rPr>
+              <a:t>U</a:t>
             </a:r>
             <a:pPr indent="0" marL="0">
               <a:spcAft>
@@ -3425,9 +3459,26 @@
           <a:ln/>
         </p:spPr>
         <p:txBody>
-          <a:bodyPr wrap="square" lIns="0" tIns="0" rIns="0" bIns="0" rtlCol="0" anchor="ctr"/>
-          <a:lstStyle/>
-          <a:p>
+          <a:bodyPr wrap="square" lIns="0" tIns="0" rIns="0" bIns="0" rtlCol="0" anchor="t"/>
+          <a:lstStyle/>
+          <a:p>
+            <a:pPr indent="0" marL="0">
+              <a:buNone/>
+            </a:pPr>
+            <a:pPr indent="0" marL="0">
+              <a:buNone/>
+            </a:pPr>
+            <a:r>
+              <a:rPr lang="en-US" sz="1100" baseline="30000" dirty="0">
+                <a:solidFill>
+                  <a:srgbClr val="1E293B"/>
+                </a:solidFill>
+                <a:latin typeface="Calibri" pitchFamily="34" charset="0"/>
+                <a:ea typeface="Calibri" pitchFamily="34" charset="-122"/>
+                <a:cs typeface="Calibri" pitchFamily="34" charset="-120"/>
+              </a:rPr>
+              <a:t>238</a:t>
+            </a:r>
             <a:pPr indent="0" marL="0">
               <a:buNone/>
             </a:pPr>
@@ -3440,7 +3491,7 @@
                 <a:ea typeface="Calibri" pitchFamily="34" charset="-122"/>
                 <a:cs typeface="Calibri" pitchFamily="34" charset="-120"/>
               </a:rPr>
-              <a:t>238U accelerated to 345 MeV/u (RIBF) or 400–1000 MeV/u (GSI).</a:t>
+              <a:t>U accelerated to 345 MeV/u (RIBF) or 400–1000 MeV/u (GSI).</a:t>
             </a:r>
             <a:endParaRPr lang="en-US" sz="1100" dirty="0"/>
           </a:p>
@@ -3623,7 +3674,7 @@
           <a:ln/>
         </p:spPr>
         <p:txBody>
-          <a:bodyPr wrap="square" lIns="0" tIns="0" rIns="0" bIns="0" rtlCol="0" anchor="ctr"/>
+          <a:bodyPr wrap="square" lIns="0" tIns="0" rIns="0" bIns="0" rtlCol="0" anchor="t"/>
           <a:lstStyle/>
           <a:p>
             <a:pPr indent="0" marL="0">
@@ -3821,7 +3872,7 @@
           <a:ln/>
         </p:spPr>
         <p:txBody>
-          <a:bodyPr wrap="square" lIns="0" tIns="0" rIns="0" bIns="0" rtlCol="0" anchor="ctr"/>
+          <a:bodyPr wrap="square" lIns="0" tIns="0" rIns="0" bIns="0" rtlCol="0" anchor="t"/>
           <a:lstStyle/>
           <a:p>
             <a:pPr indent="0" marL="0">
@@ -4019,7 +4070,7 @@
           <a:ln/>
         </p:spPr>
         <p:txBody>
-          <a:bodyPr wrap="square" lIns="0" tIns="0" rIns="0" bIns="0" rtlCol="0" anchor="ctr"/>
+          <a:bodyPr wrap="square" lIns="0" tIns="0" rIns="0" bIns="0" rtlCol="0" anchor="t"/>
           <a:lstStyle/>
           <a:p>
             <a:pPr indent="0" marL="0">
@@ -5369,6 +5420,20 @@
               <a:buNone/>
             </a:pPr>
             <a:r>
+              <a:rPr lang="en-US" sz="1200" baseline="30000" dirty="0">
+                <a:solidFill>
+                  <a:srgbClr val="1E293B"/>
+                </a:solidFill>
+                <a:latin typeface="Calibri" pitchFamily="34" charset="0"/>
+                <a:ea typeface="Calibri" pitchFamily="34" charset="-122"/>
+                <a:cs typeface="Calibri" pitchFamily="34" charset="-120"/>
+              </a:rPr>
+              <a:t>238</a:t>
+            </a:r>
+            <a:pPr indent="0" marL="0">
+              <a:buNone/>
+            </a:pPr>
+            <a:r>
               <a:rPr lang="en-US" sz="1200" dirty="0">
                 <a:solidFill>
                   <a:srgbClr val="1E293B"/>
@@ -5377,7 +5442,7 @@
                 <a:ea typeface="Calibri" pitchFamily="34" charset="-122"/>
                 <a:cs typeface="Calibri" pitchFamily="34" charset="-120"/>
               </a:rPr>
-              <a:t>238U → Be</a:t>
+              <a:t>U → Be</a:t>
             </a:r>
             <a:endParaRPr lang="en-US" sz="1200" dirty="0"/>
           </a:p>
@@ -5882,6 +5947,20 @@
               <a:buNone/>
             </a:pPr>
             <a:r>
+              <a:rPr lang="en-US" sz="1200" baseline="30000" dirty="0">
+                <a:solidFill>
+                  <a:srgbClr val="1E293B"/>
+                </a:solidFill>
+                <a:latin typeface="Calibri" pitchFamily="34" charset="0"/>
+                <a:ea typeface="Calibri" pitchFamily="34" charset="-122"/>
+                <a:cs typeface="Calibri" pitchFamily="34" charset="-120"/>
+              </a:rPr>
+              <a:t>238</a:t>
+            </a:r>
+            <a:pPr indent="0" marL="0">
+              <a:buNone/>
+            </a:pPr>
+            <a:r>
               <a:rPr lang="en-US" sz="1200" dirty="0">
                 <a:solidFill>
                   <a:srgbClr val="1E293B"/>
@@ -5890,7 +5969,7 @@
                 <a:ea typeface="Calibri" pitchFamily="34" charset="-122"/>
                 <a:cs typeface="Calibri" pitchFamily="34" charset="-120"/>
               </a:rPr>
-              <a:t>238U → Be</a:t>
+              <a:t>U → Be</a:t>
             </a:r>
             <a:endParaRPr lang="en-US" sz="1200" dirty="0"/>
           </a:p>
@@ -7208,7 +7287,35 @@
                 <a:ea typeface="Calibri" pitchFamily="34" charset="-122"/>
                 <a:cs typeface="Calibri" pitchFamily="34" charset="-120"/>
               </a:rPr>
-              <a:t>First observation — produced by in-flight fission of 345 MeV/u 238U on Be, in a commissioning run of ≈ 1 day at 0.007 pnA average beam current.</a:t>
+              <a:t>First observation — produced by in-flight fission of 345 MeV/u </a:t>
+            </a:r>
+            <a:pPr indent="0" marL="0">
+              <a:buNone/>
+            </a:pPr>
+            <a:r>
+              <a:rPr lang="en-US" sz="1200" baseline="30000" dirty="0">
+                <a:solidFill>
+                  <a:srgbClr val="1E293B"/>
+                </a:solidFill>
+                <a:latin typeface="Calibri" pitchFamily="34" charset="0"/>
+                <a:ea typeface="Calibri" pitchFamily="34" charset="-122"/>
+                <a:cs typeface="Calibri" pitchFamily="34" charset="-120"/>
+              </a:rPr>
+              <a:t>238</a:t>
+            </a:r>
+            <a:pPr indent="0" marL="0">
+              <a:buNone/>
+            </a:pPr>
+            <a:r>
+              <a:rPr lang="en-US" sz="1200" dirty="0">
+                <a:solidFill>
+                  <a:srgbClr val="1E293B"/>
+                </a:solidFill>
+                <a:latin typeface="Calibri" pitchFamily="34" charset="0"/>
+                <a:ea typeface="Calibri" pitchFamily="34" charset="-122"/>
+                <a:cs typeface="Calibri" pitchFamily="34" charset="-120"/>
+              </a:rPr>
+              <a:t>U on Be, in a commissioning run of ≈ 1 day at 0.007 pnA average beam current.</a:t>
             </a:r>
             <a:endParaRPr lang="en-US" sz="1200" dirty="0"/>
           </a:p>
@@ -7673,8 +7780,8 @@
         </p:nvSpPr>
         <p:spPr>
           <a:xfrm>
-            <a:off x="457200" y="4937760"/>
-            <a:ext cx="11277295" cy="1143000"/>
+            <a:off x="457200" y="4846320"/>
+            <a:ext cx="11277295" cy="1097280"/>
           </a:xfrm>
           <a:prstGeom prst="rect">
             <a:avLst/>
@@ -7698,8 +7805,8 @@
         </p:nvSpPr>
         <p:spPr>
           <a:xfrm>
-            <a:off x="731520" y="5029200"/>
-            <a:ext cx="2743200" cy="292608"/>
+            <a:off x="731520" y="4919472"/>
+            <a:ext cx="2743200" cy="274320"/>
           </a:xfrm>
           <a:prstGeom prst="rect">
             <a:avLst/>
@@ -7737,17 +7844,17 @@
         </p:nvSpPr>
         <p:spPr>
           <a:xfrm>
-            <a:off x="731520" y="5349240"/>
-            <a:ext cx="10728655" cy="685800"/>
-          </a:xfrm>
-          <a:prstGeom prst="rect">
-            <a:avLst/>
-          </a:prstGeom>
-          <a:noFill/>
-          <a:ln/>
-        </p:spPr>
-        <p:txBody>
-          <a:bodyPr wrap="square" lIns="0" tIns="0" rIns="0" bIns="0" rtlCol="0" anchor="ctr"/>
+            <a:off x="731520" y="5230368"/>
+            <a:ext cx="10728655" cy="658368"/>
+          </a:xfrm>
+          <a:prstGeom prst="rect">
+            <a:avLst/>
+          </a:prstGeom>
+          <a:noFill/>
+          <a:ln/>
+        </p:spPr>
+        <p:txBody>
+          <a:bodyPr wrap="square" lIns="0" tIns="0" rIns="0" bIns="0" rtlCol="0" anchor="t"/>
           <a:lstStyle/>
           <a:p>
             <a:pPr indent="0" marL="0">
@@ -7762,7 +7869,35 @@
                 <a:ea typeface="Calibri" pitchFamily="34" charset="-122"/>
                 <a:cs typeface="Calibri" pitchFamily="34" charset="-120"/>
               </a:rPr>
-              <a:t>Even in its commissioning phase, BigRIPS established in-flight fission of 238U as the dominant production route for mid-mass neutron-rich exotica — a role it has only expanded since.</a:t>
+              <a:t>Even in its commissioning phase, BigRIPS established in-flight fission of </a:t>
+            </a:r>
+            <a:pPr indent="0" marL="0">
+              <a:buNone/>
+            </a:pPr>
+            <a:r>
+              <a:rPr lang="en-US" sz="1400" baseline="30000" dirty="0">
+                <a:solidFill>
+                  <a:srgbClr val="F8FAFC"/>
+                </a:solidFill>
+                <a:latin typeface="Calibri" pitchFamily="34" charset="0"/>
+                <a:ea typeface="Calibri" pitchFamily="34" charset="-122"/>
+                <a:cs typeface="Calibri" pitchFamily="34" charset="-120"/>
+              </a:rPr>
+              <a:t>238</a:t>
+            </a:r>
+            <a:pPr indent="0" marL="0">
+              <a:buNone/>
+            </a:pPr>
+            <a:r>
+              <a:rPr lang="en-US" sz="1400" dirty="0">
+                <a:solidFill>
+                  <a:srgbClr val="F8FAFC"/>
+                </a:solidFill>
+                <a:latin typeface="Calibri" pitchFamily="34" charset="0"/>
+                <a:ea typeface="Calibri" pitchFamily="34" charset="-122"/>
+                <a:cs typeface="Calibri" pitchFamily="34" charset="-120"/>
+              </a:rPr>
+              <a:t>U as the dominant production route for mid-mass neutron-rich exotica — a role it has only expanded since.</a:t>
             </a:r>
             <a:endParaRPr lang="en-US" sz="1400" dirty="0"/>
           </a:p>
@@ -8037,7 +8172,35 @@
                 <a:ea typeface="Cambria" pitchFamily="34" charset="-122"/>
                 <a:cs typeface="Cambria" pitchFamily="34" charset="-120"/>
               </a:rPr>
-              <a:t>FRS at GSI: Fragmentation + Fission of 1 GeV/u 238U</a:t>
+              <a:t>FRS at GSI: Fragmentation + Fission of 1 GeV/u </a:t>
+            </a:r>
+            <a:pPr indent="0" marL="0">
+              <a:buNone/>
+            </a:pPr>
+            <a:r>
+              <a:rPr lang="en-US" sz="2800" b="1" baseline="30000" dirty="0">
+                <a:solidFill>
+                  <a:srgbClr val="1E293B"/>
+                </a:solidFill>
+                <a:latin typeface="Cambria" pitchFamily="34" charset="0"/>
+                <a:ea typeface="Cambria" pitchFamily="34" charset="-122"/>
+                <a:cs typeface="Cambria" pitchFamily="34" charset="-120"/>
+              </a:rPr>
+              <a:t>238</a:t>
+            </a:r>
+            <a:pPr indent="0" marL="0">
+              <a:buNone/>
+            </a:pPr>
+            <a:r>
+              <a:rPr lang="en-US" sz="2800" b="1" dirty="0">
+                <a:solidFill>
+                  <a:srgbClr val="1E293B"/>
+                </a:solidFill>
+                <a:latin typeface="Cambria" pitchFamily="34" charset="0"/>
+                <a:ea typeface="Cambria" pitchFamily="34" charset="-122"/>
+                <a:cs typeface="Cambria" pitchFamily="34" charset="-120"/>
+              </a:rPr>
+              <a:t>U</a:t>
             </a:r>
             <a:endParaRPr lang="en-US" sz="2800" dirty="0"/>
           </a:p>
@@ -8250,7 +8413,35 @@
                 <a:ea typeface="Calibri" pitchFamily="34" charset="-122"/>
                 <a:cs typeface="Calibri" pitchFamily="34" charset="-120"/>
               </a:rPr>
-              <a:t>discovered in a single dedicated FRS campaign, spanning Nd (Z = 60) through Pt (Z = 78), with 238U at 1 GeV/u on a Be production target.</a:t>
+              <a:t>discovered in a single dedicated FRS campaign, spanning Nd (Z = 60) through Pt (Z = 78), with </a:t>
+            </a:r>
+            <a:pPr indent="0" marL="0">
+              <a:buNone/>
+            </a:pPr>
+            <a:r>
+              <a:rPr lang="en-US" sz="1200" baseline="30000" dirty="0">
+                <a:solidFill>
+                  <a:srgbClr val="1E293B"/>
+                </a:solidFill>
+                <a:latin typeface="Calibri" pitchFamily="34" charset="0"/>
+                <a:ea typeface="Calibri" pitchFamily="34" charset="-122"/>
+                <a:cs typeface="Calibri" pitchFamily="34" charset="-120"/>
+              </a:rPr>
+              <a:t>238</a:t>
+            </a:r>
+            <a:pPr indent="0" marL="0">
+              <a:buNone/>
+            </a:pPr>
+            <a:r>
+              <a:rPr lang="en-US" sz="1200" dirty="0">
+                <a:solidFill>
+                  <a:srgbClr val="1E293B"/>
+                </a:solidFill>
+                <a:latin typeface="Calibri" pitchFamily="34" charset="0"/>
+                <a:ea typeface="Calibri" pitchFamily="34" charset="-122"/>
+                <a:cs typeface="Calibri" pitchFamily="34" charset="-120"/>
+              </a:rPr>
+              <a:t>U at 1 GeV/u on a Be production target.</a:t>
             </a:r>
             <a:endParaRPr lang="en-US" sz="1200" dirty="0"/>
           </a:p>
@@ -9053,7 +9244,35 @@
                 <a:ea typeface="Calibri" pitchFamily="34" charset="-122"/>
                 <a:cs typeface="Calibri" pitchFamily="34" charset="-120"/>
               </a:rPr>
-              <a:t>produced by 345 MeV/u 238U + Be in-flight fission, separated and identified by BigRIPS:</a:t>
+              <a:t>produced by 345 MeV/u </a:t>
+            </a:r>
+            <a:pPr indent="0" marL="0">
+              <a:buNone/>
+            </a:pPr>
+            <a:r>
+              <a:rPr lang="en-US" sz="1200" baseline="30000" dirty="0">
+                <a:solidFill>
+                  <a:srgbClr val="1E293B"/>
+                </a:solidFill>
+                <a:latin typeface="Calibri" pitchFamily="34" charset="0"/>
+                <a:ea typeface="Calibri" pitchFamily="34" charset="-122"/>
+                <a:cs typeface="Calibri" pitchFamily="34" charset="-120"/>
+              </a:rPr>
+              <a:t>238</a:t>
+            </a:r>
+            <a:pPr indent="0" marL="0">
+              <a:buNone/>
+            </a:pPr>
+            <a:r>
+              <a:rPr lang="en-US" sz="1200" dirty="0">
+                <a:solidFill>
+                  <a:srgbClr val="1E293B"/>
+                </a:solidFill>
+                <a:latin typeface="Calibri" pitchFamily="34" charset="0"/>
+                <a:ea typeface="Calibri" pitchFamily="34" charset="-122"/>
+                <a:cs typeface="Calibri" pitchFamily="34" charset="-120"/>
+              </a:rPr>
+              <a:t>U + Be in-flight fission, separated and identified by BigRIPS:</a:t>
             </a:r>
             <a:endParaRPr lang="en-US" sz="1200" dirty="0"/>
           </a:p>
@@ -9797,7 +10016,7 @@
           <a:ln/>
         </p:spPr>
         <p:txBody>
-          <a:bodyPr wrap="square" lIns="0" tIns="0" rIns="0" bIns="0" rtlCol="0" anchor="ctr"/>
+          <a:bodyPr wrap="square" lIns="0" tIns="0" rIns="0" bIns="0" rtlCol="0" anchor="t"/>
           <a:lstStyle/>
           <a:p>
             <a:pPr indent="0" marL="0">
@@ -9824,7 +10043,7 @@
               <a:buNone/>
             </a:pPr>
             <a:r>
-              <a:rPr lang="en-US" sz="1200" b="1" dirty="0">
+              <a:rPr lang="en-US" sz="1200" b="1" baseline="30000" dirty="0">
                 <a:solidFill>
                   <a:srgbClr val="1E293B"/>
                 </a:solidFill>
@@ -9832,7 +10051,7 @@
                 <a:ea typeface="Calibri" pitchFamily="34" charset="-122"/>
                 <a:cs typeface="Calibri" pitchFamily="34" charset="-120"/>
               </a:rPr>
-              <a:t>78Ni region</a:t>
+              <a:t>78</a:t>
             </a:r>
             <a:pPr indent="0" marL="0">
               <a:spcAft>
@@ -9841,7 +10060,7 @@
               <a:buNone/>
             </a:pPr>
             <a:r>
-              <a:rPr lang="en-US" sz="1200" dirty="0">
+              <a:rPr lang="en-US" sz="1200" b="1" dirty="0">
                 <a:solidFill>
                   <a:srgbClr val="1E293B"/>
                 </a:solidFill>
@@ -9849,11 +10068,8 @@
                 <a:ea typeface="Calibri" pitchFamily="34" charset="-122"/>
                 <a:cs typeface="Calibri" pitchFamily="34" charset="-120"/>
               </a:rPr>
-              <a:t>: evolution of the N = 50 shell gap far from stability.</a:t>
-            </a:r>
-            <a:endParaRPr lang="en-US" sz="1200" dirty="0"/>
-          </a:p>
-          <a:p>
+              <a:t>Ni region</a:t>
+            </a:r>
             <a:pPr indent="0" marL="0">
               <a:spcAft>
                 <a:spcPts val="400"/>
@@ -9869,7 +10085,7 @@
                 <a:ea typeface="Calibri" pitchFamily="34" charset="-122"/>
                 <a:cs typeface="Calibri" pitchFamily="34" charset="-120"/>
               </a:rPr>
-              <a:t> </a:t>
+              <a:t>: evolution of the N = 50 shell gap far from stability.</a:t>
             </a:r>
             <a:endParaRPr lang="en-US" sz="1200" dirty="0"/>
           </a:p>
@@ -9889,7 +10105,61 @@
                 <a:ea typeface="Calibri" pitchFamily="34" charset="-122"/>
                 <a:cs typeface="Calibri" pitchFamily="34" charset="-120"/>
               </a:rPr>
-              <a:t>In-flight fission of 345 MeV/u 238U produces the short-lived Z ≈ 26–32 isotones in sufficient yield for cross-section and spectroscopy measurements.</a:t>
+              <a:t> </a:t>
+            </a:r>
+            <a:endParaRPr lang="en-US" sz="1200" dirty="0"/>
+          </a:p>
+          <a:p>
+            <a:pPr indent="0" marL="0">
+              <a:spcAft>
+                <a:spcPts val="400"/>
+              </a:spcAft>
+              <a:buNone/>
+            </a:pPr>
+            <a:r>
+              <a:rPr lang="en-US" sz="1200" dirty="0">
+                <a:solidFill>
+                  <a:srgbClr val="1E293B"/>
+                </a:solidFill>
+                <a:latin typeface="Calibri" pitchFamily="34" charset="0"/>
+                <a:ea typeface="Calibri" pitchFamily="34" charset="-122"/>
+                <a:cs typeface="Calibri" pitchFamily="34" charset="-120"/>
+              </a:rPr>
+              <a:t>In-flight fission of 345 MeV/u </a:t>
+            </a:r>
+            <a:pPr indent="0" marL="0">
+              <a:spcAft>
+                <a:spcPts val="400"/>
+              </a:spcAft>
+              <a:buNone/>
+            </a:pPr>
+            <a:r>
+              <a:rPr lang="en-US" sz="1200" baseline="30000" dirty="0">
+                <a:solidFill>
+                  <a:srgbClr val="1E293B"/>
+                </a:solidFill>
+                <a:latin typeface="Calibri" pitchFamily="34" charset="0"/>
+                <a:ea typeface="Calibri" pitchFamily="34" charset="-122"/>
+                <a:cs typeface="Calibri" pitchFamily="34" charset="-120"/>
+              </a:rPr>
+              <a:t>238</a:t>
+            </a:r>
+            <a:pPr indent="0" marL="0">
+              <a:spcAft>
+                <a:spcPts val="400"/>
+              </a:spcAft>
+              <a:buNone/>
+            </a:pPr>
+            <a:r>
+              <a:rPr lang="en-US" sz="1200" dirty="0">
+                <a:solidFill>
+                  <a:srgbClr val="1E293B"/>
+                </a:solidFill>
+                <a:latin typeface="Calibri" pitchFamily="34" charset="0"/>
+                <a:ea typeface="Calibri" pitchFamily="34" charset="-122"/>
+                <a:cs typeface="Calibri" pitchFamily="34" charset="-120"/>
+              </a:rPr>
+              <a:t>U produces the short-lived Z ≈ 26–32 isotones in sufficient yield for cross-section and spectroscopy measurements.</a:t>
             </a:r>
             <a:endParaRPr lang="en-US" sz="1200" dirty="0"/>
           </a:p>
@@ -10324,7 +10594,7 @@
           <a:ln/>
         </p:spPr>
         <p:txBody>
-          <a:bodyPr wrap="square" lIns="0" tIns="0" rIns="0" bIns="0" rtlCol="0" anchor="ctr"/>
+          <a:bodyPr wrap="square" lIns="0" tIns="0" rIns="0" bIns="0" rtlCol="0" anchor="t"/>
           <a:lstStyle/>
           <a:p>
             <a:pPr indent="0" marL="0">
@@ -10525,7 +10795,7 @@
           <a:ln/>
         </p:spPr>
         <p:txBody>
-          <a:bodyPr wrap="square" lIns="0" tIns="0" rIns="0" bIns="0" rtlCol="0" anchor="ctr"/>
+          <a:bodyPr wrap="square" lIns="0" tIns="0" rIns="0" bIns="0" rtlCol="0" anchor="t"/>
           <a:lstStyle/>
           <a:p>
             <a:pPr indent="0" marL="0">
@@ -10726,7 +10996,7 @@
           <a:ln/>
         </p:spPr>
         <p:txBody>
-          <a:bodyPr wrap="square" lIns="0" tIns="0" rIns="0" bIns="0" rtlCol="0" anchor="ctr"/>
+          <a:bodyPr wrap="square" lIns="0" tIns="0" rIns="0" bIns="0" rtlCol="0" anchor="t"/>
           <a:lstStyle/>
           <a:p>
             <a:pPr indent="0" marL="0">
@@ -11209,7 +11479,7 @@
           <a:ln/>
         </p:spPr>
         <p:txBody>
-          <a:bodyPr wrap="square" lIns="0" tIns="0" rIns="0" bIns="0" rtlCol="0" anchor="ctr"/>
+          <a:bodyPr wrap="square" lIns="0" tIns="0" rIns="0" bIns="0" rtlCol="0" anchor="t"/>
           <a:lstStyle/>
           <a:p>
             <a:pPr marL="342900" indent="-342900">
@@ -11228,7 +11498,41 @@
                 <a:ea typeface="Calibri" pitchFamily="34" charset="-122"/>
                 <a:cs typeface="Calibri" pitchFamily="34" charset="-120"/>
               </a:rPr>
-              <a:t>In-flight fission of 238U is the dominant route to mid-mass neutron-rich exotica.</a:t>
+              <a:t>In-flight fission of </a:t>
+            </a:r>
+            <a:pPr indent="0" marL="0">
+              <a:spcAft>
+                <a:spcPts val="600"/>
+              </a:spcAft>
+              <a:buNone/>
+            </a:pPr>
+            <a:r>
+              <a:rPr lang="en-US" sz="1400" baseline="30000" dirty="0">
+                <a:solidFill>
+                  <a:srgbClr val="F8FAFC"/>
+                </a:solidFill>
+                <a:latin typeface="Calibri" pitchFamily="34" charset="0"/>
+                <a:ea typeface="Calibri" pitchFamily="34" charset="-122"/>
+                <a:cs typeface="Calibri" pitchFamily="34" charset="-120"/>
+              </a:rPr>
+              <a:t>238</a:t>
+            </a:r>
+            <a:pPr indent="0" marL="0">
+              <a:spcAft>
+                <a:spcPts val="600"/>
+              </a:spcAft>
+              <a:buNone/>
+            </a:pPr>
+            <a:r>
+              <a:rPr lang="en-US" sz="1400" dirty="0">
+                <a:solidFill>
+                  <a:srgbClr val="F8FAFC"/>
+                </a:solidFill>
+                <a:latin typeface="Calibri" pitchFamily="34" charset="0"/>
+                <a:ea typeface="Calibri" pitchFamily="34" charset="-122"/>
+                <a:cs typeface="Calibri" pitchFamily="34" charset="-120"/>
+              </a:rPr>
+              <a:t>U is the dominant route to mid-mass neutron-rich exotica.</a:t>
             </a:r>
             <a:endParaRPr lang="en-US" sz="1400" dirty="0"/>
           </a:p>
@@ -11379,7 +11683,7 @@
           <a:ln/>
         </p:spPr>
         <p:txBody>
-          <a:bodyPr wrap="square" lIns="0" tIns="0" rIns="0" bIns="0" rtlCol="0" anchor="ctr"/>
+          <a:bodyPr wrap="square" lIns="0" tIns="0" rIns="0" bIns="0" rtlCol="0" anchor="t"/>
           <a:lstStyle/>
           <a:p>
             <a:pPr marL="342900" indent="-342900">

--- a/50_Resources/Physics/InFlightFission/InFlightFission_Intro.pptx
+++ b/50_Resources/Physics/InFlightFission/InFlightFission_Intro.pptx
@@ -1569,7 +1569,7 @@
     <p:bg>
       <p:bgPr>
         <a:solidFill>
-          <a:srgbClr val="0A1929"/>
+          <a:srgbClr val="0B1426"/>
         </a:solidFill>
       </p:bgPr>
     </p:bg>
@@ -1602,7 +1602,7 @@
             <a:avLst/>
           </a:prstGeom>
           <a:solidFill>
-            <a:srgbClr val="075985">
+            <a:srgbClr val="2D4A4C">
               <a:alpha val="45000"/>
             </a:srgbClr>
           </a:solidFill>
@@ -1629,7 +1629,7 @@
             <a:avLst/>
           </a:prstGeom>
           <a:solidFill>
-            <a:srgbClr val="0891B2">
+            <a:srgbClr val="4A7C7E">
               <a:alpha val="30000"/>
             </a:srgbClr>
           </a:solidFill>
@@ -1656,7 +1656,7 @@
             <a:avLst/>
           </a:prstGeom>
           <a:solidFill>
-            <a:srgbClr val="F59E0B"/>
+            <a:srgbClr val="E8A33D"/>
           </a:solidFill>
           <a:ln w="12700">
             <a:solidFill>
@@ -1681,7 +1681,7 @@
             <a:avLst/>
           </a:prstGeom>
           <a:solidFill>
-            <a:srgbClr val="F59E0B">
+            <a:srgbClr val="E8A33D">
               <a:alpha val="70000"/>
             </a:srgbClr>
           </a:solidFill>
@@ -1708,7 +1708,7 @@
             <a:avLst/>
           </a:prstGeom>
           <a:solidFill>
-            <a:srgbClr val="F59E0B">
+            <a:srgbClr val="E8A33D">
               <a:alpha val="50000"/>
             </a:srgbClr>
           </a:solidFill>
@@ -1729,17 +1729,17 @@
         <p:spPr>
           <a:xfrm>
             <a:off x="0" y="0"/>
-            <a:ext cx="12191695" cy="109728"/>
+            <a:ext cx="274320" cy="6858000"/>
           </a:xfrm>
           <a:prstGeom prst="rect">
             <a:avLst/>
           </a:prstGeom>
           <a:solidFill>
-            <a:srgbClr val="F59E0B"/>
+            <a:srgbClr val="E8A33D"/>
           </a:solidFill>
           <a:ln w="12700">
             <a:solidFill>
-              <a:srgbClr val="F59E0B"/>
+              <a:srgbClr val="E8A33D"/>
             </a:solidFill>
             <a:prstDash val="solid"/>
           </a:ln>
@@ -1747,141 +1747,24 @@
       </p:sp>
       <p:sp>
         <p:nvSpPr>
-          <p:cNvPr id="8" name="Text 6"/>
-          <p:cNvSpPr/>
-          <p:nvPr/>
-        </p:nvSpPr>
-        <p:spPr>
-          <a:xfrm>
-            <a:off x="731520" y="1005840"/>
-            <a:ext cx="7315200" cy="365760"/>
-          </a:xfrm>
-          <a:prstGeom prst="rect">
-            <a:avLst/>
-          </a:prstGeom>
-          <a:noFill/>
-          <a:ln/>
-        </p:spPr>
-        <p:txBody>
-          <a:bodyPr wrap="square" lIns="0" tIns="0" rIns="0" bIns="0" rtlCol="0" anchor="ctr"/>
-          <a:lstStyle/>
-          <a:p>
-            <a:pPr indent="0" marL="0">
-              <a:buNone/>
-            </a:pPr>
-            <a:r>
-              <a:rPr lang="en-US" sz="1400" b="1" spc="600" kern="0" dirty="0">
-                <a:solidFill>
-                  <a:srgbClr val="F59E0B"/>
-                </a:solidFill>
-                <a:latin typeface="Calibri" pitchFamily="34" charset="0"/>
-                <a:ea typeface="Calibri" pitchFamily="34" charset="-122"/>
-                <a:cs typeface="Calibri" pitchFamily="34" charset="-120"/>
-              </a:rPr>
-              <a:t>EXPERIMENTAL OVERVIEW</a:t>
-            </a:r>
-            <a:endParaRPr lang="en-US" sz="1400" dirty="0"/>
-          </a:p>
-        </p:txBody>
-      </p:sp>
-      <p:sp>
-        <p:nvSpPr>
-          <p:cNvPr id="9" name="Text 7"/>
-          <p:cNvSpPr/>
-          <p:nvPr/>
-        </p:nvSpPr>
-        <p:spPr>
-          <a:xfrm>
-            <a:off x="731520" y="1508760"/>
-            <a:ext cx="9144000" cy="1280160"/>
-          </a:xfrm>
-          <a:prstGeom prst="rect">
-            <a:avLst/>
-          </a:prstGeom>
-          <a:noFill/>
-          <a:ln/>
-        </p:spPr>
-        <p:txBody>
-          <a:bodyPr wrap="square" lIns="0" tIns="0" rIns="0" bIns="0" rtlCol="0" anchor="ctr"/>
-          <a:lstStyle/>
-          <a:p>
-            <a:pPr indent="0" marL="0">
-              <a:buNone/>
-            </a:pPr>
-            <a:r>
-              <a:rPr lang="en-US" sz="6400" b="1" dirty="0">
-                <a:solidFill>
-                  <a:srgbClr val="F8FAFC"/>
-                </a:solidFill>
-                <a:latin typeface="Cambria" pitchFamily="34" charset="0"/>
-                <a:ea typeface="Cambria" pitchFamily="34" charset="-122"/>
-                <a:cs typeface="Cambria" pitchFamily="34" charset="-120"/>
-              </a:rPr>
-              <a:t>In-Flight Fission</a:t>
-            </a:r>
-            <a:endParaRPr lang="en-US" sz="6400" dirty="0"/>
-          </a:p>
-        </p:txBody>
-      </p:sp>
-      <p:sp>
-        <p:nvSpPr>
-          <p:cNvPr id="10" name="Text 8"/>
-          <p:cNvSpPr/>
-          <p:nvPr/>
-        </p:nvSpPr>
-        <p:spPr>
-          <a:xfrm>
-            <a:off x="731520" y="2697480"/>
-            <a:ext cx="9144000" cy="822960"/>
-          </a:xfrm>
-          <a:prstGeom prst="rect">
-            <a:avLst/>
-          </a:prstGeom>
-          <a:noFill/>
-          <a:ln/>
-        </p:spPr>
-        <p:txBody>
-          <a:bodyPr wrap="square" lIns="0" tIns="0" rIns="0" bIns="0" rtlCol="0" anchor="ctr"/>
-          <a:lstStyle/>
-          <a:p>
-            <a:pPr indent="0" marL="0">
-              <a:buNone/>
-            </a:pPr>
-            <a:r>
-              <a:rPr lang="en-US" sz="3600" i="1" dirty="0">
-                <a:solidFill>
-                  <a:srgbClr val="F8FAFC"/>
-                </a:solidFill>
-                <a:latin typeface="Cambria" pitchFamily="34" charset="0"/>
-                <a:ea typeface="Cambria" pitchFamily="34" charset="-122"/>
-                <a:cs typeface="Cambria" pitchFamily="34" charset="-120"/>
-              </a:rPr>
-              <a:t>in Nuclear Physics Reactions</a:t>
-            </a:r>
-            <a:endParaRPr lang="en-US" sz="3600" dirty="0"/>
-          </a:p>
-        </p:txBody>
-      </p:sp>
-      <p:sp>
-        <p:nvSpPr>
-          <p:cNvPr id="11" name="Shape 9"/>
-          <p:cNvSpPr/>
-          <p:nvPr/>
-        </p:nvSpPr>
-        <p:spPr>
-          <a:xfrm>
-            <a:off x="731520" y="3657600"/>
-            <a:ext cx="548640" cy="36576"/>
+          <p:cNvPr id="8" name="Shape 6"/>
+          <p:cNvSpPr/>
+          <p:nvPr/>
+        </p:nvSpPr>
+        <p:spPr>
+          <a:xfrm>
+            <a:off x="0" y="0"/>
+            <a:ext cx="12191695" cy="91440"/>
           </a:xfrm>
           <a:prstGeom prst="rect">
             <a:avLst/>
           </a:prstGeom>
           <a:solidFill>
-            <a:srgbClr val="F59E0B"/>
+            <a:srgbClr val="E8A33D"/>
           </a:solidFill>
           <a:ln w="12700">
             <a:solidFill>
-              <a:srgbClr val="F59E0B"/>
+              <a:srgbClr val="E8A33D"/>
             </a:solidFill>
             <a:prstDash val="solid"/>
           </a:ln>
@@ -1889,13 +1772,155 @@
       </p:sp>
       <p:sp>
         <p:nvSpPr>
-          <p:cNvPr id="12" name="Text 10"/>
-          <p:cNvSpPr/>
-          <p:nvPr/>
-        </p:nvSpPr>
-        <p:spPr>
-          <a:xfrm>
-            <a:off x="731520" y="3840480"/>
+          <p:cNvPr id="9" name="Text 7"/>
+          <p:cNvSpPr/>
+          <p:nvPr/>
+        </p:nvSpPr>
+        <p:spPr>
+          <a:xfrm>
+            <a:off x="777240" y="1051560"/>
+            <a:ext cx="7315200" cy="365760"/>
+          </a:xfrm>
+          <a:prstGeom prst="rect">
+            <a:avLst/>
+          </a:prstGeom>
+          <a:noFill/>
+          <a:ln/>
+        </p:spPr>
+        <p:txBody>
+          <a:bodyPr wrap="square" lIns="0" tIns="0" rIns="0" bIns="0" rtlCol="0" anchor="ctr"/>
+          <a:lstStyle/>
+          <a:p>
+            <a:pPr indent="0" marL="0">
+              <a:buNone/>
+            </a:pPr>
+            <a:r>
+              <a:rPr lang="en-US" sz="1300" b="1" spc="800" kern="0" dirty="0">
+                <a:solidFill>
+                  <a:srgbClr val="E8A33D"/>
+                </a:solidFill>
+                <a:latin typeface="Calibri" pitchFamily="34" charset="0"/>
+                <a:ea typeface="Calibri" pitchFamily="34" charset="-122"/>
+                <a:cs typeface="Calibri" pitchFamily="34" charset="-120"/>
+              </a:rPr>
+              <a:t>EXPERIMENTAL OVERVIEW</a:t>
+            </a:r>
+            <a:endParaRPr lang="en-US" sz="1300" dirty="0"/>
+          </a:p>
+        </p:txBody>
+      </p:sp>
+      <p:sp>
+        <p:nvSpPr>
+          <p:cNvPr id="10" name="Text 8"/>
+          <p:cNvSpPr/>
+          <p:nvPr/>
+        </p:nvSpPr>
+        <p:spPr>
+          <a:xfrm>
+            <a:off x="777240" y="1554480"/>
+            <a:ext cx="9144000" cy="1371600"/>
+          </a:xfrm>
+          <a:prstGeom prst="rect">
+            <a:avLst/>
+          </a:prstGeom>
+          <a:noFill/>
+          <a:ln/>
+        </p:spPr>
+        <p:txBody>
+          <a:bodyPr wrap="square" lIns="0" tIns="0" rIns="0" bIns="0" rtlCol="0" anchor="ctr"/>
+          <a:lstStyle/>
+          <a:p>
+            <a:pPr indent="0" marL="0">
+              <a:buNone/>
+            </a:pPr>
+            <a:r>
+              <a:rPr lang="en-US" sz="6800" b="1" dirty="0">
+                <a:solidFill>
+                  <a:srgbClr val="F5EFE6"/>
+                </a:solidFill>
+                <a:latin typeface="Palatino" pitchFamily="34" charset="0"/>
+                <a:ea typeface="Palatino" pitchFamily="34" charset="-122"/>
+                <a:cs typeface="Palatino" pitchFamily="34" charset="-120"/>
+              </a:rPr>
+              <a:t>In-Flight Fission</a:t>
+            </a:r>
+            <a:endParaRPr lang="en-US" sz="6800" dirty="0"/>
+          </a:p>
+        </p:txBody>
+      </p:sp>
+      <p:sp>
+        <p:nvSpPr>
+          <p:cNvPr id="11" name="Text 9"/>
+          <p:cNvSpPr/>
+          <p:nvPr/>
+        </p:nvSpPr>
+        <p:spPr>
+          <a:xfrm>
+            <a:off x="777240" y="2834640"/>
+            <a:ext cx="9144000" cy="868680"/>
+          </a:xfrm>
+          <a:prstGeom prst="rect">
+            <a:avLst/>
+          </a:prstGeom>
+          <a:noFill/>
+          <a:ln/>
+        </p:spPr>
+        <p:txBody>
+          <a:bodyPr wrap="square" lIns="0" tIns="0" rIns="0" bIns="0" rtlCol="0" anchor="ctr"/>
+          <a:lstStyle/>
+          <a:p>
+            <a:pPr indent="0" marL="0">
+              <a:buNone/>
+            </a:pPr>
+            <a:r>
+              <a:rPr lang="en-US" sz="3400" i="1" dirty="0">
+                <a:solidFill>
+                  <a:srgbClr val="F5EFE6"/>
+                </a:solidFill>
+                <a:latin typeface="Palatino" pitchFamily="34" charset="0"/>
+                <a:ea typeface="Palatino" pitchFamily="34" charset="-122"/>
+                <a:cs typeface="Palatino" pitchFamily="34" charset="-120"/>
+              </a:rPr>
+              <a:t>in Nuclear Physics Reactions</a:t>
+            </a:r>
+            <a:endParaRPr lang="en-US" sz="3400" dirty="0"/>
+          </a:p>
+        </p:txBody>
+      </p:sp>
+      <p:sp>
+        <p:nvSpPr>
+          <p:cNvPr id="12" name="Shape 10"/>
+          <p:cNvSpPr/>
+          <p:nvPr/>
+        </p:nvSpPr>
+        <p:spPr>
+          <a:xfrm>
+            <a:off x="777240" y="3840480"/>
+            <a:ext cx="640080" cy="45720"/>
+          </a:xfrm>
+          <a:prstGeom prst="rect">
+            <a:avLst/>
+          </a:prstGeom>
+          <a:solidFill>
+            <a:srgbClr val="E8A33D"/>
+          </a:solidFill>
+          <a:ln w="12700">
+            <a:solidFill>
+              <a:srgbClr val="E8A33D"/>
+            </a:solidFill>
+            <a:prstDash val="solid"/>
+          </a:ln>
+        </p:spPr>
+      </p:sp>
+      <p:sp>
+        <p:nvSpPr>
+          <p:cNvPr id="13" name="Text 11"/>
+          <p:cNvSpPr/>
+          <p:nvPr/>
+        </p:nvSpPr>
+        <p:spPr>
+          <a:xfrm>
+            <a:off x="777240" y="4023360"/>
             <a:ext cx="8229600" cy="914400"/>
           </a:xfrm>
           <a:prstGeom prst="rect">
@@ -1914,7 +1939,7 @@
             <a:r>
               <a:rPr lang="en-US" sz="1600" dirty="0">
                 <a:solidFill>
-                  <a:srgbClr val="CBD5E1"/>
+                  <a:srgbClr val="AFA89A"/>
                 </a:solidFill>
                 <a:latin typeface="Calibri" pitchFamily="34" charset="0"/>
                 <a:ea typeface="Calibri" pitchFamily="34" charset="-122"/>
@@ -1931,7 +1956,7 @@
             <a:r>
               <a:rPr lang="en-US" sz="1600" dirty="0">
                 <a:solidFill>
-                  <a:srgbClr val="CBD5E1"/>
+                  <a:srgbClr val="AFA89A"/>
                 </a:solidFill>
                 <a:latin typeface="Calibri" pitchFamily="34" charset="0"/>
                 <a:ea typeface="Calibri" pitchFamily="34" charset="-122"/>
@@ -1945,13 +1970,13 @@
       </p:sp>
       <p:sp>
         <p:nvSpPr>
-          <p:cNvPr id="13" name="Text 11"/>
-          <p:cNvSpPr/>
-          <p:nvPr/>
-        </p:nvSpPr>
-        <p:spPr>
-          <a:xfrm>
-            <a:off x="731520" y="5852160"/>
+          <p:cNvPr id="14" name="Text 12"/>
+          <p:cNvSpPr/>
+          <p:nvPr/>
+        </p:nvSpPr>
+        <p:spPr>
+          <a:xfrm>
+            <a:off x="777240" y="5806440"/>
             <a:ext cx="7315200" cy="320040"/>
           </a:xfrm>
           <a:prstGeom prst="rect">
@@ -1968,15 +1993,15 @@
               <a:buNone/>
             </a:pPr>
             <a:r>
-              <a:rPr lang="en-US" sz="1300" dirty="0">
-                <a:solidFill>
-                  <a:srgbClr val="F8FAFC"/>
-                </a:solidFill>
-                <a:latin typeface="Calibri" pitchFamily="34" charset="0"/>
-                <a:ea typeface="Calibri" pitchFamily="34" charset="-122"/>
-                <a:cs typeface="Calibri" pitchFamily="34" charset="-120"/>
-              </a:rPr>
-              <a:t>Reid · Institute of Modern Physics, CAS</a:t>
+              <a:rPr lang="en-US" sz="1300" spc="100" kern="0" dirty="0">
+                <a:solidFill>
+                  <a:srgbClr val="F5EFE6"/>
+                </a:solidFill>
+                <a:latin typeface="Calibri" pitchFamily="34" charset="0"/>
+                <a:ea typeface="Calibri" pitchFamily="34" charset="-122"/>
+                <a:cs typeface="Calibri" pitchFamily="34" charset="-120"/>
+              </a:rPr>
+              <a:t>Reid  ·  Institute of Modern Physics, CAS</a:t>
             </a:r>
             <a:endParaRPr lang="en-US" sz="1300" dirty="0"/>
           </a:p>
@@ -1984,13 +2009,13 @@
       </p:sp>
       <p:sp>
         <p:nvSpPr>
-          <p:cNvPr id="14" name="Text 12"/>
-          <p:cNvSpPr/>
-          <p:nvPr/>
-        </p:nvSpPr>
-        <p:spPr>
-          <a:xfrm>
-            <a:off x="731520" y="6172200"/>
+          <p:cNvPr id="15" name="Text 13"/>
+          <p:cNvSpPr/>
+          <p:nvPr/>
+        </p:nvSpPr>
+        <p:spPr>
+          <a:xfrm>
+            <a:off x="777240" y="6144768"/>
             <a:ext cx="7315200" cy="274320"/>
           </a:xfrm>
           <a:prstGeom prst="rect">
@@ -2007,17 +2032,17 @@
               <a:buNone/>
             </a:pPr>
             <a:r>
-              <a:rPr lang="en-US" sz="1100" dirty="0">
-                <a:solidFill>
-                  <a:srgbClr val="64748B"/>
-                </a:solidFill>
-                <a:latin typeface="Calibri" pitchFamily="34" charset="0"/>
-                <a:ea typeface="Calibri" pitchFamily="34" charset="-122"/>
-                <a:cs typeface="Calibri" pitchFamily="34" charset="-120"/>
-              </a:rPr>
-              <a:t>21 April 2026 · OrbitOS / 50_Resources / Physics</a:t>
-            </a:r>
-            <a:endParaRPr lang="en-US" sz="1100" dirty="0"/>
+              <a:rPr lang="en-US" sz="1050" spc="100" kern="0" dirty="0">
+                <a:solidFill>
+                  <a:srgbClr val="AFA89A"/>
+                </a:solidFill>
+                <a:latin typeface="Calibri" pitchFamily="34" charset="0"/>
+                <a:ea typeface="Calibri" pitchFamily="34" charset="-122"/>
+                <a:cs typeface="Calibri" pitchFamily="34" charset="-120"/>
+              </a:rPr>
+              <a:t>21 April 2026  ·  OrbitOS / 50_Resources / Physics</a:t>
+            </a:r>
+            <a:endParaRPr lang="en-US" sz="1050" dirty="0"/>
           </a:p>
         </p:txBody>
       </p:sp>
@@ -2035,7 +2060,7 @@
     <p:bg>
       <p:bgPr>
         <a:solidFill>
-          <a:srgbClr val="F8FAFC"/>
+          <a:srgbClr val="FAF7F2"/>
         </a:solidFill>
       </p:bgPr>
     </p:bg>
@@ -2062,17 +2087,17 @@
         <p:spPr>
           <a:xfrm>
             <a:off x="0" y="0"/>
-            <a:ext cx="12191695" cy="109728"/>
+            <a:ext cx="274320" cy="6858000"/>
           </a:xfrm>
           <a:prstGeom prst="rect">
             <a:avLst/>
           </a:prstGeom>
           <a:solidFill>
-            <a:srgbClr val="F59E0B"/>
+            <a:srgbClr val="E8A33D"/>
           </a:solidFill>
           <a:ln w="12700">
             <a:solidFill>
-              <a:srgbClr val="F59E0B"/>
+              <a:srgbClr val="E8A33D"/>
             </a:solidFill>
             <a:prstDash val="solid"/>
           </a:ln>
@@ -2080,32 +2105,57 @@
       </p:sp>
       <p:sp>
         <p:nvSpPr>
-          <p:cNvPr id="3" name="Text 1"/>
-          <p:cNvSpPr/>
-          <p:nvPr/>
-        </p:nvSpPr>
-        <p:spPr>
-          <a:xfrm>
-            <a:off x="457200" y="256032"/>
-            <a:ext cx="8229600" cy="320040"/>
-          </a:xfrm>
-          <a:prstGeom prst="rect">
-            <a:avLst/>
-          </a:prstGeom>
-          <a:noFill/>
-          <a:ln/>
-        </p:spPr>
-        <p:txBody>
-          <a:bodyPr wrap="square" lIns="0" tIns="0" rIns="0" bIns="0" rtlCol="0" anchor="ctr"/>
-          <a:lstStyle/>
-          <a:p>
-            <a:pPr indent="0" marL="0">
-              <a:buNone/>
-            </a:pPr>
-            <a:r>
-              <a:rPr lang="en-US" sz="1100" b="1" spc="400" kern="0" dirty="0">
-                <a:solidFill>
-                  <a:srgbClr val="64748B"/>
+          <p:cNvPr id="3" name="Shape 1"/>
+          <p:cNvSpPr/>
+          <p:nvPr/>
+        </p:nvSpPr>
+        <p:spPr>
+          <a:xfrm>
+            <a:off x="0" y="0"/>
+            <a:ext cx="12191695" cy="91440"/>
+          </a:xfrm>
+          <a:prstGeom prst="rect">
+            <a:avLst/>
+          </a:prstGeom>
+          <a:solidFill>
+            <a:srgbClr val="E8A33D"/>
+          </a:solidFill>
+          <a:ln w="12700">
+            <a:solidFill>
+              <a:srgbClr val="E8A33D"/>
+            </a:solidFill>
+            <a:prstDash val="solid"/>
+          </a:ln>
+        </p:spPr>
+      </p:sp>
+      <p:sp>
+        <p:nvSpPr>
+          <p:cNvPr id="4" name="Text 2"/>
+          <p:cNvSpPr/>
+          <p:nvPr/>
+        </p:nvSpPr>
+        <p:spPr>
+          <a:xfrm>
+            <a:off x="502920" y="292608"/>
+            <a:ext cx="8686800" cy="347472"/>
+          </a:xfrm>
+          <a:prstGeom prst="rect">
+            <a:avLst/>
+          </a:prstGeom>
+          <a:noFill/>
+          <a:ln/>
+        </p:spPr>
+        <p:txBody>
+          <a:bodyPr wrap="square" lIns="0" tIns="0" rIns="0" bIns="0" rtlCol="0" anchor="ctr"/>
+          <a:lstStyle/>
+          <a:p>
+            <a:pPr indent="0" marL="0">
+              <a:buNone/>
+            </a:pPr>
+            <a:r>
+              <a:rPr lang="en-US" sz="1050" b="1" spc="600" kern="0" dirty="0">
+                <a:solidFill>
+                  <a:srgbClr val="8B8578"/>
                 </a:solidFill>
                 <a:latin typeface="Calibri" pitchFamily="34" charset="0"/>
                 <a:ea typeface="Calibri" pitchFamily="34" charset="-122"/>
@@ -2113,20 +2163,20 @@
               </a:rPr>
               <a:t>MOTIVATION</a:t>
             </a:r>
-            <a:endParaRPr lang="en-US" sz="1100" dirty="0"/>
-          </a:p>
-        </p:txBody>
-      </p:sp>
-      <p:sp>
-        <p:nvSpPr>
-          <p:cNvPr id="4" name="Text 2"/>
-          <p:cNvSpPr/>
-          <p:nvPr/>
-        </p:nvSpPr>
-        <p:spPr>
-          <a:xfrm>
-            <a:off x="10728655" y="256032"/>
-            <a:ext cx="1005840" cy="320040"/>
+            <a:endParaRPr lang="en-US" sz="1050" dirty="0"/>
+          </a:p>
+        </p:txBody>
+      </p:sp>
+      <p:sp>
+        <p:nvSpPr>
+          <p:cNvPr id="5" name="Text 3"/>
+          <p:cNvSpPr/>
+          <p:nvPr/>
+        </p:nvSpPr>
+        <p:spPr>
+          <a:xfrm>
+            <a:off x="10728655" y="292608"/>
+            <a:ext cx="1005840" cy="347472"/>
           </a:xfrm>
           <a:prstGeom prst="rect">
             <a:avLst/>
@@ -2142,62 +2192,62 @@
               <a:buNone/>
             </a:pPr>
             <a:r>
-              <a:rPr lang="en-US" sz="1100" b="1" dirty="0">
-                <a:solidFill>
-                  <a:srgbClr val="64748B"/>
-                </a:solidFill>
-                <a:latin typeface="Calibri" pitchFamily="34" charset="0"/>
-                <a:ea typeface="Calibri" pitchFamily="34" charset="-122"/>
-                <a:cs typeface="Calibri" pitchFamily="34" charset="-120"/>
-              </a:rPr>
-              <a:t>02 / 09</a:t>
-            </a:r>
-            <a:endParaRPr lang="en-US" sz="1100" dirty="0"/>
-          </a:p>
-        </p:txBody>
-      </p:sp>
-      <p:sp>
-        <p:nvSpPr>
-          <p:cNvPr id="5" name="Text 3"/>
-          <p:cNvSpPr/>
-          <p:nvPr/>
-        </p:nvSpPr>
-        <p:spPr>
-          <a:xfrm>
-            <a:off x="457200" y="594360"/>
-            <a:ext cx="11247120" cy="822960"/>
-          </a:xfrm>
-          <a:prstGeom prst="rect">
-            <a:avLst/>
-          </a:prstGeom>
-          <a:noFill/>
-          <a:ln/>
-        </p:spPr>
-        <p:txBody>
-          <a:bodyPr wrap="square" lIns="0" tIns="0" rIns="0" bIns="0" rtlCol="0" anchor="ctr"/>
-          <a:lstStyle/>
-          <a:p>
-            <a:pPr indent="0" marL="0">
-              <a:buNone/>
-            </a:pPr>
-            <a:r>
-              <a:rPr lang="en-US" sz="2800" b="1" dirty="0">
-                <a:solidFill>
-                  <a:srgbClr val="1E293B"/>
-                </a:solidFill>
-                <a:latin typeface="Cambria" pitchFamily="34" charset="0"/>
-                <a:ea typeface="Cambria" pitchFamily="34" charset="-122"/>
-                <a:cs typeface="Cambria" pitchFamily="34" charset="-120"/>
+              <a:rPr lang="en-US" sz="1050" b="1" spc="200" kern="0" dirty="0">
+                <a:solidFill>
+                  <a:srgbClr val="8B8578"/>
+                </a:solidFill>
+                <a:latin typeface="Calibri" pitchFamily="34" charset="0"/>
+                <a:ea typeface="Calibri" pitchFamily="34" charset="-122"/>
+                <a:cs typeface="Calibri" pitchFamily="34" charset="-120"/>
+              </a:rPr>
+              <a:t>02  ·  09</a:t>
+            </a:r>
+            <a:endParaRPr lang="en-US" sz="1050" dirty="0"/>
+          </a:p>
+        </p:txBody>
+      </p:sp>
+      <p:sp>
+        <p:nvSpPr>
+          <p:cNvPr id="6" name="Text 4"/>
+          <p:cNvSpPr/>
+          <p:nvPr/>
+        </p:nvSpPr>
+        <p:spPr>
+          <a:xfrm>
+            <a:off x="502920" y="713232"/>
+            <a:ext cx="11155680" cy="868680"/>
+          </a:xfrm>
+          <a:prstGeom prst="rect">
+            <a:avLst/>
+          </a:prstGeom>
+          <a:noFill/>
+          <a:ln/>
+        </p:spPr>
+        <p:txBody>
+          <a:bodyPr wrap="square" lIns="0" tIns="0" rIns="0" bIns="0" rtlCol="0" anchor="ctr"/>
+          <a:lstStyle/>
+          <a:p>
+            <a:pPr indent="0" marL="0">
+              <a:buNone/>
+            </a:pPr>
+            <a:r>
+              <a:rPr lang="en-US" sz="3600" b="1" dirty="0">
+                <a:solidFill>
+                  <a:srgbClr val="1A1F2E"/>
+                </a:solidFill>
+                <a:latin typeface="Palatino" pitchFamily="34" charset="0"/>
+                <a:ea typeface="Palatino" pitchFamily="34" charset="-122"/>
+                <a:cs typeface="Palatino" pitchFamily="34" charset="-120"/>
               </a:rPr>
               <a:t>Why In-Flight Fission?</a:t>
             </a:r>
-            <a:endParaRPr lang="en-US" sz="2800" dirty="0"/>
-          </a:p>
-        </p:txBody>
-      </p:sp>
-      <p:sp>
-        <p:nvSpPr>
-          <p:cNvPr id="6" name="Text 4"/>
+            <a:endParaRPr lang="en-US" sz="3600" dirty="0"/>
+          </a:p>
+        </p:txBody>
+      </p:sp>
+      <p:sp>
+        <p:nvSpPr>
+          <p:cNvPr id="7" name="Text 5"/>
           <p:cNvSpPr/>
           <p:nvPr/>
         </p:nvSpPr>
@@ -2225,7 +2275,7 @@
             <a:r>
               <a:rPr lang="en-US" sz="1500" dirty="0">
                 <a:solidFill>
-                  <a:srgbClr val="1E293B"/>
+                  <a:srgbClr val="1A1F2E"/>
                 </a:solidFill>
                 <a:latin typeface="Calibri" pitchFamily="34" charset="0"/>
                 <a:ea typeface="Calibri" pitchFamily="34" charset="-122"/>
@@ -2242,7 +2292,7 @@
             <a:r>
               <a:rPr lang="en-US" sz="1500" b="1" dirty="0">
                 <a:solidFill>
-                  <a:srgbClr val="B45309"/>
+                  <a:srgbClr val="B87333"/>
                 </a:solidFill>
                 <a:latin typeface="Calibri" pitchFamily="34" charset="0"/>
                 <a:ea typeface="Calibri" pitchFamily="34" charset="-122"/>
@@ -2259,7 +2309,7 @@
             <a:r>
               <a:rPr lang="en-US" sz="1500" dirty="0">
                 <a:solidFill>
-                  <a:srgbClr val="1E293B"/>
+                  <a:srgbClr val="1A1F2E"/>
                 </a:solidFill>
                 <a:latin typeface="Calibri" pitchFamily="34" charset="0"/>
                 <a:ea typeface="Calibri" pitchFamily="34" charset="-122"/>
@@ -2276,7 +2326,7 @@
             <a:r>
               <a:rPr lang="en-US" sz="1500" b="1" dirty="0">
                 <a:solidFill>
-                  <a:srgbClr val="1E293B"/>
+                  <a:srgbClr val="1A1F2E"/>
                 </a:solidFill>
                 <a:latin typeface="Calibri" pitchFamily="34" charset="0"/>
                 <a:ea typeface="Calibri" pitchFamily="34" charset="-122"/>
@@ -2293,7 +2343,7 @@
             <a:r>
               <a:rPr lang="en-US" sz="1500" dirty="0">
                 <a:solidFill>
-                  <a:srgbClr val="1E293B"/>
+                  <a:srgbClr val="1A1F2E"/>
                 </a:solidFill>
                 <a:latin typeface="Calibri" pitchFamily="34" charset="0"/>
                 <a:ea typeface="Calibri" pitchFamily="34" charset="-122"/>
@@ -2310,7 +2360,7 @@
             <a:r>
               <a:rPr lang="en-US" sz="1500" b="1" i="1" dirty="0">
                 <a:solidFill>
-                  <a:srgbClr val="0891B2"/>
+                  <a:srgbClr val="4A7C7E"/>
                 </a:solidFill>
                 <a:latin typeface="Calibri" pitchFamily="34" charset="0"/>
                 <a:ea typeface="Calibri" pitchFamily="34" charset="-122"/>
@@ -2327,7 +2377,7 @@
             <a:r>
               <a:rPr lang="en-US" sz="1500" dirty="0">
                 <a:solidFill>
-                  <a:srgbClr val="1E293B"/>
+                  <a:srgbClr val="1A1F2E"/>
                 </a:solidFill>
                 <a:latin typeface="Calibri" pitchFamily="34" charset="0"/>
                 <a:ea typeface="Calibri" pitchFamily="34" charset="-122"/>
@@ -2347,7 +2397,7 @@
             <a:r>
               <a:rPr lang="en-US" sz="1500" dirty="0">
                 <a:solidFill>
-                  <a:srgbClr val="1E293B"/>
+                  <a:srgbClr val="1A1F2E"/>
                 </a:solidFill>
                 <a:latin typeface="Calibri" pitchFamily="34" charset="0"/>
                 <a:ea typeface="Calibri" pitchFamily="34" charset="-122"/>
@@ -2367,7 +2417,7 @@
             <a:r>
               <a:rPr lang="en-US" sz="1500" dirty="0">
                 <a:solidFill>
-                  <a:srgbClr val="1E293B"/>
+                  <a:srgbClr val="1A1F2E"/>
                 </a:solidFill>
                 <a:latin typeface="Calibri" pitchFamily="34" charset="0"/>
                 <a:ea typeface="Calibri" pitchFamily="34" charset="-122"/>
@@ -2384,7 +2434,7 @@
             <a:r>
               <a:rPr lang="en-US" sz="1500" b="1" dirty="0">
                 <a:solidFill>
-                  <a:srgbClr val="1E293B"/>
+                  <a:srgbClr val="1A1F2E"/>
                 </a:solidFill>
                 <a:latin typeface="Calibri" pitchFamily="34" charset="0"/>
                 <a:ea typeface="Calibri" pitchFamily="34" charset="-122"/>
@@ -2401,7 +2451,7 @@
             <a:r>
               <a:rPr lang="en-US" sz="1500" b="1" baseline="30000" dirty="0">
                 <a:solidFill>
-                  <a:srgbClr val="1E293B"/>
+                  <a:srgbClr val="1A1F2E"/>
                 </a:solidFill>
                 <a:latin typeface="Calibri" pitchFamily="34" charset="0"/>
                 <a:ea typeface="Calibri" pitchFamily="34" charset="-122"/>
@@ -2418,7 +2468,7 @@
             <a:r>
               <a:rPr lang="en-US" sz="1500" b="1" dirty="0">
                 <a:solidFill>
-                  <a:srgbClr val="1E293B"/>
+                  <a:srgbClr val="1A1F2E"/>
                 </a:solidFill>
                 <a:latin typeface="Calibri" pitchFamily="34" charset="0"/>
                 <a:ea typeface="Calibri" pitchFamily="34" charset="-122"/>
@@ -2435,7 +2485,7 @@
             <a:r>
               <a:rPr lang="en-US" sz="1500" dirty="0">
                 <a:solidFill>
-                  <a:srgbClr val="1E293B"/>
+                  <a:srgbClr val="1A1F2E"/>
                 </a:solidFill>
                 <a:latin typeface="Calibri" pitchFamily="34" charset="0"/>
                 <a:ea typeface="Calibri" pitchFamily="34" charset="-122"/>
@@ -2449,7 +2499,7 @@
       </p:sp>
       <p:sp>
         <p:nvSpPr>
-          <p:cNvPr id="7" name="Shape 5"/>
+          <p:cNvPr id="8" name="Shape 6"/>
           <p:cNvSpPr/>
           <p:nvPr/>
         </p:nvSpPr>
@@ -2458,22 +2508,24 @@
             <a:off x="7680960" y="1554480"/>
             <a:ext cx="4069080" cy="3474720"/>
           </a:xfrm>
-          <a:prstGeom prst="rect">
-            <a:avLst/>
+          <a:prstGeom prst="roundRect">
+            <a:avLst>
+              <a:gd name="adj" fmla="val 2105"/>
+            </a:avLst>
           </a:prstGeom>
           <a:solidFill>
             <a:srgbClr val="FFFFFF"/>
           </a:solidFill>
-          <a:ln w="9525">
+          <a:ln w="6350">
             <a:solidFill>
-              <a:srgbClr val="E2E8F0"/>
+              <a:srgbClr val="E8DFD2"/>
             </a:solidFill>
             <a:prstDash val="solid"/>
           </a:ln>
           <a:effectLst>
-            <a:outerShdw sx="100000" sy="100000" kx="0" ky="0" algn="bl" rotWithShape="0" blurRad="127000" dist="25400" dir="5400000">
-              <a:srgbClr val="000000">
-                <a:alpha val="7000"/>
+            <a:outerShdw sx="100000" sy="100000" kx="0" ky="0" algn="bl" rotWithShape="0" blurRad="177800" dist="38100" dir="5400000">
+              <a:srgbClr val="1A1F2E">
+                <a:alpha val="8000"/>
               </a:srgbClr>
             </a:outerShdw>
           </a:effectLst>
@@ -2481,24 +2533,24 @@
       </p:sp>
       <p:sp>
         <p:nvSpPr>
-          <p:cNvPr id="8" name="Shape 6"/>
-          <p:cNvSpPr/>
-          <p:nvPr/>
-        </p:nvSpPr>
-        <p:spPr>
-          <a:xfrm>
-            <a:off x="7680960" y="1554480"/>
-            <a:ext cx="73152" cy="3474720"/>
+          <p:cNvPr id="9" name="Shape 7"/>
+          <p:cNvSpPr/>
+          <p:nvPr/>
+        </p:nvSpPr>
+        <p:spPr>
+          <a:xfrm>
+            <a:off x="7680960" y="1627632"/>
+            <a:ext cx="73152" cy="3328416"/>
           </a:xfrm>
           <a:prstGeom prst="rect">
             <a:avLst/>
           </a:prstGeom>
           <a:solidFill>
-            <a:srgbClr val="F59E0B"/>
+            <a:srgbClr val="E8A33D"/>
           </a:solidFill>
           <a:ln w="12700">
             <a:solidFill>
-              <a:srgbClr val="F59E0B"/>
+              <a:srgbClr val="E8A33D"/>
             </a:solidFill>
             <a:prstDash val="solid"/>
           </a:ln>
@@ -2506,14 +2558,14 @@
       </p:sp>
       <p:sp>
         <p:nvSpPr>
-          <p:cNvPr id="9" name="Text 7"/>
-          <p:cNvSpPr/>
-          <p:nvPr/>
-        </p:nvSpPr>
-        <p:spPr>
-          <a:xfrm>
-            <a:off x="7863840" y="1691640"/>
-            <a:ext cx="3749040" cy="365760"/>
+          <p:cNvPr id="10" name="Text 8"/>
+          <p:cNvSpPr/>
+          <p:nvPr/>
+        </p:nvSpPr>
+        <p:spPr>
+          <a:xfrm>
+            <a:off x="7955280" y="1691640"/>
+            <a:ext cx="3657600" cy="365760"/>
           </a:xfrm>
           <a:prstGeom prst="rect">
             <a:avLst/>
@@ -2531,7 +2583,7 @@
             <a:r>
               <a:rPr lang="en-US" sz="1200" b="1" spc="300" kern="0" dirty="0">
                 <a:solidFill>
-                  <a:srgbClr val="64748B"/>
+                  <a:srgbClr val="8B8578"/>
                 </a:solidFill>
                 <a:latin typeface="Calibri" pitchFamily="34" charset="0"/>
                 <a:ea typeface="Calibri" pitchFamily="34" charset="-122"/>
@@ -2545,14 +2597,14 @@
       </p:sp>
       <p:sp>
         <p:nvSpPr>
-          <p:cNvPr id="10" name="Text 8"/>
-          <p:cNvSpPr/>
-          <p:nvPr/>
-        </p:nvSpPr>
-        <p:spPr>
-          <a:xfrm>
-            <a:off x="7863840" y="2057400"/>
-            <a:ext cx="3749040" cy="960120"/>
+          <p:cNvPr id="11" name="Text 9"/>
+          <p:cNvSpPr/>
+          <p:nvPr/>
+        </p:nvSpPr>
+        <p:spPr>
+          <a:xfrm>
+            <a:off x="7955280" y="2057400"/>
+            <a:ext cx="3657600" cy="960120"/>
           </a:xfrm>
           <a:prstGeom prst="rect">
             <a:avLst/>
@@ -2570,11 +2622,11 @@
             <a:r>
               <a:rPr lang="en-US" sz="6000" b="1" dirty="0">
                 <a:solidFill>
-                  <a:srgbClr val="075985"/>
-                </a:solidFill>
-                <a:latin typeface="Cambria" pitchFamily="34" charset="0"/>
-                <a:ea typeface="Cambria" pitchFamily="34" charset="-122"/>
-                <a:cs typeface="Cambria" pitchFamily="34" charset="-120"/>
+                  <a:srgbClr val="2D4A4C"/>
+                </a:solidFill>
+                <a:latin typeface="Palatino" pitchFamily="34" charset="0"/>
+                <a:ea typeface="Palatino" pitchFamily="34" charset="-122"/>
+                <a:cs typeface="Palatino" pitchFamily="34" charset="-120"/>
               </a:rPr>
               <a:t>1,460</a:t>
             </a:r>
@@ -2584,14 +2636,14 @@
       </p:sp>
       <p:sp>
         <p:nvSpPr>
-          <p:cNvPr id="11" name="Text 9"/>
-          <p:cNvSpPr/>
-          <p:nvPr/>
-        </p:nvSpPr>
-        <p:spPr>
-          <a:xfrm>
-            <a:off x="7863840" y="3063240"/>
-            <a:ext cx="3749040" cy="822960"/>
+          <p:cNvPr id="12" name="Text 10"/>
+          <p:cNvSpPr/>
+          <p:nvPr/>
+        </p:nvSpPr>
+        <p:spPr>
+          <a:xfrm>
+            <a:off x="7955280" y="3063240"/>
+            <a:ext cx="3657600" cy="822960"/>
           </a:xfrm>
           <a:prstGeom prst="rect">
             <a:avLst/>
@@ -2609,7 +2661,7 @@
             <a:r>
               <a:rPr lang="en-US" sz="1200" dirty="0">
                 <a:solidFill>
-                  <a:srgbClr val="1E293B"/>
+                  <a:srgbClr val="1A1F2E"/>
                 </a:solidFill>
                 <a:latin typeface="Calibri" pitchFamily="34" charset="0"/>
                 <a:ea typeface="Calibri" pitchFamily="34" charset="-122"/>
@@ -2623,14 +2675,14 @@
       </p:sp>
       <p:sp>
         <p:nvSpPr>
-          <p:cNvPr id="12" name="Shape 10"/>
-          <p:cNvSpPr/>
-          <p:nvPr/>
-        </p:nvSpPr>
-        <p:spPr>
-          <a:xfrm>
-            <a:off x="7863840" y="3931920"/>
-            <a:ext cx="3749040" cy="0"/>
+          <p:cNvPr id="13" name="Shape 11"/>
+          <p:cNvSpPr/>
+          <p:nvPr/>
+        </p:nvSpPr>
+        <p:spPr>
+          <a:xfrm>
+            <a:off x="7955280" y="3931920"/>
+            <a:ext cx="3657600" cy="0"/>
           </a:xfrm>
           <a:prstGeom prst="line">
             <a:avLst/>
@@ -2638,7 +2690,7 @@
           <a:noFill/>
           <a:ln w="9525">
             <a:solidFill>
-              <a:srgbClr val="E2E8F0"/>
+              <a:srgbClr val="E8DFD2"/>
             </a:solidFill>
             <a:prstDash val="solid"/>
           </a:ln>
@@ -2646,14 +2698,14 @@
       </p:sp>
       <p:sp>
         <p:nvSpPr>
-          <p:cNvPr id="13" name="Text 11"/>
-          <p:cNvSpPr/>
-          <p:nvPr/>
-        </p:nvSpPr>
-        <p:spPr>
-          <a:xfrm>
-            <a:off x="7863840" y="3977640"/>
-            <a:ext cx="3749040" cy="502920"/>
+          <p:cNvPr id="14" name="Text 12"/>
+          <p:cNvSpPr/>
+          <p:nvPr/>
+        </p:nvSpPr>
+        <p:spPr>
+          <a:xfrm>
+            <a:off x="7955280" y="3977640"/>
+            <a:ext cx="3657600" cy="502920"/>
           </a:xfrm>
           <a:prstGeom prst="rect">
             <a:avLst/>
@@ -2671,11 +2723,11 @@
             <a:r>
               <a:rPr lang="en-US" sz="3000" b="1" dirty="0">
                 <a:solidFill>
-                  <a:srgbClr val="B45309"/>
-                </a:solidFill>
-                <a:latin typeface="Cambria" pitchFamily="34" charset="0"/>
-                <a:ea typeface="Cambria" pitchFamily="34" charset="-122"/>
-                <a:cs typeface="Cambria" pitchFamily="34" charset="-120"/>
+                  <a:srgbClr val="B87333"/>
+                </a:solidFill>
+                <a:latin typeface="Palatino" pitchFamily="34" charset="0"/>
+                <a:ea typeface="Palatino" pitchFamily="34" charset="-122"/>
+                <a:cs typeface="Palatino" pitchFamily="34" charset="-120"/>
               </a:rPr>
               <a:t>~ 52 %</a:t>
             </a:r>
@@ -2685,14 +2737,14 @@
       </p:sp>
       <p:sp>
         <p:nvSpPr>
-          <p:cNvPr id="14" name="Text 12"/>
-          <p:cNvSpPr/>
-          <p:nvPr/>
-        </p:nvSpPr>
-        <p:spPr>
-          <a:xfrm>
-            <a:off x="7863840" y="4480560"/>
-            <a:ext cx="3749040" cy="502920"/>
+          <p:cNvPr id="15" name="Text 13"/>
+          <p:cNvSpPr/>
+          <p:nvPr/>
+        </p:nvSpPr>
+        <p:spPr>
+          <a:xfrm>
+            <a:off x="7955280" y="4480560"/>
+            <a:ext cx="3657600" cy="502920"/>
           </a:xfrm>
           <a:prstGeom prst="rect">
             <a:avLst/>
@@ -2710,7 +2762,7 @@
             <a:r>
               <a:rPr lang="en-US" sz="1100" dirty="0">
                 <a:solidFill>
-                  <a:srgbClr val="1E293B"/>
+                  <a:srgbClr val="1A1F2E"/>
                 </a:solidFill>
                 <a:latin typeface="Calibri" pitchFamily="34" charset="0"/>
                 <a:ea typeface="Calibri" pitchFamily="34" charset="-122"/>
@@ -2724,7 +2776,7 @@
       </p:sp>
       <p:sp>
         <p:nvSpPr>
-          <p:cNvPr id="15" name="Shape 13"/>
+          <p:cNvPr id="16" name="Shape 14"/>
           <p:cNvSpPr/>
           <p:nvPr/>
         </p:nvSpPr>
@@ -2737,11 +2789,11 @@
             <a:avLst/>
           </a:prstGeom>
           <a:solidFill>
-            <a:srgbClr val="075985"/>
+            <a:srgbClr val="2D4A4C"/>
           </a:solidFill>
           <a:ln w="12700">
             <a:solidFill>
-              <a:srgbClr val="075985"/>
+              <a:srgbClr val="2D4A4C"/>
             </a:solidFill>
             <a:prstDash val="solid"/>
           </a:ln>
@@ -2749,7 +2801,7 @@
       </p:sp>
       <p:sp>
         <p:nvSpPr>
-          <p:cNvPr id="16" name="Text 14"/>
+          <p:cNvPr id="17" name="Text 15"/>
           <p:cNvSpPr/>
           <p:nvPr/>
         </p:nvSpPr>
@@ -2774,7 +2826,7 @@
             <a:r>
               <a:rPr lang="en-US" sz="1000" b="1" spc="300" kern="0" dirty="0">
                 <a:solidFill>
-                  <a:srgbClr val="F59E0B"/>
+                  <a:srgbClr val="E8A33D"/>
                 </a:solidFill>
                 <a:latin typeface="Calibri" pitchFamily="34" charset="0"/>
                 <a:ea typeface="Calibri" pitchFamily="34" charset="-122"/>
@@ -2788,7 +2840,7 @@
       </p:sp>
       <p:sp>
         <p:nvSpPr>
-          <p:cNvPr id="17" name="Text 15"/>
+          <p:cNvPr id="18" name="Text 16"/>
           <p:cNvSpPr/>
           <p:nvPr/>
         </p:nvSpPr>
@@ -2813,7 +2865,7 @@
             <a:r>
               <a:rPr lang="en-US" sz="1000" dirty="0">
                 <a:solidFill>
-                  <a:srgbClr val="F8FAFC"/>
+                  <a:srgbClr val="F5EFE6"/>
                 </a:solidFill>
                 <a:latin typeface="Calibri" pitchFamily="34" charset="0"/>
                 <a:ea typeface="Calibri" pitchFamily="34" charset="-122"/>
@@ -2827,7 +2879,7 @@
       </p:sp>
       <p:sp>
         <p:nvSpPr>
-          <p:cNvPr id="18" name="Shape 16"/>
+          <p:cNvPr id="19" name="Shape 17"/>
           <p:cNvSpPr/>
           <p:nvPr/>
         </p:nvSpPr>
@@ -2840,11 +2892,11 @@
             <a:avLst/>
           </a:prstGeom>
           <a:solidFill>
-            <a:srgbClr val="075985"/>
+            <a:srgbClr val="2D4A4C"/>
           </a:solidFill>
           <a:ln w="12700">
             <a:solidFill>
-              <a:srgbClr val="075985"/>
+              <a:srgbClr val="2D4A4C"/>
             </a:solidFill>
             <a:prstDash val="solid"/>
           </a:ln>
@@ -2852,7 +2904,7 @@
       </p:sp>
       <p:sp>
         <p:nvSpPr>
-          <p:cNvPr id="19" name="Text 17"/>
+          <p:cNvPr id="20" name="Text 18"/>
           <p:cNvSpPr/>
           <p:nvPr/>
         </p:nvSpPr>
@@ -2877,7 +2929,7 @@
             <a:r>
               <a:rPr lang="en-US" sz="1000" b="1" spc="300" kern="0" dirty="0">
                 <a:solidFill>
-                  <a:srgbClr val="F59E0B"/>
+                  <a:srgbClr val="E8A33D"/>
                 </a:solidFill>
                 <a:latin typeface="Calibri" pitchFamily="34" charset="0"/>
                 <a:ea typeface="Calibri" pitchFamily="34" charset="-122"/>
@@ -2891,7 +2943,7 @@
       </p:sp>
       <p:sp>
         <p:nvSpPr>
-          <p:cNvPr id="20" name="Text 18"/>
+          <p:cNvPr id="21" name="Text 19"/>
           <p:cNvSpPr/>
           <p:nvPr/>
         </p:nvSpPr>
@@ -2916,7 +2968,7 @@
             <a:r>
               <a:rPr lang="en-US" sz="1000" dirty="0">
                 <a:solidFill>
-                  <a:srgbClr val="F8FAFC"/>
+                  <a:srgbClr val="F5EFE6"/>
                 </a:solidFill>
                 <a:latin typeface="Calibri" pitchFamily="34" charset="0"/>
                 <a:ea typeface="Calibri" pitchFamily="34" charset="-122"/>
@@ -2930,7 +2982,7 @@
       </p:sp>
       <p:sp>
         <p:nvSpPr>
-          <p:cNvPr id="21" name="Shape 19"/>
+          <p:cNvPr id="22" name="Shape 20"/>
           <p:cNvSpPr/>
           <p:nvPr/>
         </p:nvSpPr>
@@ -2943,11 +2995,11 @@
             <a:avLst/>
           </a:prstGeom>
           <a:solidFill>
-            <a:srgbClr val="075985"/>
+            <a:srgbClr val="2D4A4C"/>
           </a:solidFill>
           <a:ln w="12700">
             <a:solidFill>
-              <a:srgbClr val="075985"/>
+              <a:srgbClr val="2D4A4C"/>
             </a:solidFill>
             <a:prstDash val="solid"/>
           </a:ln>
@@ -2955,7 +3007,7 @@
       </p:sp>
       <p:sp>
         <p:nvSpPr>
-          <p:cNvPr id="22" name="Text 20"/>
+          <p:cNvPr id="23" name="Text 21"/>
           <p:cNvSpPr/>
           <p:nvPr/>
         </p:nvSpPr>
@@ -2980,7 +3032,7 @@
             <a:r>
               <a:rPr lang="en-US" sz="1000" b="1" spc="300" kern="0" dirty="0">
                 <a:solidFill>
-                  <a:srgbClr val="F59E0B"/>
+                  <a:srgbClr val="E8A33D"/>
                 </a:solidFill>
                 <a:latin typeface="Calibri" pitchFamily="34" charset="0"/>
                 <a:ea typeface="Calibri" pitchFamily="34" charset="-122"/>
@@ -2994,7 +3046,7 @@
       </p:sp>
       <p:sp>
         <p:nvSpPr>
-          <p:cNvPr id="23" name="Text 21"/>
+          <p:cNvPr id="24" name="Text 22"/>
           <p:cNvSpPr/>
           <p:nvPr/>
         </p:nvSpPr>
@@ -3019,7 +3071,7 @@
             <a:r>
               <a:rPr lang="en-US" sz="1000" dirty="0">
                 <a:solidFill>
-                  <a:srgbClr val="F8FAFC"/>
+                  <a:srgbClr val="F5EFE6"/>
                 </a:solidFill>
                 <a:latin typeface="Calibri" pitchFamily="34" charset="0"/>
                 <a:ea typeface="Calibri" pitchFamily="34" charset="-122"/>
@@ -3033,22 +3085,22 @@
       </p:sp>
       <p:sp>
         <p:nvSpPr>
-          <p:cNvPr id="24" name="Shape 22"/>
-          <p:cNvSpPr/>
-          <p:nvPr/>
-        </p:nvSpPr>
-        <p:spPr>
-          <a:xfrm>
-            <a:off x="457200" y="6446520"/>
-            <a:ext cx="11277295" cy="0"/>
+          <p:cNvPr id="25" name="Shape 23"/>
+          <p:cNvSpPr/>
+          <p:nvPr/>
+        </p:nvSpPr>
+        <p:spPr>
+          <a:xfrm>
+            <a:off x="502920" y="6400800"/>
+            <a:ext cx="11185855" cy="0"/>
           </a:xfrm>
           <a:prstGeom prst="line">
             <a:avLst/>
           </a:prstGeom>
           <a:noFill/>
-          <a:ln w="9525">
+          <a:ln w="6350">
             <a:solidFill>
-              <a:srgbClr val="CBD5E1"/>
+              <a:srgbClr val="D9D2C5"/>
             </a:solidFill>
             <a:prstDash val="solid"/>
           </a:ln>
@@ -3056,32 +3108,32 @@
       </p:sp>
       <p:sp>
         <p:nvSpPr>
-          <p:cNvPr id="25" name="Text 23"/>
-          <p:cNvSpPr/>
-          <p:nvPr/>
-        </p:nvSpPr>
-        <p:spPr>
-          <a:xfrm>
-            <a:off x="457200" y="6473952"/>
-            <a:ext cx="8351215" cy="292608"/>
-          </a:xfrm>
-          <a:prstGeom prst="rect">
-            <a:avLst/>
-          </a:prstGeom>
-          <a:noFill/>
-          <a:ln/>
-        </p:spPr>
-        <p:txBody>
-          <a:bodyPr wrap="square" lIns="0" tIns="0" rIns="0" bIns="0" rtlCol="0" anchor="ctr"/>
-          <a:lstStyle/>
-          <a:p>
-            <a:pPr indent="0" marL="0">
-              <a:buNone/>
-            </a:pPr>
-            <a:r>
-              <a:rPr lang="en-US" sz="900" i="1" dirty="0">
-                <a:solidFill>
-                  <a:srgbClr val="64748B"/>
+          <p:cNvPr id="26" name="Text 24"/>
+          <p:cNvSpPr/>
+          <p:nvPr/>
+        </p:nvSpPr>
+        <p:spPr>
+          <a:xfrm>
+            <a:off x="502920" y="6446520"/>
+            <a:ext cx="8259775" cy="292608"/>
+          </a:xfrm>
+          <a:prstGeom prst="rect">
+            <a:avLst/>
+          </a:prstGeom>
+          <a:noFill/>
+          <a:ln/>
+        </p:spPr>
+        <p:txBody>
+          <a:bodyPr wrap="square" lIns="0" tIns="0" rIns="0" bIns="0" rtlCol="0" anchor="ctr"/>
+          <a:lstStyle/>
+          <a:p>
+            <a:pPr indent="0" marL="0">
+              <a:buNone/>
+            </a:pPr>
+            <a:r>
+              <a:rPr lang="en-US" sz="850" i="1" dirty="0">
+                <a:solidFill>
+                  <a:srgbClr val="8B8578"/>
                 </a:solidFill>
                 <a:latin typeface="Calibri" pitchFamily="34" charset="0"/>
                 <a:ea typeface="Calibri" pitchFamily="34" charset="-122"/>
@@ -3089,19 +3141,19 @@
               </a:rPr>
               <a:t>Kubo et al., PTEP 2012, 03C003; RIBF Facility Upgrade Proposal (NCAC, 2023); RIKEN BigRIPS Team documentation.</a:t>
             </a:r>
-            <a:endParaRPr lang="en-US" sz="900" dirty="0"/>
-          </a:p>
-        </p:txBody>
-      </p:sp>
-      <p:sp>
-        <p:nvSpPr>
-          <p:cNvPr id="26" name="Text 24"/>
-          <p:cNvSpPr/>
-          <p:nvPr/>
-        </p:nvSpPr>
-        <p:spPr>
-          <a:xfrm>
-            <a:off x="8808415" y="6473952"/>
+            <a:endParaRPr lang="en-US" sz="850" dirty="0"/>
+          </a:p>
+        </p:txBody>
+      </p:sp>
+      <p:sp>
+        <p:nvSpPr>
+          <p:cNvPr id="27" name="Text 25"/>
+          <p:cNvSpPr/>
+          <p:nvPr/>
+        </p:nvSpPr>
+        <p:spPr>
+          <a:xfrm>
+            <a:off x="8808415" y="6446520"/>
             <a:ext cx="2926080" cy="292608"/>
           </a:xfrm>
           <a:prstGeom prst="rect">
@@ -3118,17 +3170,17 @@
               <a:buNone/>
             </a:pPr>
             <a:r>
-              <a:rPr lang="en-US" sz="900" dirty="0">
-                <a:solidFill>
-                  <a:srgbClr val="64748B"/>
-                </a:solidFill>
-                <a:latin typeface="Calibri" pitchFamily="34" charset="0"/>
-                <a:ea typeface="Calibri" pitchFamily="34" charset="-122"/>
-                <a:cs typeface="Calibri" pitchFamily="34" charset="-120"/>
-              </a:rPr>
-              <a:t>In-Flight Fission · OrbitOS · 2026-04</a:t>
-            </a:r>
-            <a:endParaRPr lang="en-US" sz="900" dirty="0"/>
+              <a:rPr lang="en-US" sz="850" spc="100" kern="0" dirty="0">
+                <a:solidFill>
+                  <a:srgbClr val="8B8578"/>
+                </a:solidFill>
+                <a:latin typeface="Calibri" pitchFamily="34" charset="0"/>
+                <a:ea typeface="Calibri" pitchFamily="34" charset="-122"/>
+                <a:cs typeface="Calibri" pitchFamily="34" charset="-120"/>
+              </a:rPr>
+              <a:t>In-Flight Fission  ·  OrbitOS  ·  2026-04</a:t>
+            </a:r>
+            <a:endParaRPr lang="en-US" sz="850" dirty="0"/>
           </a:p>
         </p:txBody>
       </p:sp>
@@ -3146,7 +3198,7 @@
     <p:bg>
       <p:bgPr>
         <a:solidFill>
-          <a:srgbClr val="F8FAFC"/>
+          <a:srgbClr val="FAF7F2"/>
         </a:solidFill>
       </p:bgPr>
     </p:bg>
@@ -3173,17 +3225,17 @@
         <p:spPr>
           <a:xfrm>
             <a:off x="0" y="0"/>
-            <a:ext cx="12191695" cy="109728"/>
+            <a:ext cx="274320" cy="6858000"/>
           </a:xfrm>
           <a:prstGeom prst="rect">
             <a:avLst/>
           </a:prstGeom>
           <a:solidFill>
-            <a:srgbClr val="F59E0B"/>
+            <a:srgbClr val="E8A33D"/>
           </a:solidFill>
           <a:ln w="12700">
             <a:solidFill>
-              <a:srgbClr val="F59E0B"/>
+              <a:srgbClr val="E8A33D"/>
             </a:solidFill>
             <a:prstDash val="solid"/>
           </a:ln>
@@ -3191,32 +3243,57 @@
       </p:sp>
       <p:sp>
         <p:nvSpPr>
-          <p:cNvPr id="3" name="Text 1"/>
-          <p:cNvSpPr/>
-          <p:nvPr/>
-        </p:nvSpPr>
-        <p:spPr>
-          <a:xfrm>
-            <a:off x="457200" y="256032"/>
-            <a:ext cx="8229600" cy="320040"/>
-          </a:xfrm>
-          <a:prstGeom prst="rect">
-            <a:avLst/>
-          </a:prstGeom>
-          <a:noFill/>
-          <a:ln/>
-        </p:spPr>
-        <p:txBody>
-          <a:bodyPr wrap="square" lIns="0" tIns="0" rIns="0" bIns="0" rtlCol="0" anchor="ctr"/>
-          <a:lstStyle/>
-          <a:p>
-            <a:pPr indent="0" marL="0">
-              <a:buNone/>
-            </a:pPr>
-            <a:r>
-              <a:rPr lang="en-US" sz="1100" b="1" spc="400" kern="0" dirty="0">
-                <a:solidFill>
-                  <a:srgbClr val="64748B"/>
+          <p:cNvPr id="3" name="Shape 1"/>
+          <p:cNvSpPr/>
+          <p:nvPr/>
+        </p:nvSpPr>
+        <p:spPr>
+          <a:xfrm>
+            <a:off x="0" y="0"/>
+            <a:ext cx="12191695" cy="91440"/>
+          </a:xfrm>
+          <a:prstGeom prst="rect">
+            <a:avLst/>
+          </a:prstGeom>
+          <a:solidFill>
+            <a:srgbClr val="E8A33D"/>
+          </a:solidFill>
+          <a:ln w="12700">
+            <a:solidFill>
+              <a:srgbClr val="E8A33D"/>
+            </a:solidFill>
+            <a:prstDash val="solid"/>
+          </a:ln>
+        </p:spPr>
+      </p:sp>
+      <p:sp>
+        <p:nvSpPr>
+          <p:cNvPr id="4" name="Text 2"/>
+          <p:cNvSpPr/>
+          <p:nvPr/>
+        </p:nvSpPr>
+        <p:spPr>
+          <a:xfrm>
+            <a:off x="502920" y="292608"/>
+            <a:ext cx="8686800" cy="347472"/>
+          </a:xfrm>
+          <a:prstGeom prst="rect">
+            <a:avLst/>
+          </a:prstGeom>
+          <a:noFill/>
+          <a:ln/>
+        </p:spPr>
+        <p:txBody>
+          <a:bodyPr wrap="square" lIns="0" tIns="0" rIns="0" bIns="0" rtlCol="0" anchor="ctr"/>
+          <a:lstStyle/>
+          <a:p>
+            <a:pPr indent="0" marL="0">
+              <a:buNone/>
+            </a:pPr>
+            <a:r>
+              <a:rPr lang="en-US" sz="1050" b="1" spc="600" kern="0" dirty="0">
+                <a:solidFill>
+                  <a:srgbClr val="8B8578"/>
                 </a:solidFill>
                 <a:latin typeface="Calibri" pitchFamily="34" charset="0"/>
                 <a:ea typeface="Calibri" pitchFamily="34" charset="-122"/>
@@ -3224,20 +3301,20 @@
               </a:rPr>
               <a:t>MECHANISM</a:t>
             </a:r>
-            <a:endParaRPr lang="en-US" sz="1100" dirty="0"/>
-          </a:p>
-        </p:txBody>
-      </p:sp>
-      <p:sp>
-        <p:nvSpPr>
-          <p:cNvPr id="4" name="Text 2"/>
-          <p:cNvSpPr/>
-          <p:nvPr/>
-        </p:nvSpPr>
-        <p:spPr>
-          <a:xfrm>
-            <a:off x="10728655" y="256032"/>
-            <a:ext cx="1005840" cy="320040"/>
+            <a:endParaRPr lang="en-US" sz="1050" dirty="0"/>
+          </a:p>
+        </p:txBody>
+      </p:sp>
+      <p:sp>
+        <p:nvSpPr>
+          <p:cNvPr id="5" name="Text 3"/>
+          <p:cNvSpPr/>
+          <p:nvPr/>
+        </p:nvSpPr>
+        <p:spPr>
+          <a:xfrm>
+            <a:off x="10728655" y="292608"/>
+            <a:ext cx="1005840" cy="347472"/>
           </a:xfrm>
           <a:prstGeom prst="rect">
             <a:avLst/>
@@ -3253,62 +3330,62 @@
               <a:buNone/>
             </a:pPr>
             <a:r>
-              <a:rPr lang="en-US" sz="1100" b="1" dirty="0">
-                <a:solidFill>
-                  <a:srgbClr val="64748B"/>
-                </a:solidFill>
-                <a:latin typeface="Calibri" pitchFamily="34" charset="0"/>
-                <a:ea typeface="Calibri" pitchFamily="34" charset="-122"/>
-                <a:cs typeface="Calibri" pitchFamily="34" charset="-120"/>
-              </a:rPr>
-              <a:t>03 / 09</a:t>
-            </a:r>
-            <a:endParaRPr lang="en-US" sz="1100" dirty="0"/>
-          </a:p>
-        </p:txBody>
-      </p:sp>
-      <p:sp>
-        <p:nvSpPr>
-          <p:cNvPr id="5" name="Text 3"/>
-          <p:cNvSpPr/>
-          <p:nvPr/>
-        </p:nvSpPr>
-        <p:spPr>
-          <a:xfrm>
-            <a:off x="457200" y="594360"/>
-            <a:ext cx="11247120" cy="822960"/>
-          </a:xfrm>
-          <a:prstGeom prst="rect">
-            <a:avLst/>
-          </a:prstGeom>
-          <a:noFill/>
-          <a:ln/>
-        </p:spPr>
-        <p:txBody>
-          <a:bodyPr wrap="square" lIns="0" tIns="0" rIns="0" bIns="0" rtlCol="0" anchor="ctr"/>
-          <a:lstStyle/>
-          <a:p>
-            <a:pPr indent="0" marL="0">
-              <a:buNone/>
-            </a:pPr>
-            <a:r>
-              <a:rPr lang="en-US" sz="2800" b="1" dirty="0">
-                <a:solidFill>
-                  <a:srgbClr val="1E293B"/>
-                </a:solidFill>
-                <a:latin typeface="Cambria" pitchFamily="34" charset="0"/>
-                <a:ea typeface="Cambria" pitchFamily="34" charset="-122"/>
-                <a:cs typeface="Cambria" pitchFamily="34" charset="-120"/>
+              <a:rPr lang="en-US" sz="1050" b="1" spc="200" kern="0" dirty="0">
+                <a:solidFill>
+                  <a:srgbClr val="8B8578"/>
+                </a:solidFill>
+                <a:latin typeface="Calibri" pitchFamily="34" charset="0"/>
+                <a:ea typeface="Calibri" pitchFamily="34" charset="-122"/>
+                <a:cs typeface="Calibri" pitchFamily="34" charset="-120"/>
+              </a:rPr>
+              <a:t>03  ·  09</a:t>
+            </a:r>
+            <a:endParaRPr lang="en-US" sz="1050" dirty="0"/>
+          </a:p>
+        </p:txBody>
+      </p:sp>
+      <p:sp>
+        <p:nvSpPr>
+          <p:cNvPr id="6" name="Text 4"/>
+          <p:cNvSpPr/>
+          <p:nvPr/>
+        </p:nvSpPr>
+        <p:spPr>
+          <a:xfrm>
+            <a:off x="502920" y="713232"/>
+            <a:ext cx="11155680" cy="868680"/>
+          </a:xfrm>
+          <a:prstGeom prst="rect">
+            <a:avLst/>
+          </a:prstGeom>
+          <a:noFill/>
+          <a:ln/>
+        </p:spPr>
+        <p:txBody>
+          <a:bodyPr wrap="square" lIns="0" tIns="0" rIns="0" bIns="0" rtlCol="0" anchor="ctr"/>
+          <a:lstStyle/>
+          <a:p>
+            <a:pPr indent="0" marL="0">
+              <a:buNone/>
+            </a:pPr>
+            <a:r>
+              <a:rPr lang="en-US" sz="3600" b="1" dirty="0">
+                <a:solidFill>
+                  <a:srgbClr val="1A1F2E"/>
+                </a:solidFill>
+                <a:latin typeface="Palatino" pitchFamily="34" charset="0"/>
+                <a:ea typeface="Palatino" pitchFamily="34" charset="-122"/>
+                <a:cs typeface="Palatino" pitchFamily="34" charset="-120"/>
               </a:rPr>
               <a:t>Production: Peripheral Abrasion → Fission at Relativistic Energies</a:t>
             </a:r>
-            <a:endParaRPr lang="en-US" sz="2800" dirty="0"/>
-          </a:p>
-        </p:txBody>
-      </p:sp>
-      <p:sp>
-        <p:nvSpPr>
-          <p:cNvPr id="6" name="Shape 4"/>
+            <a:endParaRPr lang="en-US" sz="3600" dirty="0"/>
+          </a:p>
+        </p:txBody>
+      </p:sp>
+      <p:sp>
+        <p:nvSpPr>
+          <p:cNvPr id="7" name="Shape 5"/>
           <p:cNvSpPr/>
           <p:nvPr/>
         </p:nvSpPr>
@@ -3325,7 +3402,7 @@
           </a:solidFill>
           <a:ln w="9525">
             <a:solidFill>
-              <a:srgbClr val="E2E8F0"/>
+              <a:srgbClr val="E8DFD2"/>
             </a:solidFill>
             <a:prstDash val="solid"/>
           </a:ln>
@@ -3340,7 +3417,7 @@
       </p:sp>
       <p:sp>
         <p:nvSpPr>
-          <p:cNvPr id="7" name="Shape 5"/>
+          <p:cNvPr id="8" name="Shape 6"/>
           <p:cNvSpPr/>
           <p:nvPr/>
         </p:nvSpPr>
@@ -3353,11 +3430,11 @@
             <a:avLst/>
           </a:prstGeom>
           <a:solidFill>
-            <a:srgbClr val="F59E0B"/>
+            <a:srgbClr val="E8A33D"/>
           </a:solidFill>
           <a:ln w="12700">
             <a:solidFill>
-              <a:srgbClr val="F59E0B"/>
+              <a:srgbClr val="E8A33D"/>
             </a:solidFill>
             <a:prstDash val="solid"/>
           </a:ln>
@@ -3365,7 +3442,7 @@
       </p:sp>
       <p:sp>
         <p:nvSpPr>
-          <p:cNvPr id="8" name="Text 6"/>
+          <p:cNvPr id="9" name="Text 7"/>
           <p:cNvSpPr/>
           <p:nvPr/>
         </p:nvSpPr>
@@ -3390,11 +3467,11 @@
             <a:r>
               <a:rPr lang="en-US" sz="1800" b="1" dirty="0">
                 <a:solidFill>
-                  <a:srgbClr val="0A1929"/>
-                </a:solidFill>
-                <a:latin typeface="Cambria" pitchFamily="34" charset="0"/>
-                <a:ea typeface="Cambria" pitchFamily="34" charset="-122"/>
-                <a:cs typeface="Cambria" pitchFamily="34" charset="-120"/>
+                  <a:srgbClr val="0B1426"/>
+                </a:solidFill>
+                <a:latin typeface="Palatino" pitchFamily="34" charset="0"/>
+                <a:ea typeface="Palatino" pitchFamily="34" charset="-122"/>
+                <a:cs typeface="Palatino" pitchFamily="34" charset="-120"/>
               </a:rPr>
               <a:t>1</a:t>
             </a:r>
@@ -3404,7 +3481,7 @@
       </p:sp>
       <p:sp>
         <p:nvSpPr>
-          <p:cNvPr id="9" name="Text 7"/>
+          <p:cNvPr id="10" name="Text 8"/>
           <p:cNvSpPr/>
           <p:nvPr/>
         </p:nvSpPr>
@@ -3429,7 +3506,7 @@
             <a:r>
               <a:rPr lang="en-US" sz="1400" b="1" dirty="0">
                 <a:solidFill>
-                  <a:srgbClr val="075985"/>
+                  <a:srgbClr val="2D4A4C"/>
                 </a:solidFill>
                 <a:latin typeface="Calibri" pitchFamily="34" charset="0"/>
                 <a:ea typeface="Calibri" pitchFamily="34" charset="-122"/>
@@ -3443,7 +3520,7 @@
       </p:sp>
       <p:sp>
         <p:nvSpPr>
-          <p:cNvPr id="10" name="Text 8"/>
+          <p:cNvPr id="11" name="Text 9"/>
           <p:cNvSpPr/>
           <p:nvPr/>
         </p:nvSpPr>
@@ -3471,7 +3548,7 @@
             <a:r>
               <a:rPr lang="en-US" sz="1100" baseline="30000" dirty="0">
                 <a:solidFill>
-                  <a:srgbClr val="1E293B"/>
+                  <a:srgbClr val="1A1F2E"/>
                 </a:solidFill>
                 <a:latin typeface="Calibri" pitchFamily="34" charset="0"/>
                 <a:ea typeface="Calibri" pitchFamily="34" charset="-122"/>
@@ -3485,7 +3562,7 @@
             <a:r>
               <a:rPr lang="en-US" sz="1100" dirty="0">
                 <a:solidFill>
-                  <a:srgbClr val="1E293B"/>
+                  <a:srgbClr val="1A1F2E"/>
                 </a:solidFill>
                 <a:latin typeface="Calibri" pitchFamily="34" charset="0"/>
                 <a:ea typeface="Calibri" pitchFamily="34" charset="-122"/>
@@ -3499,7 +3576,7 @@
       </p:sp>
       <p:sp>
         <p:nvSpPr>
-          <p:cNvPr id="11" name="Shape 9"/>
+          <p:cNvPr id="12" name="Shape 10"/>
           <p:cNvSpPr/>
           <p:nvPr/>
         </p:nvSpPr>
@@ -3514,7 +3591,7 @@
           <a:noFill/>
           <a:ln w="25400">
             <a:solidFill>
-              <a:srgbClr val="F59E0B"/>
+              <a:srgbClr val="E8A33D"/>
             </a:solidFill>
             <a:prstDash val="solid"/>
             <a:tailEnd type="triangle"/>
@@ -3523,7 +3600,7 @@
       </p:sp>
       <p:sp>
         <p:nvSpPr>
-          <p:cNvPr id="12" name="Shape 10"/>
+          <p:cNvPr id="13" name="Shape 11"/>
           <p:cNvSpPr/>
           <p:nvPr/>
         </p:nvSpPr>
@@ -3540,7 +3617,7 @@
           </a:solidFill>
           <a:ln w="9525">
             <a:solidFill>
-              <a:srgbClr val="E2E8F0"/>
+              <a:srgbClr val="E8DFD2"/>
             </a:solidFill>
             <a:prstDash val="solid"/>
           </a:ln>
@@ -3555,7 +3632,7 @@
       </p:sp>
       <p:sp>
         <p:nvSpPr>
-          <p:cNvPr id="13" name="Shape 11"/>
+          <p:cNvPr id="14" name="Shape 12"/>
           <p:cNvSpPr/>
           <p:nvPr/>
         </p:nvSpPr>
@@ -3568,11 +3645,11 @@
             <a:avLst/>
           </a:prstGeom>
           <a:solidFill>
-            <a:srgbClr val="F59E0B"/>
+            <a:srgbClr val="E8A33D"/>
           </a:solidFill>
           <a:ln w="12700">
             <a:solidFill>
-              <a:srgbClr val="F59E0B"/>
+              <a:srgbClr val="E8A33D"/>
             </a:solidFill>
             <a:prstDash val="solid"/>
           </a:ln>
@@ -3580,7 +3657,7 @@
       </p:sp>
       <p:sp>
         <p:nvSpPr>
-          <p:cNvPr id="14" name="Text 12"/>
+          <p:cNvPr id="15" name="Text 13"/>
           <p:cNvSpPr/>
           <p:nvPr/>
         </p:nvSpPr>
@@ -3605,11 +3682,11 @@
             <a:r>
               <a:rPr lang="en-US" sz="1800" b="1" dirty="0">
                 <a:solidFill>
-                  <a:srgbClr val="0A1929"/>
-                </a:solidFill>
-                <a:latin typeface="Cambria" pitchFamily="34" charset="0"/>
-                <a:ea typeface="Cambria" pitchFamily="34" charset="-122"/>
-                <a:cs typeface="Cambria" pitchFamily="34" charset="-120"/>
+                  <a:srgbClr val="0B1426"/>
+                </a:solidFill>
+                <a:latin typeface="Palatino" pitchFamily="34" charset="0"/>
+                <a:ea typeface="Palatino" pitchFamily="34" charset="-122"/>
+                <a:cs typeface="Palatino" pitchFamily="34" charset="-120"/>
               </a:rPr>
               <a:t>2</a:t>
             </a:r>
@@ -3619,7 +3696,7 @@
       </p:sp>
       <p:sp>
         <p:nvSpPr>
-          <p:cNvPr id="15" name="Text 13"/>
+          <p:cNvPr id="16" name="Text 14"/>
           <p:cNvSpPr/>
           <p:nvPr/>
         </p:nvSpPr>
@@ -3644,7 +3721,7 @@
             <a:r>
               <a:rPr lang="en-US" sz="1400" b="1" dirty="0">
                 <a:solidFill>
-                  <a:srgbClr val="075985"/>
+                  <a:srgbClr val="2D4A4C"/>
                 </a:solidFill>
                 <a:latin typeface="Calibri" pitchFamily="34" charset="0"/>
                 <a:ea typeface="Calibri" pitchFamily="34" charset="-122"/>
@@ -3658,7 +3735,7 @@
       </p:sp>
       <p:sp>
         <p:nvSpPr>
-          <p:cNvPr id="16" name="Text 14"/>
+          <p:cNvPr id="17" name="Text 15"/>
           <p:cNvSpPr/>
           <p:nvPr/>
         </p:nvSpPr>
@@ -3683,7 +3760,7 @@
             <a:r>
               <a:rPr lang="en-US" sz="1100" dirty="0">
                 <a:solidFill>
-                  <a:srgbClr val="1E293B"/>
+                  <a:srgbClr val="1A1F2E"/>
                 </a:solidFill>
                 <a:latin typeface="Calibri" pitchFamily="34" charset="0"/>
                 <a:ea typeface="Calibri" pitchFamily="34" charset="-122"/>
@@ -3697,7 +3774,7 @@
       </p:sp>
       <p:sp>
         <p:nvSpPr>
-          <p:cNvPr id="17" name="Shape 15"/>
+          <p:cNvPr id="18" name="Shape 16"/>
           <p:cNvSpPr/>
           <p:nvPr/>
         </p:nvSpPr>
@@ -3712,7 +3789,7 @@
           <a:noFill/>
           <a:ln w="25400">
             <a:solidFill>
-              <a:srgbClr val="F59E0B"/>
+              <a:srgbClr val="E8A33D"/>
             </a:solidFill>
             <a:prstDash val="solid"/>
             <a:tailEnd type="triangle"/>
@@ -3721,7 +3798,7 @@
       </p:sp>
       <p:sp>
         <p:nvSpPr>
-          <p:cNvPr id="18" name="Shape 16"/>
+          <p:cNvPr id="19" name="Shape 17"/>
           <p:cNvSpPr/>
           <p:nvPr/>
         </p:nvSpPr>
@@ -3738,7 +3815,7 @@
           </a:solidFill>
           <a:ln w="9525">
             <a:solidFill>
-              <a:srgbClr val="E2E8F0"/>
+              <a:srgbClr val="E8DFD2"/>
             </a:solidFill>
             <a:prstDash val="solid"/>
           </a:ln>
@@ -3753,7 +3830,7 @@
       </p:sp>
       <p:sp>
         <p:nvSpPr>
-          <p:cNvPr id="19" name="Shape 17"/>
+          <p:cNvPr id="20" name="Shape 18"/>
           <p:cNvSpPr/>
           <p:nvPr/>
         </p:nvSpPr>
@@ -3766,11 +3843,11 @@
             <a:avLst/>
           </a:prstGeom>
           <a:solidFill>
-            <a:srgbClr val="F59E0B"/>
+            <a:srgbClr val="E8A33D"/>
           </a:solidFill>
           <a:ln w="12700">
             <a:solidFill>
-              <a:srgbClr val="F59E0B"/>
+              <a:srgbClr val="E8A33D"/>
             </a:solidFill>
             <a:prstDash val="solid"/>
           </a:ln>
@@ -3778,7 +3855,7 @@
       </p:sp>
       <p:sp>
         <p:nvSpPr>
-          <p:cNvPr id="20" name="Text 18"/>
+          <p:cNvPr id="21" name="Text 19"/>
           <p:cNvSpPr/>
           <p:nvPr/>
         </p:nvSpPr>
@@ -3803,11 +3880,11 @@
             <a:r>
               <a:rPr lang="en-US" sz="1800" b="1" dirty="0">
                 <a:solidFill>
-                  <a:srgbClr val="0A1929"/>
-                </a:solidFill>
-                <a:latin typeface="Cambria" pitchFamily="34" charset="0"/>
-                <a:ea typeface="Cambria" pitchFamily="34" charset="-122"/>
-                <a:cs typeface="Cambria" pitchFamily="34" charset="-120"/>
+                  <a:srgbClr val="0B1426"/>
+                </a:solidFill>
+                <a:latin typeface="Palatino" pitchFamily="34" charset="0"/>
+                <a:ea typeface="Palatino" pitchFamily="34" charset="-122"/>
+                <a:cs typeface="Palatino" pitchFamily="34" charset="-120"/>
               </a:rPr>
               <a:t>3</a:t>
             </a:r>
@@ -3817,7 +3894,7 @@
       </p:sp>
       <p:sp>
         <p:nvSpPr>
-          <p:cNvPr id="21" name="Text 19"/>
+          <p:cNvPr id="22" name="Text 20"/>
           <p:cNvSpPr/>
           <p:nvPr/>
         </p:nvSpPr>
@@ -3842,7 +3919,7 @@
             <a:r>
               <a:rPr lang="en-US" sz="1400" b="1" dirty="0">
                 <a:solidFill>
-                  <a:srgbClr val="075985"/>
+                  <a:srgbClr val="2D4A4C"/>
                 </a:solidFill>
                 <a:latin typeface="Calibri" pitchFamily="34" charset="0"/>
                 <a:ea typeface="Calibri" pitchFamily="34" charset="-122"/>
@@ -3856,7 +3933,7 @@
       </p:sp>
       <p:sp>
         <p:nvSpPr>
-          <p:cNvPr id="22" name="Text 20"/>
+          <p:cNvPr id="23" name="Text 21"/>
           <p:cNvSpPr/>
           <p:nvPr/>
         </p:nvSpPr>
@@ -3881,7 +3958,7 @@
             <a:r>
               <a:rPr lang="en-US" sz="1100" dirty="0">
                 <a:solidFill>
-                  <a:srgbClr val="1E293B"/>
+                  <a:srgbClr val="1A1F2E"/>
                 </a:solidFill>
                 <a:latin typeface="Calibri" pitchFamily="34" charset="0"/>
                 <a:ea typeface="Calibri" pitchFamily="34" charset="-122"/>
@@ -3895,7 +3972,7 @@
       </p:sp>
       <p:sp>
         <p:nvSpPr>
-          <p:cNvPr id="23" name="Shape 21"/>
+          <p:cNvPr id="24" name="Shape 22"/>
           <p:cNvSpPr/>
           <p:nvPr/>
         </p:nvSpPr>
@@ -3910,7 +3987,7 @@
           <a:noFill/>
           <a:ln w="25400">
             <a:solidFill>
-              <a:srgbClr val="F59E0B"/>
+              <a:srgbClr val="E8A33D"/>
             </a:solidFill>
             <a:prstDash val="solid"/>
             <a:tailEnd type="triangle"/>
@@ -3919,7 +3996,7 @@
       </p:sp>
       <p:sp>
         <p:nvSpPr>
-          <p:cNvPr id="24" name="Shape 22"/>
+          <p:cNvPr id="25" name="Shape 23"/>
           <p:cNvSpPr/>
           <p:nvPr/>
         </p:nvSpPr>
@@ -3936,7 +4013,7 @@
           </a:solidFill>
           <a:ln w="9525">
             <a:solidFill>
-              <a:srgbClr val="E2E8F0"/>
+              <a:srgbClr val="E8DFD2"/>
             </a:solidFill>
             <a:prstDash val="solid"/>
           </a:ln>
@@ -3951,7 +4028,7 @@
       </p:sp>
       <p:sp>
         <p:nvSpPr>
-          <p:cNvPr id="25" name="Shape 23"/>
+          <p:cNvPr id="26" name="Shape 24"/>
           <p:cNvSpPr/>
           <p:nvPr/>
         </p:nvSpPr>
@@ -3964,11 +4041,11 @@
             <a:avLst/>
           </a:prstGeom>
           <a:solidFill>
-            <a:srgbClr val="F59E0B"/>
+            <a:srgbClr val="E8A33D"/>
           </a:solidFill>
           <a:ln w="12700">
             <a:solidFill>
-              <a:srgbClr val="F59E0B"/>
+              <a:srgbClr val="E8A33D"/>
             </a:solidFill>
             <a:prstDash val="solid"/>
           </a:ln>
@@ -3976,7 +4053,7 @@
       </p:sp>
       <p:sp>
         <p:nvSpPr>
-          <p:cNvPr id="26" name="Text 24"/>
+          <p:cNvPr id="27" name="Text 25"/>
           <p:cNvSpPr/>
           <p:nvPr/>
         </p:nvSpPr>
@@ -4001,11 +4078,11 @@
             <a:r>
               <a:rPr lang="en-US" sz="1800" b="1" dirty="0">
                 <a:solidFill>
-                  <a:srgbClr val="0A1929"/>
-                </a:solidFill>
-                <a:latin typeface="Cambria" pitchFamily="34" charset="0"/>
-                <a:ea typeface="Cambria" pitchFamily="34" charset="-122"/>
-                <a:cs typeface="Cambria" pitchFamily="34" charset="-120"/>
+                  <a:srgbClr val="0B1426"/>
+                </a:solidFill>
+                <a:latin typeface="Palatino" pitchFamily="34" charset="0"/>
+                <a:ea typeface="Palatino" pitchFamily="34" charset="-122"/>
+                <a:cs typeface="Palatino" pitchFamily="34" charset="-120"/>
               </a:rPr>
               <a:t>4</a:t>
             </a:r>
@@ -4015,7 +4092,7 @@
       </p:sp>
       <p:sp>
         <p:nvSpPr>
-          <p:cNvPr id="27" name="Text 25"/>
+          <p:cNvPr id="28" name="Text 26"/>
           <p:cNvSpPr/>
           <p:nvPr/>
         </p:nvSpPr>
@@ -4040,7 +4117,7 @@
             <a:r>
               <a:rPr lang="en-US" sz="1400" b="1" dirty="0">
                 <a:solidFill>
-                  <a:srgbClr val="075985"/>
+                  <a:srgbClr val="2D4A4C"/>
                 </a:solidFill>
                 <a:latin typeface="Calibri" pitchFamily="34" charset="0"/>
                 <a:ea typeface="Calibri" pitchFamily="34" charset="-122"/>
@@ -4054,7 +4131,7 @@
       </p:sp>
       <p:sp>
         <p:nvSpPr>
-          <p:cNvPr id="28" name="Text 26"/>
+          <p:cNvPr id="29" name="Text 27"/>
           <p:cNvSpPr/>
           <p:nvPr/>
         </p:nvSpPr>
@@ -4079,7 +4156,7 @@
             <a:r>
               <a:rPr lang="en-US" sz="1100" dirty="0">
                 <a:solidFill>
-                  <a:srgbClr val="1E293B"/>
+                  <a:srgbClr val="1A1F2E"/>
                 </a:solidFill>
                 <a:latin typeface="Calibri" pitchFamily="34" charset="0"/>
                 <a:ea typeface="Calibri" pitchFamily="34" charset="-122"/>
@@ -4093,7 +4170,7 @@
       </p:sp>
       <p:sp>
         <p:nvSpPr>
-          <p:cNvPr id="29" name="Shape 27"/>
+          <p:cNvPr id="30" name="Shape 28"/>
           <p:cNvSpPr/>
           <p:nvPr/>
         </p:nvSpPr>
@@ -4102,22 +4179,24 @@
             <a:off x="457200" y="3977640"/>
             <a:ext cx="5669280" cy="2148840"/>
           </a:xfrm>
-          <a:prstGeom prst="rect">
-            <a:avLst/>
+          <a:prstGeom prst="roundRect">
+            <a:avLst>
+              <a:gd name="adj" fmla="val 3404"/>
+            </a:avLst>
           </a:prstGeom>
           <a:solidFill>
             <a:srgbClr val="FFFFFF"/>
           </a:solidFill>
-          <a:ln w="9525">
+          <a:ln w="6350">
             <a:solidFill>
-              <a:srgbClr val="E2E8F0"/>
+              <a:srgbClr val="E8DFD2"/>
             </a:solidFill>
             <a:prstDash val="solid"/>
           </a:ln>
           <a:effectLst>
-            <a:outerShdw sx="100000" sy="100000" kx="0" ky="0" algn="bl" rotWithShape="0" blurRad="127000" dist="25400" dir="5400000">
-              <a:srgbClr val="000000">
-                <a:alpha val="7000"/>
+            <a:outerShdw sx="100000" sy="100000" kx="0" ky="0" algn="bl" rotWithShape="0" blurRad="177800" dist="38100" dir="5400000">
+              <a:srgbClr val="1A1F2E">
+                <a:alpha val="8000"/>
               </a:srgbClr>
             </a:outerShdw>
           </a:effectLst>
@@ -4125,24 +4204,24 @@
       </p:sp>
       <p:sp>
         <p:nvSpPr>
-          <p:cNvPr id="30" name="Shape 28"/>
-          <p:cNvSpPr/>
-          <p:nvPr/>
-        </p:nvSpPr>
-        <p:spPr>
-          <a:xfrm>
-            <a:off x="457200" y="3977640"/>
-            <a:ext cx="73152" cy="2148840"/>
+          <p:cNvPr id="31" name="Shape 29"/>
+          <p:cNvSpPr/>
+          <p:nvPr/>
+        </p:nvSpPr>
+        <p:spPr>
+          <a:xfrm>
+            <a:off x="457200" y="4050792"/>
+            <a:ext cx="73152" cy="2002536"/>
           </a:xfrm>
           <a:prstGeom prst="rect">
             <a:avLst/>
           </a:prstGeom>
           <a:solidFill>
-            <a:srgbClr val="0891B2"/>
+            <a:srgbClr val="4A7C7E"/>
           </a:solidFill>
           <a:ln w="12700">
             <a:solidFill>
-              <a:srgbClr val="0891B2"/>
+              <a:srgbClr val="4A7C7E"/>
             </a:solidFill>
             <a:prstDash val="solid"/>
           </a:ln>
@@ -4150,7 +4229,7 @@
       </p:sp>
       <p:sp>
         <p:nvSpPr>
-          <p:cNvPr id="31" name="Text 29"/>
+          <p:cNvPr id="32" name="Text 30"/>
           <p:cNvSpPr/>
           <p:nvPr/>
         </p:nvSpPr>
@@ -4175,7 +4254,7 @@
             <a:r>
               <a:rPr lang="en-US" sz="1200" b="1" spc="300" kern="0" dirty="0">
                 <a:solidFill>
-                  <a:srgbClr val="64748B"/>
+                  <a:srgbClr val="8B8578"/>
                 </a:solidFill>
                 <a:latin typeface="Calibri" pitchFamily="34" charset="0"/>
                 <a:ea typeface="Calibri" pitchFamily="34" charset="-122"/>
@@ -4189,7 +4268,7 @@
       </p:sp>
       <p:sp>
         <p:nvSpPr>
-          <p:cNvPr id="32" name="Text 30"/>
+          <p:cNvPr id="33" name="Text 31"/>
           <p:cNvSpPr/>
           <p:nvPr/>
         </p:nvSpPr>
@@ -4217,7 +4296,7 @@
             <a:r>
               <a:rPr lang="en-US" sz="1300" b="1" dirty="0">
                 <a:solidFill>
-                  <a:srgbClr val="1E293B"/>
+                  <a:srgbClr val="1A1F2E"/>
                 </a:solidFill>
                 <a:latin typeface="Calibri" pitchFamily="34" charset="0"/>
                 <a:ea typeface="Calibri" pitchFamily="34" charset="-122"/>
@@ -4238,7 +4317,7 @@
             <a:r>
               <a:rPr lang="en-US" sz="1300" dirty="0">
                 <a:solidFill>
-                  <a:srgbClr val="1E293B"/>
+                  <a:srgbClr val="1A1F2E"/>
                 </a:solidFill>
                 <a:latin typeface="Calibri" pitchFamily="34" charset="0"/>
                 <a:ea typeface="Calibri" pitchFamily="34" charset="-122"/>
@@ -4259,7 +4338,7 @@
             <a:r>
               <a:rPr lang="en-US" sz="1300" dirty="0">
                 <a:solidFill>
-                  <a:srgbClr val="1E293B"/>
+                  <a:srgbClr val="1A1F2E"/>
                 </a:solidFill>
                 <a:latin typeface="Calibri" pitchFamily="34" charset="0"/>
                 <a:ea typeface="Calibri" pitchFamily="34" charset="-122"/>
@@ -4280,7 +4359,7 @@
             <a:r>
               <a:rPr lang="en-US" sz="1300" dirty="0">
                 <a:solidFill>
-                  <a:srgbClr val="1E293B"/>
+                  <a:srgbClr val="1A1F2E"/>
                 </a:solidFill>
                 <a:latin typeface="Calibri" pitchFamily="34" charset="0"/>
                 <a:ea typeface="Calibri" pitchFamily="34" charset="-122"/>
@@ -4294,7 +4373,7 @@
       </p:sp>
       <p:sp>
         <p:nvSpPr>
-          <p:cNvPr id="33" name="Shape 31"/>
+          <p:cNvPr id="34" name="Shape 32"/>
           <p:cNvSpPr/>
           <p:nvPr/>
         </p:nvSpPr>
@@ -4303,22 +4382,24 @@
             <a:off x="6309360" y="3977640"/>
             <a:ext cx="5440680" cy="2148840"/>
           </a:xfrm>
-          <a:prstGeom prst="rect">
-            <a:avLst/>
+          <a:prstGeom prst="roundRect">
+            <a:avLst>
+              <a:gd name="adj" fmla="val 3404"/>
+            </a:avLst>
           </a:prstGeom>
           <a:solidFill>
             <a:srgbClr val="FFFFFF"/>
           </a:solidFill>
-          <a:ln w="9525">
+          <a:ln w="6350">
             <a:solidFill>
-              <a:srgbClr val="E2E8F0"/>
+              <a:srgbClr val="E8DFD2"/>
             </a:solidFill>
             <a:prstDash val="solid"/>
           </a:ln>
           <a:effectLst>
-            <a:outerShdw sx="100000" sy="100000" kx="0" ky="0" algn="bl" rotWithShape="0" blurRad="127000" dist="25400" dir="5400000">
-              <a:srgbClr val="000000">
-                <a:alpha val="7000"/>
+            <a:outerShdw sx="100000" sy="100000" kx="0" ky="0" algn="bl" rotWithShape="0" blurRad="177800" dist="38100" dir="5400000">
+              <a:srgbClr val="1A1F2E">
+                <a:alpha val="8000"/>
               </a:srgbClr>
             </a:outerShdw>
           </a:effectLst>
@@ -4326,24 +4407,24 @@
       </p:sp>
       <p:sp>
         <p:nvSpPr>
-          <p:cNvPr id="34" name="Shape 32"/>
-          <p:cNvSpPr/>
-          <p:nvPr/>
-        </p:nvSpPr>
-        <p:spPr>
-          <a:xfrm>
-            <a:off x="6309360" y="3977640"/>
-            <a:ext cx="73152" cy="2148840"/>
+          <p:cNvPr id="35" name="Shape 33"/>
+          <p:cNvSpPr/>
+          <p:nvPr/>
+        </p:nvSpPr>
+        <p:spPr>
+          <a:xfrm>
+            <a:off x="6309360" y="4050792"/>
+            <a:ext cx="73152" cy="2002536"/>
           </a:xfrm>
           <a:prstGeom prst="rect">
             <a:avLst/>
           </a:prstGeom>
           <a:solidFill>
-            <a:srgbClr val="F59E0B"/>
+            <a:srgbClr val="E8A33D"/>
           </a:solidFill>
           <a:ln w="12700">
             <a:solidFill>
-              <a:srgbClr val="F59E0B"/>
+              <a:srgbClr val="E8A33D"/>
             </a:solidFill>
             <a:prstDash val="solid"/>
           </a:ln>
@@ -4351,7 +4432,7 @@
       </p:sp>
       <p:sp>
         <p:nvSpPr>
-          <p:cNvPr id="35" name="Text 33"/>
+          <p:cNvPr id="36" name="Text 34"/>
           <p:cNvSpPr/>
           <p:nvPr/>
         </p:nvSpPr>
@@ -4376,7 +4457,7 @@
             <a:r>
               <a:rPr lang="en-US" sz="1200" b="1" spc="300" kern="0" dirty="0">
                 <a:solidFill>
-                  <a:srgbClr val="64748B"/>
+                  <a:srgbClr val="8B8578"/>
                 </a:solidFill>
                 <a:latin typeface="Calibri" pitchFamily="34" charset="0"/>
                 <a:ea typeface="Calibri" pitchFamily="34" charset="-122"/>
@@ -4426,7 +4507,7 @@
                       <a:r>
                         <a:rPr lang="en-US" sz="1200" dirty="0">
                           <a:solidFill>
-                            <a:srgbClr val="1E293B"/>
+                            <a:srgbClr val="1A1F2E"/>
                           </a:solidFill>
                           <a:latin typeface="Calibri" pitchFamily="34" charset="0"/>
                           <a:ea typeface="Calibri" pitchFamily="34" charset="-122"/>
@@ -4444,7 +4525,7 @@
                   <a:tcPr marL="91440" marR="91440" marT="45720" marB="45720">
                     <a:lnL w="6350" cap="flat" cmpd="sng" algn="ctr">
                       <a:solidFill>
-                        <a:srgbClr val="E2E8F0"/>
+                        <a:srgbClr val="E8DFD2"/>
                       </a:solidFill>
                       <a:prstDash val="solid"/>
                       <a:round/>
@@ -4453,7 +4534,7 @@
                     </a:lnL>
                     <a:lnR w="6350" cap="flat" cmpd="sng" algn="ctr">
                       <a:solidFill>
-                        <a:srgbClr val="E2E8F0"/>
+                        <a:srgbClr val="E8DFD2"/>
                       </a:solidFill>
                       <a:prstDash val="solid"/>
                       <a:round/>
@@ -4462,7 +4543,7 @@
                     </a:lnR>
                     <a:lnT w="6350" cap="flat" cmpd="sng" algn="ctr">
                       <a:solidFill>
-                        <a:srgbClr val="E2E8F0"/>
+                        <a:srgbClr val="E8DFD2"/>
                       </a:solidFill>
                       <a:prstDash val="solid"/>
                       <a:round/>
@@ -4471,7 +4552,7 @@
                     </a:lnT>
                     <a:lnB w="6350" cap="flat" cmpd="sng" algn="ctr">
                       <a:solidFill>
-                        <a:srgbClr val="E2E8F0"/>
+                        <a:srgbClr val="E8DFD2"/>
                       </a:solidFill>
                       <a:prstDash val="solid"/>
                       <a:round/>
@@ -4491,7 +4572,7 @@
                       <a:r>
                         <a:rPr lang="en-US" sz="1200" b="1" dirty="0">
                           <a:solidFill>
-                            <a:srgbClr val="B45309"/>
+                            <a:srgbClr val="B87333"/>
                           </a:solidFill>
                           <a:latin typeface="Calibri" pitchFamily="34" charset="0"/>
                           <a:ea typeface="Calibri" pitchFamily="34" charset="-122"/>
@@ -4509,7 +4590,7 @@
                   <a:tcPr marL="91440" marR="91440" marT="45720" marB="45720">
                     <a:lnL w="6350" cap="flat" cmpd="sng" algn="ctr">
                       <a:solidFill>
-                        <a:srgbClr val="E2E8F0"/>
+                        <a:srgbClr val="E8DFD2"/>
                       </a:solidFill>
                       <a:prstDash val="solid"/>
                       <a:round/>
@@ -4518,7 +4599,7 @@
                     </a:lnL>
                     <a:lnR w="6350" cap="flat" cmpd="sng" algn="ctr">
                       <a:solidFill>
-                        <a:srgbClr val="E2E8F0"/>
+                        <a:srgbClr val="E8DFD2"/>
                       </a:solidFill>
                       <a:prstDash val="solid"/>
                       <a:round/>
@@ -4527,7 +4608,7 @@
                     </a:lnR>
                     <a:lnT w="6350" cap="flat" cmpd="sng" algn="ctr">
                       <a:solidFill>
-                        <a:srgbClr val="E2E8F0"/>
+                        <a:srgbClr val="E8DFD2"/>
                       </a:solidFill>
                       <a:prstDash val="solid"/>
                       <a:round/>
@@ -4536,7 +4617,7 @@
                     </a:lnT>
                     <a:lnB w="6350" cap="flat" cmpd="sng" algn="ctr">
                       <a:solidFill>
-                        <a:srgbClr val="E2E8F0"/>
+                        <a:srgbClr val="E8DFD2"/>
                       </a:solidFill>
                       <a:prstDash val="solid"/>
                       <a:round/>
@@ -4558,7 +4639,7 @@
                       <a:r>
                         <a:rPr lang="en-US" sz="1200" dirty="0">
                           <a:solidFill>
-                            <a:srgbClr val="1E293B"/>
+                            <a:srgbClr val="1A1F2E"/>
                           </a:solidFill>
                           <a:latin typeface="Calibri" pitchFamily="34" charset="0"/>
                           <a:ea typeface="Calibri" pitchFamily="34" charset="-122"/>
@@ -4576,7 +4657,7 @@
                   <a:tcPr marL="91440" marR="91440" marT="45720" marB="45720">
                     <a:lnL w="6350" cap="flat" cmpd="sng" algn="ctr">
                       <a:solidFill>
-                        <a:srgbClr val="E2E8F0"/>
+                        <a:srgbClr val="E8DFD2"/>
                       </a:solidFill>
                       <a:prstDash val="solid"/>
                       <a:round/>
@@ -4585,7 +4666,7 @@
                     </a:lnL>
                     <a:lnR w="6350" cap="flat" cmpd="sng" algn="ctr">
                       <a:solidFill>
-                        <a:srgbClr val="E2E8F0"/>
+                        <a:srgbClr val="E8DFD2"/>
                       </a:solidFill>
                       <a:prstDash val="solid"/>
                       <a:round/>
@@ -4594,7 +4675,7 @@
                     </a:lnR>
                     <a:lnT w="6350" cap="flat" cmpd="sng" algn="ctr">
                       <a:solidFill>
-                        <a:srgbClr val="E2E8F0"/>
+                        <a:srgbClr val="E8DFD2"/>
                       </a:solidFill>
                       <a:prstDash val="solid"/>
                       <a:round/>
@@ -4603,7 +4684,7 @@
                     </a:lnT>
                     <a:lnB w="6350" cap="flat" cmpd="sng" algn="ctr">
                       <a:solidFill>
-                        <a:srgbClr val="E2E8F0"/>
+                        <a:srgbClr val="E8DFD2"/>
                       </a:solidFill>
                       <a:prstDash val="solid"/>
                       <a:round/>
@@ -4623,7 +4704,7 @@
                       <a:r>
                         <a:rPr lang="en-US" sz="1200" b="1" dirty="0">
                           <a:solidFill>
-                            <a:srgbClr val="B45309"/>
+                            <a:srgbClr val="B87333"/>
                           </a:solidFill>
                           <a:latin typeface="Calibri" pitchFamily="34" charset="0"/>
                           <a:ea typeface="Calibri" pitchFamily="34" charset="-122"/>
@@ -4641,7 +4722,7 @@
                   <a:tcPr marL="91440" marR="91440" marT="45720" marB="45720">
                     <a:lnL w="6350" cap="flat" cmpd="sng" algn="ctr">
                       <a:solidFill>
-                        <a:srgbClr val="E2E8F0"/>
+                        <a:srgbClr val="E8DFD2"/>
                       </a:solidFill>
                       <a:prstDash val="solid"/>
                       <a:round/>
@@ -4650,7 +4731,7 @@
                     </a:lnL>
                     <a:lnR w="6350" cap="flat" cmpd="sng" algn="ctr">
                       <a:solidFill>
-                        <a:srgbClr val="E2E8F0"/>
+                        <a:srgbClr val="E8DFD2"/>
                       </a:solidFill>
                       <a:prstDash val="solid"/>
                       <a:round/>
@@ -4659,7 +4740,7 @@
                     </a:lnR>
                     <a:lnT w="6350" cap="flat" cmpd="sng" algn="ctr">
                       <a:solidFill>
-                        <a:srgbClr val="E2E8F0"/>
+                        <a:srgbClr val="E8DFD2"/>
                       </a:solidFill>
                       <a:prstDash val="solid"/>
                       <a:round/>
@@ -4668,7 +4749,7 @@
                     </a:lnT>
                     <a:lnB w="6350" cap="flat" cmpd="sng" algn="ctr">
                       <a:solidFill>
-                        <a:srgbClr val="E2E8F0"/>
+                        <a:srgbClr val="E8DFD2"/>
                       </a:solidFill>
                       <a:prstDash val="solid"/>
                       <a:round/>
@@ -4690,7 +4771,7 @@
                       <a:r>
                         <a:rPr lang="en-US" sz="1200" dirty="0">
                           <a:solidFill>
-                            <a:srgbClr val="1E293B"/>
+                            <a:srgbClr val="1A1F2E"/>
                           </a:solidFill>
                           <a:latin typeface="Calibri" pitchFamily="34" charset="0"/>
                           <a:ea typeface="Calibri" pitchFamily="34" charset="-122"/>
@@ -4708,7 +4789,7 @@
                   <a:tcPr marL="91440" marR="91440" marT="45720" marB="45720">
                     <a:lnL w="6350" cap="flat" cmpd="sng" algn="ctr">
                       <a:solidFill>
-                        <a:srgbClr val="E2E8F0"/>
+                        <a:srgbClr val="E8DFD2"/>
                       </a:solidFill>
                       <a:prstDash val="solid"/>
                       <a:round/>
@@ -4717,7 +4798,7 @@
                     </a:lnL>
                     <a:lnR w="6350" cap="flat" cmpd="sng" algn="ctr">
                       <a:solidFill>
-                        <a:srgbClr val="E2E8F0"/>
+                        <a:srgbClr val="E8DFD2"/>
                       </a:solidFill>
                       <a:prstDash val="solid"/>
                       <a:round/>
@@ -4726,7 +4807,7 @@
                     </a:lnR>
                     <a:lnT w="6350" cap="flat" cmpd="sng" algn="ctr">
                       <a:solidFill>
-                        <a:srgbClr val="E2E8F0"/>
+                        <a:srgbClr val="E8DFD2"/>
                       </a:solidFill>
                       <a:prstDash val="solid"/>
                       <a:round/>
@@ -4735,7 +4816,7 @@
                     </a:lnT>
                     <a:lnB w="6350" cap="flat" cmpd="sng" algn="ctr">
                       <a:solidFill>
-                        <a:srgbClr val="E2E8F0"/>
+                        <a:srgbClr val="E8DFD2"/>
                       </a:solidFill>
                       <a:prstDash val="solid"/>
                       <a:round/>
@@ -4755,7 +4836,7 @@
                       <a:r>
                         <a:rPr lang="en-US" sz="1200" b="1" dirty="0">
                           <a:solidFill>
-                            <a:srgbClr val="B45309"/>
+                            <a:srgbClr val="B87333"/>
                           </a:solidFill>
                           <a:latin typeface="Calibri" pitchFamily="34" charset="0"/>
                           <a:ea typeface="Calibri" pitchFamily="34" charset="-122"/>
@@ -4773,7 +4854,7 @@
                   <a:tcPr marL="91440" marR="91440" marT="45720" marB="45720">
                     <a:lnL w="6350" cap="flat" cmpd="sng" algn="ctr">
                       <a:solidFill>
-                        <a:srgbClr val="E2E8F0"/>
+                        <a:srgbClr val="E8DFD2"/>
                       </a:solidFill>
                       <a:prstDash val="solid"/>
                       <a:round/>
@@ -4782,7 +4863,7 @@
                     </a:lnL>
                     <a:lnR w="6350" cap="flat" cmpd="sng" algn="ctr">
                       <a:solidFill>
-                        <a:srgbClr val="E2E8F0"/>
+                        <a:srgbClr val="E8DFD2"/>
                       </a:solidFill>
                       <a:prstDash val="solid"/>
                       <a:round/>
@@ -4791,7 +4872,7 @@
                     </a:lnR>
                     <a:lnT w="6350" cap="flat" cmpd="sng" algn="ctr">
                       <a:solidFill>
-                        <a:srgbClr val="E2E8F0"/>
+                        <a:srgbClr val="E8DFD2"/>
                       </a:solidFill>
                       <a:prstDash val="solid"/>
                       <a:round/>
@@ -4800,7 +4881,7 @@
                     </a:lnT>
                     <a:lnB w="6350" cap="flat" cmpd="sng" algn="ctr">
                       <a:solidFill>
-                        <a:srgbClr val="E2E8F0"/>
+                        <a:srgbClr val="E8DFD2"/>
                       </a:solidFill>
                       <a:prstDash val="solid"/>
                       <a:round/>
@@ -4822,7 +4903,7 @@
                       <a:r>
                         <a:rPr lang="en-US" sz="1200" dirty="0">
                           <a:solidFill>
-                            <a:srgbClr val="1E293B"/>
+                            <a:srgbClr val="1A1F2E"/>
                           </a:solidFill>
                           <a:latin typeface="Calibri" pitchFamily="34" charset="0"/>
                           <a:ea typeface="Calibri" pitchFamily="34" charset="-122"/>
@@ -4840,7 +4921,7 @@
                   <a:tcPr marL="91440" marR="91440" marT="45720" marB="45720">
                     <a:lnL w="6350" cap="flat" cmpd="sng" algn="ctr">
                       <a:solidFill>
-                        <a:srgbClr val="E2E8F0"/>
+                        <a:srgbClr val="E8DFD2"/>
                       </a:solidFill>
                       <a:prstDash val="solid"/>
                       <a:round/>
@@ -4849,7 +4930,7 @@
                     </a:lnL>
                     <a:lnR w="6350" cap="flat" cmpd="sng" algn="ctr">
                       <a:solidFill>
-                        <a:srgbClr val="E2E8F0"/>
+                        <a:srgbClr val="E8DFD2"/>
                       </a:solidFill>
                       <a:prstDash val="solid"/>
                       <a:round/>
@@ -4858,7 +4939,7 @@
                     </a:lnR>
                     <a:lnT w="6350" cap="flat" cmpd="sng" algn="ctr">
                       <a:solidFill>
-                        <a:srgbClr val="E2E8F0"/>
+                        <a:srgbClr val="E8DFD2"/>
                       </a:solidFill>
                       <a:prstDash val="solid"/>
                       <a:round/>
@@ -4867,7 +4948,7 @@
                     </a:lnT>
                     <a:lnB w="6350" cap="flat" cmpd="sng" algn="ctr">
                       <a:solidFill>
-                        <a:srgbClr val="E2E8F0"/>
+                        <a:srgbClr val="E8DFD2"/>
                       </a:solidFill>
                       <a:prstDash val="solid"/>
                       <a:round/>
@@ -4887,7 +4968,7 @@
                       <a:r>
                         <a:rPr lang="en-US" sz="1200" b="1" dirty="0">
                           <a:solidFill>
-                            <a:srgbClr val="B45309"/>
+                            <a:srgbClr val="B87333"/>
                           </a:solidFill>
                           <a:latin typeface="Calibri" pitchFamily="34" charset="0"/>
                           <a:ea typeface="Calibri" pitchFamily="34" charset="-122"/>
@@ -4905,7 +4986,7 @@
                   <a:tcPr marL="91440" marR="91440" marT="45720" marB="45720">
                     <a:lnL w="6350" cap="flat" cmpd="sng" algn="ctr">
                       <a:solidFill>
-                        <a:srgbClr val="E2E8F0"/>
+                        <a:srgbClr val="E8DFD2"/>
                       </a:solidFill>
                       <a:prstDash val="solid"/>
                       <a:round/>
@@ -4914,7 +4995,7 @@
                     </a:lnL>
                     <a:lnR w="6350" cap="flat" cmpd="sng" algn="ctr">
                       <a:solidFill>
-                        <a:srgbClr val="E2E8F0"/>
+                        <a:srgbClr val="E8DFD2"/>
                       </a:solidFill>
                       <a:prstDash val="solid"/>
                       <a:round/>
@@ -4923,7 +5004,7 @@
                     </a:lnR>
                     <a:lnT w="6350" cap="flat" cmpd="sng" algn="ctr">
                       <a:solidFill>
-                        <a:srgbClr val="E2E8F0"/>
+                        <a:srgbClr val="E8DFD2"/>
                       </a:solidFill>
                       <a:prstDash val="solid"/>
                       <a:round/>
@@ -4932,7 +5013,7 @@
                     </a:lnT>
                     <a:lnB w="6350" cap="flat" cmpd="sng" algn="ctr">
                       <a:solidFill>
-                        <a:srgbClr val="E2E8F0"/>
+                        <a:srgbClr val="E8DFD2"/>
                       </a:solidFill>
                       <a:prstDash val="solid"/>
                       <a:round/>
@@ -4948,22 +5029,22 @@
       </p:graphicFrame>
       <p:sp>
         <p:nvSpPr>
-          <p:cNvPr id="37" name="Shape 34"/>
-          <p:cNvSpPr/>
-          <p:nvPr/>
-        </p:nvSpPr>
-        <p:spPr>
-          <a:xfrm>
-            <a:off x="457200" y="6446520"/>
-            <a:ext cx="11277295" cy="0"/>
+          <p:cNvPr id="38" name="Shape 35"/>
+          <p:cNvSpPr/>
+          <p:nvPr/>
+        </p:nvSpPr>
+        <p:spPr>
+          <a:xfrm>
+            <a:off x="502920" y="6400800"/>
+            <a:ext cx="11185855" cy="0"/>
           </a:xfrm>
           <a:prstGeom prst="line">
             <a:avLst/>
           </a:prstGeom>
           <a:noFill/>
-          <a:ln w="9525">
+          <a:ln w="6350">
             <a:solidFill>
-              <a:srgbClr val="CBD5E1"/>
+              <a:srgbClr val="D9D2C5"/>
             </a:solidFill>
             <a:prstDash val="solid"/>
           </a:ln>
@@ -4971,32 +5052,32 @@
       </p:sp>
       <p:sp>
         <p:nvSpPr>
-          <p:cNvPr id="38" name="Text 35"/>
-          <p:cNvSpPr/>
-          <p:nvPr/>
-        </p:nvSpPr>
-        <p:spPr>
-          <a:xfrm>
-            <a:off x="457200" y="6473952"/>
-            <a:ext cx="8351215" cy="292608"/>
-          </a:xfrm>
-          <a:prstGeom prst="rect">
-            <a:avLst/>
-          </a:prstGeom>
-          <a:noFill/>
-          <a:ln/>
-        </p:spPr>
-        <p:txBody>
-          <a:bodyPr wrap="square" lIns="0" tIns="0" rIns="0" bIns="0" rtlCol="0" anchor="ctr"/>
-          <a:lstStyle/>
-          <a:p>
-            <a:pPr indent="0" marL="0">
-              <a:buNone/>
-            </a:pPr>
-            <a:r>
-              <a:rPr lang="en-US" sz="900" i="1" dirty="0">
-                <a:solidFill>
-                  <a:srgbClr val="64748B"/>
+          <p:cNvPr id="39" name="Text 36"/>
+          <p:cNvSpPr/>
+          <p:nvPr/>
+        </p:nvSpPr>
+        <p:spPr>
+          <a:xfrm>
+            <a:off x="502920" y="6446520"/>
+            <a:ext cx="8259775" cy="292608"/>
+          </a:xfrm>
+          <a:prstGeom prst="rect">
+            <a:avLst/>
+          </a:prstGeom>
+          <a:noFill/>
+          <a:ln/>
+        </p:spPr>
+        <p:txBody>
+          <a:bodyPr wrap="square" lIns="0" tIns="0" rIns="0" bIns="0" rtlCol="0" anchor="ctr"/>
+          <a:lstStyle/>
+          <a:p>
+            <a:pPr indent="0" marL="0">
+              <a:buNone/>
+            </a:pPr>
+            <a:r>
+              <a:rPr lang="en-US" sz="850" i="1" dirty="0">
+                <a:solidFill>
+                  <a:srgbClr val="8B8578"/>
                 </a:solidFill>
                 <a:latin typeface="Calibri" pitchFamily="34" charset="0"/>
                 <a:ea typeface="Calibri" pitchFamily="34" charset="-122"/>
@@ -5004,19 +5085,19 @@
               </a:rPr>
               <a:t>T. Kubo et al., “BigRIPS separator and ZeroDegree spectrometer at RIKEN RI Beam Factory,” PTEP 2012, 03C003.</a:t>
             </a:r>
-            <a:endParaRPr lang="en-US" sz="900" dirty="0"/>
-          </a:p>
-        </p:txBody>
-      </p:sp>
-      <p:sp>
-        <p:nvSpPr>
-          <p:cNvPr id="39" name="Text 36"/>
-          <p:cNvSpPr/>
-          <p:nvPr/>
-        </p:nvSpPr>
-        <p:spPr>
-          <a:xfrm>
-            <a:off x="8808415" y="6473952"/>
+            <a:endParaRPr lang="en-US" sz="850" dirty="0"/>
+          </a:p>
+        </p:txBody>
+      </p:sp>
+      <p:sp>
+        <p:nvSpPr>
+          <p:cNvPr id="40" name="Text 37"/>
+          <p:cNvSpPr/>
+          <p:nvPr/>
+        </p:nvSpPr>
+        <p:spPr>
+          <a:xfrm>
+            <a:off x="8808415" y="6446520"/>
             <a:ext cx="2926080" cy="292608"/>
           </a:xfrm>
           <a:prstGeom prst="rect">
@@ -5033,17 +5114,17 @@
               <a:buNone/>
             </a:pPr>
             <a:r>
-              <a:rPr lang="en-US" sz="900" dirty="0">
-                <a:solidFill>
-                  <a:srgbClr val="64748B"/>
-                </a:solidFill>
-                <a:latin typeface="Calibri" pitchFamily="34" charset="0"/>
-                <a:ea typeface="Calibri" pitchFamily="34" charset="-122"/>
-                <a:cs typeface="Calibri" pitchFamily="34" charset="-120"/>
-              </a:rPr>
-              <a:t>In-Flight Fission · OrbitOS · 2026-04</a:t>
-            </a:r>
-            <a:endParaRPr lang="en-US" sz="900" dirty="0"/>
+              <a:rPr lang="en-US" sz="850" spc="100" kern="0" dirty="0">
+                <a:solidFill>
+                  <a:srgbClr val="8B8578"/>
+                </a:solidFill>
+                <a:latin typeface="Calibri" pitchFamily="34" charset="0"/>
+                <a:ea typeface="Calibri" pitchFamily="34" charset="-122"/>
+                <a:cs typeface="Calibri" pitchFamily="34" charset="-120"/>
+              </a:rPr>
+              <a:t>In-Flight Fission  ·  OrbitOS  ·  2026-04</a:t>
+            </a:r>
+            <a:endParaRPr lang="en-US" sz="850" dirty="0"/>
           </a:p>
         </p:txBody>
       </p:sp>
@@ -5061,7 +5142,7 @@
     <p:bg>
       <p:bgPr>
         <a:solidFill>
-          <a:srgbClr val="F8FAFC"/>
+          <a:srgbClr val="FAF7F2"/>
         </a:solidFill>
       </p:bgPr>
     </p:bg>
@@ -5088,17 +5169,17 @@
         <p:spPr>
           <a:xfrm>
             <a:off x="0" y="0"/>
-            <a:ext cx="12191695" cy="109728"/>
+            <a:ext cx="274320" cy="6858000"/>
           </a:xfrm>
           <a:prstGeom prst="rect">
             <a:avLst/>
           </a:prstGeom>
           <a:solidFill>
-            <a:srgbClr val="F59E0B"/>
+            <a:srgbClr val="E8A33D"/>
           </a:solidFill>
           <a:ln w="12700">
             <a:solidFill>
-              <a:srgbClr val="F59E0B"/>
+              <a:srgbClr val="E8A33D"/>
             </a:solidFill>
             <a:prstDash val="solid"/>
           </a:ln>
@@ -5106,32 +5187,57 @@
       </p:sp>
       <p:sp>
         <p:nvSpPr>
-          <p:cNvPr id="3" name="Text 1"/>
-          <p:cNvSpPr/>
-          <p:nvPr/>
-        </p:nvSpPr>
-        <p:spPr>
-          <a:xfrm>
-            <a:off x="457200" y="256032"/>
-            <a:ext cx="8229600" cy="320040"/>
-          </a:xfrm>
-          <a:prstGeom prst="rect">
-            <a:avLst/>
-          </a:prstGeom>
-          <a:noFill/>
-          <a:ln/>
-        </p:spPr>
-        <p:txBody>
-          <a:bodyPr wrap="square" lIns="0" tIns="0" rIns="0" bIns="0" rtlCol="0" anchor="ctr"/>
-          <a:lstStyle/>
-          <a:p>
-            <a:pPr indent="0" marL="0">
-              <a:buNone/>
-            </a:pPr>
-            <a:r>
-              <a:rPr lang="en-US" sz="1100" b="1" spc="400" kern="0" dirty="0">
-                <a:solidFill>
-                  <a:srgbClr val="64748B"/>
+          <p:cNvPr id="3" name="Shape 1"/>
+          <p:cNvSpPr/>
+          <p:nvPr/>
+        </p:nvSpPr>
+        <p:spPr>
+          <a:xfrm>
+            <a:off x="0" y="0"/>
+            <a:ext cx="12191695" cy="91440"/>
+          </a:xfrm>
+          <a:prstGeom prst="rect">
+            <a:avLst/>
+          </a:prstGeom>
+          <a:solidFill>
+            <a:srgbClr val="E8A33D"/>
+          </a:solidFill>
+          <a:ln w="12700">
+            <a:solidFill>
+              <a:srgbClr val="E8A33D"/>
+            </a:solidFill>
+            <a:prstDash val="solid"/>
+          </a:ln>
+        </p:spPr>
+      </p:sp>
+      <p:sp>
+        <p:nvSpPr>
+          <p:cNvPr id="4" name="Text 2"/>
+          <p:cNvSpPr/>
+          <p:nvPr/>
+        </p:nvSpPr>
+        <p:spPr>
+          <a:xfrm>
+            <a:off x="502920" y="292608"/>
+            <a:ext cx="8686800" cy="347472"/>
+          </a:xfrm>
+          <a:prstGeom prst="rect">
+            <a:avLst/>
+          </a:prstGeom>
+          <a:noFill/>
+          <a:ln/>
+        </p:spPr>
+        <p:txBody>
+          <a:bodyPr wrap="square" lIns="0" tIns="0" rIns="0" bIns="0" rtlCol="0" anchor="ctr"/>
+          <a:lstStyle/>
+          <a:p>
+            <a:pPr indent="0" marL="0">
+              <a:buNone/>
+            </a:pPr>
+            <a:r>
+              <a:rPr lang="en-US" sz="1050" b="1" spc="600" kern="0" dirty="0">
+                <a:solidFill>
+                  <a:srgbClr val="8B8578"/>
                 </a:solidFill>
                 <a:latin typeface="Calibri" pitchFamily="34" charset="0"/>
                 <a:ea typeface="Calibri" pitchFamily="34" charset="-122"/>
@@ -5139,20 +5245,20 @@
               </a:rPr>
               <a:t>FACILITIES</a:t>
             </a:r>
-            <a:endParaRPr lang="en-US" sz="1100" dirty="0"/>
-          </a:p>
-        </p:txBody>
-      </p:sp>
-      <p:sp>
-        <p:nvSpPr>
-          <p:cNvPr id="4" name="Text 2"/>
-          <p:cNvSpPr/>
-          <p:nvPr/>
-        </p:nvSpPr>
-        <p:spPr>
-          <a:xfrm>
-            <a:off x="10728655" y="256032"/>
-            <a:ext cx="1005840" cy="320040"/>
+            <a:endParaRPr lang="en-US" sz="1050" dirty="0"/>
+          </a:p>
+        </p:txBody>
+      </p:sp>
+      <p:sp>
+        <p:nvSpPr>
+          <p:cNvPr id="5" name="Text 3"/>
+          <p:cNvSpPr/>
+          <p:nvPr/>
+        </p:nvSpPr>
+        <p:spPr>
+          <a:xfrm>
+            <a:off x="10728655" y="292608"/>
+            <a:ext cx="1005840" cy="347472"/>
           </a:xfrm>
           <a:prstGeom prst="rect">
             <a:avLst/>
@@ -5168,62 +5274,62 @@
               <a:buNone/>
             </a:pPr>
             <a:r>
-              <a:rPr lang="en-US" sz="1100" b="1" dirty="0">
-                <a:solidFill>
-                  <a:srgbClr val="64748B"/>
-                </a:solidFill>
-                <a:latin typeface="Calibri" pitchFamily="34" charset="0"/>
-                <a:ea typeface="Calibri" pitchFamily="34" charset="-122"/>
-                <a:cs typeface="Calibri" pitchFamily="34" charset="-120"/>
-              </a:rPr>
-              <a:t>04 / 09</a:t>
-            </a:r>
-            <a:endParaRPr lang="en-US" sz="1100" dirty="0"/>
-          </a:p>
-        </p:txBody>
-      </p:sp>
-      <p:sp>
-        <p:nvSpPr>
-          <p:cNvPr id="5" name="Text 3"/>
-          <p:cNvSpPr/>
-          <p:nvPr/>
-        </p:nvSpPr>
-        <p:spPr>
-          <a:xfrm>
-            <a:off x="457200" y="594360"/>
-            <a:ext cx="11247120" cy="822960"/>
-          </a:xfrm>
-          <a:prstGeom prst="rect">
-            <a:avLst/>
-          </a:prstGeom>
-          <a:noFill/>
-          <a:ln/>
-        </p:spPr>
-        <p:txBody>
-          <a:bodyPr wrap="square" lIns="0" tIns="0" rIns="0" bIns="0" rtlCol="0" anchor="ctr"/>
-          <a:lstStyle/>
-          <a:p>
-            <a:pPr indent="0" marL="0">
-              <a:buNone/>
-            </a:pPr>
-            <a:r>
-              <a:rPr lang="en-US" sz="2800" b="1" dirty="0">
-                <a:solidFill>
-                  <a:srgbClr val="1E293B"/>
-                </a:solidFill>
-                <a:latin typeface="Cambria" pitchFamily="34" charset="0"/>
-                <a:ea typeface="Cambria" pitchFamily="34" charset="-122"/>
-                <a:cs typeface="Cambria" pitchFamily="34" charset="-120"/>
+              <a:rPr lang="en-US" sz="1050" b="1" spc="200" kern="0" dirty="0">
+                <a:solidFill>
+                  <a:srgbClr val="8B8578"/>
+                </a:solidFill>
+                <a:latin typeface="Calibri" pitchFamily="34" charset="0"/>
+                <a:ea typeface="Calibri" pitchFamily="34" charset="-122"/>
+                <a:cs typeface="Calibri" pitchFamily="34" charset="-120"/>
+              </a:rPr>
+              <a:t>04  ·  09</a:t>
+            </a:r>
+            <a:endParaRPr lang="en-US" sz="1050" dirty="0"/>
+          </a:p>
+        </p:txBody>
+      </p:sp>
+      <p:sp>
+        <p:nvSpPr>
+          <p:cNvPr id="6" name="Text 4"/>
+          <p:cNvSpPr/>
+          <p:nvPr/>
+        </p:nvSpPr>
+        <p:spPr>
+          <a:xfrm>
+            <a:off x="502920" y="713232"/>
+            <a:ext cx="11155680" cy="868680"/>
+          </a:xfrm>
+          <a:prstGeom prst="rect">
+            <a:avLst/>
+          </a:prstGeom>
+          <a:noFill/>
+          <a:ln/>
+        </p:spPr>
+        <p:txBody>
+          <a:bodyPr wrap="square" lIns="0" tIns="0" rIns="0" bIns="0" rtlCol="0" anchor="ctr"/>
+          <a:lstStyle/>
+          <a:p>
+            <a:pPr indent="0" marL="0">
+              <a:buNone/>
+            </a:pPr>
+            <a:r>
+              <a:rPr lang="en-US" sz="3600" b="1" dirty="0">
+                <a:solidFill>
+                  <a:srgbClr val="1A1F2E"/>
+                </a:solidFill>
+                <a:latin typeface="Palatino" pitchFamily="34" charset="0"/>
+                <a:ea typeface="Palatino" pitchFamily="34" charset="-122"/>
+                <a:cs typeface="Palatino" pitchFamily="34" charset="-120"/>
               </a:rPr>
               <a:t>Three Flagship In-Flight Fission Facilities</a:t>
             </a:r>
-            <a:endParaRPr lang="en-US" sz="2800" dirty="0"/>
-          </a:p>
-        </p:txBody>
-      </p:sp>
-      <p:sp>
-        <p:nvSpPr>
-          <p:cNvPr id="6" name="Shape 4"/>
+            <a:endParaRPr lang="en-US" sz="3600" dirty="0"/>
+          </a:p>
+        </p:txBody>
+      </p:sp>
+      <p:sp>
+        <p:nvSpPr>
+          <p:cNvPr id="7" name="Shape 5"/>
           <p:cNvSpPr/>
           <p:nvPr/>
         </p:nvSpPr>
@@ -5240,7 +5346,7 @@
           </a:solidFill>
           <a:ln w="9525">
             <a:solidFill>
-              <a:srgbClr val="E2E8F0"/>
+              <a:srgbClr val="E8DFD2"/>
             </a:solidFill>
             <a:prstDash val="solid"/>
           </a:ln>
@@ -5255,7 +5361,7 @@
       </p:sp>
       <p:sp>
         <p:nvSpPr>
-          <p:cNvPr id="7" name="Shape 5"/>
+          <p:cNvPr id="8" name="Shape 6"/>
           <p:cNvSpPr/>
           <p:nvPr/>
         </p:nvSpPr>
@@ -5268,11 +5374,11 @@
             <a:avLst/>
           </a:prstGeom>
           <a:solidFill>
-            <a:srgbClr val="0891B2"/>
+            <a:srgbClr val="4A7C7E"/>
           </a:solidFill>
           <a:ln w="12700">
             <a:solidFill>
-              <a:srgbClr val="0891B2"/>
+              <a:srgbClr val="4A7C7E"/>
             </a:solidFill>
             <a:prstDash val="solid"/>
           </a:ln>
@@ -5280,7 +5386,7 @@
       </p:sp>
       <p:sp>
         <p:nvSpPr>
-          <p:cNvPr id="8" name="Text 6"/>
+          <p:cNvPr id="9" name="Text 7"/>
           <p:cNvSpPr/>
           <p:nvPr/>
         </p:nvSpPr>
@@ -5305,11 +5411,11 @@
             <a:r>
               <a:rPr lang="en-US" sz="2400" b="1" dirty="0">
                 <a:solidFill>
-                  <a:srgbClr val="1E293B"/>
-                </a:solidFill>
-                <a:latin typeface="Cambria" pitchFamily="34" charset="0"/>
-                <a:ea typeface="Cambria" pitchFamily="34" charset="-122"/>
-                <a:cs typeface="Cambria" pitchFamily="34" charset="-120"/>
+                  <a:srgbClr val="1A1F2E"/>
+                </a:solidFill>
+                <a:latin typeface="Palatino" pitchFamily="34" charset="0"/>
+                <a:ea typeface="Palatino" pitchFamily="34" charset="-122"/>
+                <a:cs typeface="Palatino" pitchFamily="34" charset="-120"/>
               </a:rPr>
               <a:t>RIBF</a:t>
             </a:r>
@@ -5319,7 +5425,7 @@
       </p:sp>
       <p:sp>
         <p:nvSpPr>
-          <p:cNvPr id="9" name="Text 7"/>
+          <p:cNvPr id="10" name="Text 8"/>
           <p:cNvSpPr/>
           <p:nvPr/>
         </p:nvSpPr>
@@ -5344,7 +5450,7 @@
             <a:r>
               <a:rPr lang="en-US" sz="1100" i="1" dirty="0">
                 <a:solidFill>
-                  <a:srgbClr val="64748B"/>
+                  <a:srgbClr val="8B8578"/>
                 </a:solidFill>
                 <a:latin typeface="Calibri" pitchFamily="34" charset="0"/>
                 <a:ea typeface="Calibri" pitchFamily="34" charset="-122"/>
@@ -5358,7 +5464,7 @@
       </p:sp>
       <p:sp>
         <p:nvSpPr>
-          <p:cNvPr id="10" name="Text 8"/>
+          <p:cNvPr id="11" name="Text 9"/>
           <p:cNvSpPr/>
           <p:nvPr/>
         </p:nvSpPr>
@@ -5383,7 +5489,7 @@
             <a:r>
               <a:rPr lang="en-US" sz="1000" b="1" spc="200" kern="0" dirty="0">
                 <a:solidFill>
-                  <a:srgbClr val="64748B"/>
+                  <a:srgbClr val="8B8578"/>
                 </a:solidFill>
                 <a:latin typeface="Calibri" pitchFamily="34" charset="0"/>
                 <a:ea typeface="Calibri" pitchFamily="34" charset="-122"/>
@@ -5397,7 +5503,7 @@
       </p:sp>
       <p:sp>
         <p:nvSpPr>
-          <p:cNvPr id="11" name="Text 9"/>
+          <p:cNvPr id="12" name="Text 10"/>
           <p:cNvSpPr/>
           <p:nvPr/>
         </p:nvSpPr>
@@ -5422,7 +5528,7 @@
             <a:r>
               <a:rPr lang="en-US" sz="1200" baseline="30000" dirty="0">
                 <a:solidFill>
-                  <a:srgbClr val="1E293B"/>
+                  <a:srgbClr val="1A1F2E"/>
                 </a:solidFill>
                 <a:latin typeface="Calibri" pitchFamily="34" charset="0"/>
                 <a:ea typeface="Calibri" pitchFamily="34" charset="-122"/>
@@ -5436,7 +5542,7 @@
             <a:r>
               <a:rPr lang="en-US" sz="1200" dirty="0">
                 <a:solidFill>
-                  <a:srgbClr val="1E293B"/>
+                  <a:srgbClr val="1A1F2E"/>
                 </a:solidFill>
                 <a:latin typeface="Calibri" pitchFamily="34" charset="0"/>
                 <a:ea typeface="Calibri" pitchFamily="34" charset="-122"/>
@@ -5450,7 +5556,7 @@
       </p:sp>
       <p:sp>
         <p:nvSpPr>
-          <p:cNvPr id="12" name="Text 10"/>
+          <p:cNvPr id="13" name="Text 11"/>
           <p:cNvSpPr/>
           <p:nvPr/>
         </p:nvSpPr>
@@ -5475,7 +5581,7 @@
             <a:r>
               <a:rPr lang="en-US" sz="1000" b="1" spc="200" kern="0" dirty="0">
                 <a:solidFill>
-                  <a:srgbClr val="64748B"/>
+                  <a:srgbClr val="8B8578"/>
                 </a:solidFill>
                 <a:latin typeface="Calibri" pitchFamily="34" charset="0"/>
                 <a:ea typeface="Calibri" pitchFamily="34" charset="-122"/>
@@ -5489,7 +5595,7 @@
       </p:sp>
       <p:sp>
         <p:nvSpPr>
-          <p:cNvPr id="13" name="Text 11"/>
+          <p:cNvPr id="14" name="Text 12"/>
           <p:cNvSpPr/>
           <p:nvPr/>
         </p:nvSpPr>
@@ -5514,7 +5620,7 @@
             <a:r>
               <a:rPr lang="en-US" sz="1200" dirty="0">
                 <a:solidFill>
-                  <a:srgbClr val="1E293B"/>
+                  <a:srgbClr val="1A1F2E"/>
                 </a:solidFill>
                 <a:latin typeface="Calibri" pitchFamily="34" charset="0"/>
                 <a:ea typeface="Calibri" pitchFamily="34" charset="-122"/>
@@ -5528,7 +5634,7 @@
       </p:sp>
       <p:sp>
         <p:nvSpPr>
-          <p:cNvPr id="14" name="Text 12"/>
+          <p:cNvPr id="15" name="Text 13"/>
           <p:cNvSpPr/>
           <p:nvPr/>
         </p:nvSpPr>
@@ -5553,7 +5659,7 @@
             <a:r>
               <a:rPr lang="en-US" sz="1000" b="1" spc="200" kern="0" dirty="0">
                 <a:solidFill>
-                  <a:srgbClr val="64748B"/>
+                  <a:srgbClr val="8B8578"/>
                 </a:solidFill>
                 <a:latin typeface="Calibri" pitchFamily="34" charset="0"/>
                 <a:ea typeface="Calibri" pitchFamily="34" charset="-122"/>
@@ -5567,7 +5673,7 @@
       </p:sp>
       <p:sp>
         <p:nvSpPr>
-          <p:cNvPr id="15" name="Text 13"/>
+          <p:cNvPr id="16" name="Text 14"/>
           <p:cNvSpPr/>
           <p:nvPr/>
         </p:nvSpPr>
@@ -5592,7 +5698,7 @@
             <a:r>
               <a:rPr lang="en-US" sz="1200" dirty="0">
                 <a:solidFill>
-                  <a:srgbClr val="1E293B"/>
+                  <a:srgbClr val="1A1F2E"/>
                 </a:solidFill>
                 <a:latin typeface="Calibri" pitchFamily="34" charset="0"/>
                 <a:ea typeface="Calibri" pitchFamily="34" charset="-122"/>
@@ -5606,7 +5712,7 @@
       </p:sp>
       <p:sp>
         <p:nvSpPr>
-          <p:cNvPr id="16" name="Text 14"/>
+          <p:cNvPr id="17" name="Text 15"/>
           <p:cNvSpPr/>
           <p:nvPr/>
         </p:nvSpPr>
@@ -5631,7 +5737,7 @@
             <a:r>
               <a:rPr lang="en-US" sz="1000" b="1" spc="200" kern="0" dirty="0">
                 <a:solidFill>
-                  <a:srgbClr val="64748B"/>
+                  <a:srgbClr val="8B8578"/>
                 </a:solidFill>
                 <a:latin typeface="Calibri" pitchFamily="34" charset="0"/>
                 <a:ea typeface="Calibri" pitchFamily="34" charset="-122"/>
@@ -5645,7 +5751,7 @@
       </p:sp>
       <p:sp>
         <p:nvSpPr>
-          <p:cNvPr id="17" name="Text 15"/>
+          <p:cNvPr id="18" name="Text 16"/>
           <p:cNvSpPr/>
           <p:nvPr/>
         </p:nvSpPr>
@@ -5670,7 +5776,7 @@
             <a:r>
               <a:rPr lang="en-US" sz="1200" dirty="0">
                 <a:solidFill>
-                  <a:srgbClr val="1E293B"/>
+                  <a:srgbClr val="1A1F2E"/>
                 </a:solidFill>
                 <a:latin typeface="Calibri" pitchFamily="34" charset="0"/>
                 <a:ea typeface="Calibri" pitchFamily="34" charset="-122"/>
@@ -5684,7 +5790,7 @@
       </p:sp>
       <p:sp>
         <p:nvSpPr>
-          <p:cNvPr id="18" name="Shape 16"/>
+          <p:cNvPr id="19" name="Shape 17"/>
           <p:cNvSpPr/>
           <p:nvPr/>
         </p:nvSpPr>
@@ -5697,13 +5803,13 @@
             <a:avLst/>
           </a:prstGeom>
           <a:solidFill>
-            <a:srgbClr val="0891B2">
+            <a:srgbClr val="4A7C7E">
               <a:alpha val="15000"/>
             </a:srgbClr>
           </a:solidFill>
           <a:ln w="6350">
             <a:solidFill>
-              <a:srgbClr val="0891B2"/>
+              <a:srgbClr val="4A7C7E"/>
             </a:solidFill>
             <a:prstDash val="solid"/>
           </a:ln>
@@ -5711,7 +5817,7 @@
       </p:sp>
       <p:sp>
         <p:nvSpPr>
-          <p:cNvPr id="19" name="Text 17"/>
+          <p:cNvPr id="20" name="Text 18"/>
           <p:cNvSpPr/>
           <p:nvPr/>
         </p:nvSpPr>
@@ -5736,11 +5842,11 @@
             <a:r>
               <a:rPr lang="en-US" sz="2000" b="1" dirty="0">
                 <a:solidFill>
-                  <a:srgbClr val="0891B2"/>
-                </a:solidFill>
-                <a:latin typeface="Cambria" pitchFamily="34" charset="0"/>
-                <a:ea typeface="Cambria" pitchFamily="34" charset="-122"/>
-                <a:cs typeface="Cambria" pitchFamily="34" charset="-120"/>
+                  <a:srgbClr val="4A7C7E"/>
+                </a:solidFill>
+                <a:latin typeface="Palatino" pitchFamily="34" charset="0"/>
+                <a:ea typeface="Palatino" pitchFamily="34" charset="-122"/>
+                <a:cs typeface="Palatino" pitchFamily="34" charset="-120"/>
               </a:rPr>
               <a:t>RIBF</a:t>
             </a:r>
@@ -5750,7 +5856,7 @@
       </p:sp>
       <p:sp>
         <p:nvSpPr>
-          <p:cNvPr id="20" name="Shape 18"/>
+          <p:cNvPr id="21" name="Shape 19"/>
           <p:cNvSpPr/>
           <p:nvPr/>
         </p:nvSpPr>
@@ -5767,7 +5873,7 @@
           </a:solidFill>
           <a:ln w="9525">
             <a:solidFill>
-              <a:srgbClr val="E2E8F0"/>
+              <a:srgbClr val="E8DFD2"/>
             </a:solidFill>
             <a:prstDash val="solid"/>
           </a:ln>
@@ -5782,7 +5888,7 @@
       </p:sp>
       <p:sp>
         <p:nvSpPr>
-          <p:cNvPr id="21" name="Shape 19"/>
+          <p:cNvPr id="22" name="Shape 20"/>
           <p:cNvSpPr/>
           <p:nvPr/>
         </p:nvSpPr>
@@ -5795,11 +5901,11 @@
             <a:avLst/>
           </a:prstGeom>
           <a:solidFill>
-            <a:srgbClr val="075985"/>
+            <a:srgbClr val="2D4A4C"/>
           </a:solidFill>
           <a:ln w="12700">
             <a:solidFill>
-              <a:srgbClr val="075985"/>
+              <a:srgbClr val="2D4A4C"/>
             </a:solidFill>
             <a:prstDash val="solid"/>
           </a:ln>
@@ -5807,7 +5913,7 @@
       </p:sp>
       <p:sp>
         <p:nvSpPr>
-          <p:cNvPr id="22" name="Text 20"/>
+          <p:cNvPr id="23" name="Text 21"/>
           <p:cNvSpPr/>
           <p:nvPr/>
         </p:nvSpPr>
@@ -5832,11 +5938,11 @@
             <a:r>
               <a:rPr lang="en-US" sz="2400" b="1" dirty="0">
                 <a:solidFill>
-                  <a:srgbClr val="1E293B"/>
-                </a:solidFill>
-                <a:latin typeface="Cambria" pitchFamily="34" charset="0"/>
-                <a:ea typeface="Cambria" pitchFamily="34" charset="-122"/>
-                <a:cs typeface="Cambria" pitchFamily="34" charset="-120"/>
+                  <a:srgbClr val="1A1F2E"/>
+                </a:solidFill>
+                <a:latin typeface="Palatino" pitchFamily="34" charset="0"/>
+                <a:ea typeface="Palatino" pitchFamily="34" charset="-122"/>
+                <a:cs typeface="Palatino" pitchFamily="34" charset="-120"/>
               </a:rPr>
               <a:t>GSI / FAIR</a:t>
             </a:r>
@@ -5846,7 +5952,7 @@
       </p:sp>
       <p:sp>
         <p:nvSpPr>
-          <p:cNvPr id="23" name="Text 21"/>
+          <p:cNvPr id="24" name="Text 22"/>
           <p:cNvSpPr/>
           <p:nvPr/>
         </p:nvSpPr>
@@ -5871,7 +5977,7 @@
             <a:r>
               <a:rPr lang="en-US" sz="1100" i="1" dirty="0">
                 <a:solidFill>
-                  <a:srgbClr val="64748B"/>
+                  <a:srgbClr val="8B8578"/>
                 </a:solidFill>
                 <a:latin typeface="Calibri" pitchFamily="34" charset="0"/>
                 <a:ea typeface="Calibri" pitchFamily="34" charset="-122"/>
@@ -5885,7 +5991,7 @@
       </p:sp>
       <p:sp>
         <p:nvSpPr>
-          <p:cNvPr id="24" name="Text 22"/>
+          <p:cNvPr id="25" name="Text 23"/>
           <p:cNvSpPr/>
           <p:nvPr/>
         </p:nvSpPr>
@@ -5910,7 +6016,7 @@
             <a:r>
               <a:rPr lang="en-US" sz="1000" b="1" spc="200" kern="0" dirty="0">
                 <a:solidFill>
-                  <a:srgbClr val="64748B"/>
+                  <a:srgbClr val="8B8578"/>
                 </a:solidFill>
                 <a:latin typeface="Calibri" pitchFamily="34" charset="0"/>
                 <a:ea typeface="Calibri" pitchFamily="34" charset="-122"/>
@@ -5924,7 +6030,7 @@
       </p:sp>
       <p:sp>
         <p:nvSpPr>
-          <p:cNvPr id="25" name="Text 23"/>
+          <p:cNvPr id="26" name="Text 24"/>
           <p:cNvSpPr/>
           <p:nvPr/>
         </p:nvSpPr>
@@ -5949,7 +6055,7 @@
             <a:r>
               <a:rPr lang="en-US" sz="1200" baseline="30000" dirty="0">
                 <a:solidFill>
-                  <a:srgbClr val="1E293B"/>
+                  <a:srgbClr val="1A1F2E"/>
                 </a:solidFill>
                 <a:latin typeface="Calibri" pitchFamily="34" charset="0"/>
                 <a:ea typeface="Calibri" pitchFamily="34" charset="-122"/>
@@ -5963,7 +6069,7 @@
             <a:r>
               <a:rPr lang="en-US" sz="1200" dirty="0">
                 <a:solidFill>
-                  <a:srgbClr val="1E293B"/>
+                  <a:srgbClr val="1A1F2E"/>
                 </a:solidFill>
                 <a:latin typeface="Calibri" pitchFamily="34" charset="0"/>
                 <a:ea typeface="Calibri" pitchFamily="34" charset="-122"/>
@@ -5977,7 +6083,7 @@
       </p:sp>
       <p:sp>
         <p:nvSpPr>
-          <p:cNvPr id="26" name="Text 24"/>
+          <p:cNvPr id="27" name="Text 25"/>
           <p:cNvSpPr/>
           <p:nvPr/>
         </p:nvSpPr>
@@ -6002,7 +6108,7 @@
             <a:r>
               <a:rPr lang="en-US" sz="1000" b="1" spc="200" kern="0" dirty="0">
                 <a:solidFill>
-                  <a:srgbClr val="64748B"/>
+                  <a:srgbClr val="8B8578"/>
                 </a:solidFill>
                 <a:latin typeface="Calibri" pitchFamily="34" charset="0"/>
                 <a:ea typeface="Calibri" pitchFamily="34" charset="-122"/>
@@ -6016,7 +6122,7 @@
       </p:sp>
       <p:sp>
         <p:nvSpPr>
-          <p:cNvPr id="27" name="Text 25"/>
+          <p:cNvPr id="28" name="Text 26"/>
           <p:cNvSpPr/>
           <p:nvPr/>
         </p:nvSpPr>
@@ -6041,7 +6147,7 @@
             <a:r>
               <a:rPr lang="en-US" sz="1200" dirty="0">
                 <a:solidFill>
-                  <a:srgbClr val="1E293B"/>
+                  <a:srgbClr val="1A1F2E"/>
                 </a:solidFill>
                 <a:latin typeface="Calibri" pitchFamily="34" charset="0"/>
                 <a:ea typeface="Calibri" pitchFamily="34" charset="-122"/>
@@ -6055,7 +6161,7 @@
       </p:sp>
       <p:sp>
         <p:nvSpPr>
-          <p:cNvPr id="28" name="Text 26"/>
+          <p:cNvPr id="29" name="Text 27"/>
           <p:cNvSpPr/>
           <p:nvPr/>
         </p:nvSpPr>
@@ -6080,7 +6186,7 @@
             <a:r>
               <a:rPr lang="en-US" sz="1000" b="1" spc="200" kern="0" dirty="0">
                 <a:solidFill>
-                  <a:srgbClr val="64748B"/>
+                  <a:srgbClr val="8B8578"/>
                 </a:solidFill>
                 <a:latin typeface="Calibri" pitchFamily="34" charset="0"/>
                 <a:ea typeface="Calibri" pitchFamily="34" charset="-122"/>
@@ -6094,7 +6200,7 @@
       </p:sp>
       <p:sp>
         <p:nvSpPr>
-          <p:cNvPr id="29" name="Text 27"/>
+          <p:cNvPr id="30" name="Text 28"/>
           <p:cNvSpPr/>
           <p:nvPr/>
         </p:nvSpPr>
@@ -6119,7 +6225,7 @@
             <a:r>
               <a:rPr lang="en-US" sz="1200" dirty="0">
                 <a:solidFill>
-                  <a:srgbClr val="1E293B"/>
+                  <a:srgbClr val="1A1F2E"/>
                 </a:solidFill>
                 <a:latin typeface="Calibri" pitchFamily="34" charset="0"/>
                 <a:ea typeface="Calibri" pitchFamily="34" charset="-122"/>
@@ -6133,7 +6239,7 @@
       </p:sp>
       <p:sp>
         <p:nvSpPr>
-          <p:cNvPr id="30" name="Text 28"/>
+          <p:cNvPr id="31" name="Text 29"/>
           <p:cNvSpPr/>
           <p:nvPr/>
         </p:nvSpPr>
@@ -6158,7 +6264,7 @@
             <a:r>
               <a:rPr lang="en-US" sz="1000" b="1" spc="200" kern="0" dirty="0">
                 <a:solidFill>
-                  <a:srgbClr val="64748B"/>
+                  <a:srgbClr val="8B8578"/>
                 </a:solidFill>
                 <a:latin typeface="Calibri" pitchFamily="34" charset="0"/>
                 <a:ea typeface="Calibri" pitchFamily="34" charset="-122"/>
@@ -6172,7 +6278,7 @@
       </p:sp>
       <p:sp>
         <p:nvSpPr>
-          <p:cNvPr id="31" name="Text 29"/>
+          <p:cNvPr id="32" name="Text 30"/>
           <p:cNvSpPr/>
           <p:nvPr/>
         </p:nvSpPr>
@@ -6197,7 +6303,7 @@
             <a:r>
               <a:rPr lang="en-US" sz="1200" dirty="0">
                 <a:solidFill>
-                  <a:srgbClr val="1E293B"/>
+                  <a:srgbClr val="1A1F2E"/>
                 </a:solidFill>
                 <a:latin typeface="Calibri" pitchFamily="34" charset="0"/>
                 <a:ea typeface="Calibri" pitchFamily="34" charset="-122"/>
@@ -6211,7 +6317,7 @@
       </p:sp>
       <p:sp>
         <p:nvSpPr>
-          <p:cNvPr id="32" name="Shape 30"/>
+          <p:cNvPr id="33" name="Shape 31"/>
           <p:cNvSpPr/>
           <p:nvPr/>
         </p:nvSpPr>
@@ -6224,13 +6330,13 @@
             <a:avLst/>
           </a:prstGeom>
           <a:solidFill>
-            <a:srgbClr val="075985">
+            <a:srgbClr val="2D4A4C">
               <a:alpha val="15000"/>
             </a:srgbClr>
           </a:solidFill>
           <a:ln w="6350">
             <a:solidFill>
-              <a:srgbClr val="075985"/>
+              <a:srgbClr val="2D4A4C"/>
             </a:solidFill>
             <a:prstDash val="solid"/>
           </a:ln>
@@ -6238,7 +6344,7 @@
       </p:sp>
       <p:sp>
         <p:nvSpPr>
-          <p:cNvPr id="33" name="Text 31"/>
+          <p:cNvPr id="34" name="Text 32"/>
           <p:cNvSpPr/>
           <p:nvPr/>
         </p:nvSpPr>
@@ -6263,11 +6369,11 @@
             <a:r>
               <a:rPr lang="en-US" sz="2000" b="1" dirty="0">
                 <a:solidFill>
-                  <a:srgbClr val="075985"/>
-                </a:solidFill>
-                <a:latin typeface="Cambria" pitchFamily="34" charset="0"/>
-                <a:ea typeface="Cambria" pitchFamily="34" charset="-122"/>
-                <a:cs typeface="Cambria" pitchFamily="34" charset="-120"/>
+                  <a:srgbClr val="2D4A4C"/>
+                </a:solidFill>
+                <a:latin typeface="Palatino" pitchFamily="34" charset="0"/>
+                <a:ea typeface="Palatino" pitchFamily="34" charset="-122"/>
+                <a:cs typeface="Palatino" pitchFamily="34" charset="-120"/>
               </a:rPr>
               <a:t>GSI / FAIR</a:t>
             </a:r>
@@ -6277,7 +6383,7 @@
       </p:sp>
       <p:sp>
         <p:nvSpPr>
-          <p:cNvPr id="34" name="Shape 32"/>
+          <p:cNvPr id="35" name="Shape 33"/>
           <p:cNvSpPr/>
           <p:nvPr/>
         </p:nvSpPr>
@@ -6294,7 +6400,7 @@
           </a:solidFill>
           <a:ln w="9525">
             <a:solidFill>
-              <a:srgbClr val="E2E8F0"/>
+              <a:srgbClr val="E8DFD2"/>
             </a:solidFill>
             <a:prstDash val="solid"/>
           </a:ln>
@@ -6309,7 +6415,7 @@
       </p:sp>
       <p:sp>
         <p:nvSpPr>
-          <p:cNvPr id="35" name="Shape 33"/>
+          <p:cNvPr id="36" name="Shape 34"/>
           <p:cNvSpPr/>
           <p:nvPr/>
         </p:nvSpPr>
@@ -6322,11 +6428,11 @@
             <a:avLst/>
           </a:prstGeom>
           <a:solidFill>
-            <a:srgbClr val="B45309"/>
+            <a:srgbClr val="B87333"/>
           </a:solidFill>
           <a:ln w="12700">
             <a:solidFill>
-              <a:srgbClr val="B45309"/>
+              <a:srgbClr val="B87333"/>
             </a:solidFill>
             <a:prstDash val="solid"/>
           </a:ln>
@@ -6334,7 +6440,7 @@
       </p:sp>
       <p:sp>
         <p:nvSpPr>
-          <p:cNvPr id="36" name="Text 34"/>
+          <p:cNvPr id="37" name="Text 35"/>
           <p:cNvSpPr/>
           <p:nvPr/>
         </p:nvSpPr>
@@ -6359,11 +6465,11 @@
             <a:r>
               <a:rPr lang="en-US" sz="2400" b="1" dirty="0">
                 <a:solidFill>
-                  <a:srgbClr val="1E293B"/>
-                </a:solidFill>
-                <a:latin typeface="Cambria" pitchFamily="34" charset="0"/>
-                <a:ea typeface="Cambria" pitchFamily="34" charset="-122"/>
-                <a:cs typeface="Cambria" pitchFamily="34" charset="-120"/>
+                  <a:srgbClr val="1A1F2E"/>
+                </a:solidFill>
+                <a:latin typeface="Palatino" pitchFamily="34" charset="0"/>
+                <a:ea typeface="Palatino" pitchFamily="34" charset="-122"/>
+                <a:cs typeface="Palatino" pitchFamily="34" charset="-120"/>
               </a:rPr>
               <a:t>FRIB</a:t>
             </a:r>
@@ -6373,7 +6479,7 @@
       </p:sp>
       <p:sp>
         <p:nvSpPr>
-          <p:cNvPr id="37" name="Text 35"/>
+          <p:cNvPr id="38" name="Text 36"/>
           <p:cNvSpPr/>
           <p:nvPr/>
         </p:nvSpPr>
@@ -6398,7 +6504,7 @@
             <a:r>
               <a:rPr lang="en-US" sz="1100" i="1" dirty="0">
                 <a:solidFill>
-                  <a:srgbClr val="64748B"/>
+                  <a:srgbClr val="8B8578"/>
                 </a:solidFill>
                 <a:latin typeface="Calibri" pitchFamily="34" charset="0"/>
                 <a:ea typeface="Calibri" pitchFamily="34" charset="-122"/>
@@ -6412,7 +6518,7 @@
       </p:sp>
       <p:sp>
         <p:nvSpPr>
-          <p:cNvPr id="38" name="Text 36"/>
+          <p:cNvPr id="39" name="Text 37"/>
           <p:cNvSpPr/>
           <p:nvPr/>
         </p:nvSpPr>
@@ -6437,7 +6543,7 @@
             <a:r>
               <a:rPr lang="en-US" sz="1000" b="1" spc="200" kern="0" dirty="0">
                 <a:solidFill>
-                  <a:srgbClr val="64748B"/>
+                  <a:srgbClr val="8B8578"/>
                 </a:solidFill>
                 <a:latin typeface="Calibri" pitchFamily="34" charset="0"/>
                 <a:ea typeface="Calibri" pitchFamily="34" charset="-122"/>
@@ -6451,7 +6557,7 @@
       </p:sp>
       <p:sp>
         <p:nvSpPr>
-          <p:cNvPr id="39" name="Text 37"/>
+          <p:cNvPr id="40" name="Text 38"/>
           <p:cNvSpPr/>
           <p:nvPr/>
         </p:nvSpPr>
@@ -6476,7 +6582,7 @@
             <a:r>
               <a:rPr lang="en-US" sz="1200" dirty="0">
                 <a:solidFill>
-                  <a:srgbClr val="1E293B"/>
+                  <a:srgbClr val="1A1F2E"/>
                 </a:solidFill>
                 <a:latin typeface="Calibri" pitchFamily="34" charset="0"/>
                 <a:ea typeface="Calibri" pitchFamily="34" charset="-122"/>
@@ -6490,7 +6596,7 @@
       </p:sp>
       <p:sp>
         <p:nvSpPr>
-          <p:cNvPr id="40" name="Text 38"/>
+          <p:cNvPr id="41" name="Text 39"/>
           <p:cNvSpPr/>
           <p:nvPr/>
         </p:nvSpPr>
@@ -6515,7 +6621,7 @@
             <a:r>
               <a:rPr lang="en-US" sz="1000" b="1" spc="200" kern="0" dirty="0">
                 <a:solidFill>
-                  <a:srgbClr val="64748B"/>
+                  <a:srgbClr val="8B8578"/>
                 </a:solidFill>
                 <a:latin typeface="Calibri" pitchFamily="34" charset="0"/>
                 <a:ea typeface="Calibri" pitchFamily="34" charset="-122"/>
@@ -6529,7 +6635,7 @@
       </p:sp>
       <p:sp>
         <p:nvSpPr>
-          <p:cNvPr id="41" name="Text 39"/>
+          <p:cNvPr id="42" name="Text 40"/>
           <p:cNvSpPr/>
           <p:nvPr/>
         </p:nvSpPr>
@@ -6554,7 +6660,7 @@
             <a:r>
               <a:rPr lang="en-US" sz="1200" dirty="0">
                 <a:solidFill>
-                  <a:srgbClr val="1E293B"/>
+                  <a:srgbClr val="1A1F2E"/>
                 </a:solidFill>
                 <a:latin typeface="Calibri" pitchFamily="34" charset="0"/>
                 <a:ea typeface="Calibri" pitchFamily="34" charset="-122"/>
@@ -6568,7 +6674,7 @@
       </p:sp>
       <p:sp>
         <p:nvSpPr>
-          <p:cNvPr id="42" name="Text 40"/>
+          <p:cNvPr id="43" name="Text 41"/>
           <p:cNvSpPr/>
           <p:nvPr/>
         </p:nvSpPr>
@@ -6593,7 +6699,7 @@
             <a:r>
               <a:rPr lang="en-US" sz="1000" b="1" spc="200" kern="0" dirty="0">
                 <a:solidFill>
-                  <a:srgbClr val="64748B"/>
+                  <a:srgbClr val="8B8578"/>
                 </a:solidFill>
                 <a:latin typeface="Calibri" pitchFamily="34" charset="0"/>
                 <a:ea typeface="Calibri" pitchFamily="34" charset="-122"/>
@@ -6607,7 +6713,7 @@
       </p:sp>
       <p:sp>
         <p:nvSpPr>
-          <p:cNvPr id="43" name="Text 41"/>
+          <p:cNvPr id="44" name="Text 42"/>
           <p:cNvSpPr/>
           <p:nvPr/>
         </p:nvSpPr>
@@ -6632,7 +6738,7 @@
             <a:r>
               <a:rPr lang="en-US" sz="1200" dirty="0">
                 <a:solidFill>
-                  <a:srgbClr val="1E293B"/>
+                  <a:srgbClr val="1A1F2E"/>
                 </a:solidFill>
                 <a:latin typeface="Calibri" pitchFamily="34" charset="0"/>
                 <a:ea typeface="Calibri" pitchFamily="34" charset="-122"/>
@@ -6646,7 +6752,7 @@
       </p:sp>
       <p:sp>
         <p:nvSpPr>
-          <p:cNvPr id="44" name="Text 42"/>
+          <p:cNvPr id="45" name="Text 43"/>
           <p:cNvSpPr/>
           <p:nvPr/>
         </p:nvSpPr>
@@ -6671,7 +6777,7 @@
             <a:r>
               <a:rPr lang="en-US" sz="1000" b="1" spc="200" kern="0" dirty="0">
                 <a:solidFill>
-                  <a:srgbClr val="64748B"/>
+                  <a:srgbClr val="8B8578"/>
                 </a:solidFill>
                 <a:latin typeface="Calibri" pitchFamily="34" charset="0"/>
                 <a:ea typeface="Calibri" pitchFamily="34" charset="-122"/>
@@ -6685,7 +6791,7 @@
       </p:sp>
       <p:sp>
         <p:nvSpPr>
-          <p:cNvPr id="45" name="Text 43"/>
+          <p:cNvPr id="46" name="Text 44"/>
           <p:cNvSpPr/>
           <p:nvPr/>
         </p:nvSpPr>
@@ -6710,7 +6816,7 @@
             <a:r>
               <a:rPr lang="en-US" sz="1200" dirty="0">
                 <a:solidFill>
-                  <a:srgbClr val="1E293B"/>
+                  <a:srgbClr val="1A1F2E"/>
                 </a:solidFill>
                 <a:latin typeface="Calibri" pitchFamily="34" charset="0"/>
                 <a:ea typeface="Calibri" pitchFamily="34" charset="-122"/>
@@ -6724,7 +6830,7 @@
       </p:sp>
       <p:sp>
         <p:nvSpPr>
-          <p:cNvPr id="46" name="Shape 44"/>
+          <p:cNvPr id="47" name="Shape 45"/>
           <p:cNvSpPr/>
           <p:nvPr/>
         </p:nvSpPr>
@@ -6737,13 +6843,13 @@
             <a:avLst/>
           </a:prstGeom>
           <a:solidFill>
-            <a:srgbClr val="B45309">
+            <a:srgbClr val="B87333">
               <a:alpha val="15000"/>
             </a:srgbClr>
           </a:solidFill>
           <a:ln w="6350">
             <a:solidFill>
-              <a:srgbClr val="B45309"/>
+              <a:srgbClr val="B87333"/>
             </a:solidFill>
             <a:prstDash val="solid"/>
           </a:ln>
@@ -6751,7 +6857,7 @@
       </p:sp>
       <p:sp>
         <p:nvSpPr>
-          <p:cNvPr id="47" name="Text 45"/>
+          <p:cNvPr id="48" name="Text 46"/>
           <p:cNvSpPr/>
           <p:nvPr/>
         </p:nvSpPr>
@@ -6776,11 +6882,11 @@
             <a:r>
               <a:rPr lang="en-US" sz="2000" b="1" dirty="0">
                 <a:solidFill>
-                  <a:srgbClr val="B45309"/>
-                </a:solidFill>
-                <a:latin typeface="Cambria" pitchFamily="34" charset="0"/>
-                <a:ea typeface="Cambria" pitchFamily="34" charset="-122"/>
-                <a:cs typeface="Cambria" pitchFamily="34" charset="-120"/>
+                  <a:srgbClr val="B87333"/>
+                </a:solidFill>
+                <a:latin typeface="Palatino" pitchFamily="34" charset="0"/>
+                <a:ea typeface="Palatino" pitchFamily="34" charset="-122"/>
+                <a:cs typeface="Palatino" pitchFamily="34" charset="-120"/>
               </a:rPr>
               <a:t>FRIB</a:t>
             </a:r>
@@ -6790,22 +6896,22 @@
       </p:sp>
       <p:sp>
         <p:nvSpPr>
-          <p:cNvPr id="48" name="Shape 46"/>
-          <p:cNvSpPr/>
-          <p:nvPr/>
-        </p:nvSpPr>
-        <p:spPr>
-          <a:xfrm>
-            <a:off x="457200" y="6446520"/>
-            <a:ext cx="11277295" cy="0"/>
+          <p:cNvPr id="49" name="Shape 47"/>
+          <p:cNvSpPr/>
+          <p:nvPr/>
+        </p:nvSpPr>
+        <p:spPr>
+          <a:xfrm>
+            <a:off x="502920" y="6400800"/>
+            <a:ext cx="11185855" cy="0"/>
           </a:xfrm>
           <a:prstGeom prst="line">
             <a:avLst/>
           </a:prstGeom>
           <a:noFill/>
-          <a:ln w="9525">
+          <a:ln w="6350">
             <a:solidFill>
-              <a:srgbClr val="CBD5E1"/>
+              <a:srgbClr val="D9D2C5"/>
             </a:solidFill>
             <a:prstDash val="solid"/>
           </a:ln>
@@ -6813,32 +6919,32 @@
       </p:sp>
       <p:sp>
         <p:nvSpPr>
-          <p:cNvPr id="49" name="Text 47"/>
-          <p:cNvSpPr/>
-          <p:nvPr/>
-        </p:nvSpPr>
-        <p:spPr>
-          <a:xfrm>
-            <a:off x="457200" y="6473952"/>
-            <a:ext cx="8351215" cy="292608"/>
-          </a:xfrm>
-          <a:prstGeom prst="rect">
-            <a:avLst/>
-          </a:prstGeom>
-          <a:noFill/>
-          <a:ln/>
-        </p:spPr>
-        <p:txBody>
-          <a:bodyPr wrap="square" lIns="0" tIns="0" rIns="0" bIns="0" rtlCol="0" anchor="ctr"/>
-          <a:lstStyle/>
-          <a:p>
-            <a:pPr indent="0" marL="0">
-              <a:buNone/>
-            </a:pPr>
-            <a:r>
-              <a:rPr lang="en-US" sz="900" i="1" dirty="0">
-                <a:solidFill>
-                  <a:srgbClr val="64748B"/>
+          <p:cNvPr id="50" name="Text 48"/>
+          <p:cNvSpPr/>
+          <p:nvPr/>
+        </p:nvSpPr>
+        <p:spPr>
+          <a:xfrm>
+            <a:off x="502920" y="6446520"/>
+            <a:ext cx="8259775" cy="292608"/>
+          </a:xfrm>
+          <a:prstGeom prst="rect">
+            <a:avLst/>
+          </a:prstGeom>
+          <a:noFill/>
+          <a:ln/>
+        </p:spPr>
+        <p:txBody>
+          <a:bodyPr wrap="square" lIns="0" tIns="0" rIns="0" bIns="0" rtlCol="0" anchor="ctr"/>
+          <a:lstStyle/>
+          <a:p>
+            <a:pPr indent="0" marL="0">
+              <a:buNone/>
+            </a:pPr>
+            <a:r>
+              <a:rPr lang="en-US" sz="850" i="1" dirty="0">
+                <a:solidFill>
+                  <a:srgbClr val="8B8578"/>
                 </a:solidFill>
                 <a:latin typeface="Calibri" pitchFamily="34" charset="0"/>
                 <a:ea typeface="Calibri" pitchFamily="34" charset="-122"/>
@@ -6846,19 +6952,19 @@
               </a:rPr>
               <a:t>RIKEN Nishina Center BigRIPS documentation; GSI Super-FRS project pages; FRIB at MSU (frib.msu.edu).</a:t>
             </a:r>
-            <a:endParaRPr lang="en-US" sz="900" dirty="0"/>
-          </a:p>
-        </p:txBody>
-      </p:sp>
-      <p:sp>
-        <p:nvSpPr>
-          <p:cNvPr id="50" name="Text 48"/>
-          <p:cNvSpPr/>
-          <p:nvPr/>
-        </p:nvSpPr>
-        <p:spPr>
-          <a:xfrm>
-            <a:off x="8808415" y="6473952"/>
+            <a:endParaRPr lang="en-US" sz="850" dirty="0"/>
+          </a:p>
+        </p:txBody>
+      </p:sp>
+      <p:sp>
+        <p:nvSpPr>
+          <p:cNvPr id="51" name="Text 49"/>
+          <p:cNvSpPr/>
+          <p:nvPr/>
+        </p:nvSpPr>
+        <p:spPr>
+          <a:xfrm>
+            <a:off x="8808415" y="6446520"/>
             <a:ext cx="2926080" cy="292608"/>
           </a:xfrm>
           <a:prstGeom prst="rect">
@@ -6875,17 +6981,17 @@
               <a:buNone/>
             </a:pPr>
             <a:r>
-              <a:rPr lang="en-US" sz="900" dirty="0">
-                <a:solidFill>
-                  <a:srgbClr val="64748B"/>
-                </a:solidFill>
-                <a:latin typeface="Calibri" pitchFamily="34" charset="0"/>
-                <a:ea typeface="Calibri" pitchFamily="34" charset="-122"/>
-                <a:cs typeface="Calibri" pitchFamily="34" charset="-120"/>
-              </a:rPr>
-              <a:t>In-Flight Fission · OrbitOS · 2026-04</a:t>
-            </a:r>
-            <a:endParaRPr lang="en-US" sz="900" dirty="0"/>
+              <a:rPr lang="en-US" sz="850" spc="100" kern="0" dirty="0">
+                <a:solidFill>
+                  <a:srgbClr val="8B8578"/>
+                </a:solidFill>
+                <a:latin typeface="Calibri" pitchFamily="34" charset="0"/>
+                <a:ea typeface="Calibri" pitchFamily="34" charset="-122"/>
+                <a:cs typeface="Calibri" pitchFamily="34" charset="-120"/>
+              </a:rPr>
+              <a:t>In-Flight Fission  ·  OrbitOS  ·  2026-04</a:t>
+            </a:r>
+            <a:endParaRPr lang="en-US" sz="850" dirty="0"/>
           </a:p>
         </p:txBody>
       </p:sp>
@@ -6903,7 +7009,7 @@
     <p:bg>
       <p:bgPr>
         <a:solidFill>
-          <a:srgbClr val="F8FAFC"/>
+          <a:srgbClr val="FAF7F2"/>
         </a:solidFill>
       </p:bgPr>
     </p:bg>
@@ -6930,17 +7036,17 @@
         <p:spPr>
           <a:xfrm>
             <a:off x="0" y="0"/>
-            <a:ext cx="12191695" cy="109728"/>
+            <a:ext cx="274320" cy="6858000"/>
           </a:xfrm>
           <a:prstGeom prst="rect">
             <a:avLst/>
           </a:prstGeom>
           <a:solidFill>
-            <a:srgbClr val="F59E0B"/>
+            <a:srgbClr val="E8A33D"/>
           </a:solidFill>
           <a:ln w="12700">
             <a:solidFill>
-              <a:srgbClr val="F59E0B"/>
+              <a:srgbClr val="E8A33D"/>
             </a:solidFill>
             <a:prstDash val="solid"/>
           </a:ln>
@@ -6948,32 +7054,57 @@
       </p:sp>
       <p:sp>
         <p:nvSpPr>
-          <p:cNvPr id="3" name="Text 1"/>
-          <p:cNvSpPr/>
-          <p:nvPr/>
-        </p:nvSpPr>
-        <p:spPr>
-          <a:xfrm>
-            <a:off x="457200" y="256032"/>
-            <a:ext cx="8229600" cy="320040"/>
-          </a:xfrm>
-          <a:prstGeom prst="rect">
-            <a:avLst/>
-          </a:prstGeom>
-          <a:noFill/>
-          <a:ln/>
-        </p:spPr>
-        <p:txBody>
-          <a:bodyPr wrap="square" lIns="0" tIns="0" rIns="0" bIns="0" rtlCol="0" anchor="ctr"/>
-          <a:lstStyle/>
-          <a:p>
-            <a:pPr indent="0" marL="0">
-              <a:buNone/>
-            </a:pPr>
-            <a:r>
-              <a:rPr lang="en-US" sz="1100" b="1" spc="400" kern="0" dirty="0">
-                <a:solidFill>
-                  <a:srgbClr val="64748B"/>
+          <p:cNvPr id="3" name="Shape 1"/>
+          <p:cNvSpPr/>
+          <p:nvPr/>
+        </p:nvSpPr>
+        <p:spPr>
+          <a:xfrm>
+            <a:off x="0" y="0"/>
+            <a:ext cx="12191695" cy="91440"/>
+          </a:xfrm>
+          <a:prstGeom prst="rect">
+            <a:avLst/>
+          </a:prstGeom>
+          <a:solidFill>
+            <a:srgbClr val="E8A33D"/>
+          </a:solidFill>
+          <a:ln w="12700">
+            <a:solidFill>
+              <a:srgbClr val="E8A33D"/>
+            </a:solidFill>
+            <a:prstDash val="solid"/>
+          </a:ln>
+        </p:spPr>
+      </p:sp>
+      <p:sp>
+        <p:nvSpPr>
+          <p:cNvPr id="4" name="Text 2"/>
+          <p:cNvSpPr/>
+          <p:nvPr/>
+        </p:nvSpPr>
+        <p:spPr>
+          <a:xfrm>
+            <a:off x="502920" y="292608"/>
+            <a:ext cx="8686800" cy="347472"/>
+          </a:xfrm>
+          <a:prstGeom prst="rect">
+            <a:avLst/>
+          </a:prstGeom>
+          <a:noFill/>
+          <a:ln/>
+        </p:spPr>
+        <p:txBody>
+          <a:bodyPr wrap="square" lIns="0" tIns="0" rIns="0" bIns="0" rtlCol="0" anchor="ctr"/>
+          <a:lstStyle/>
+          <a:p>
+            <a:pPr indent="0" marL="0">
+              <a:buNone/>
+            </a:pPr>
+            <a:r>
+              <a:rPr lang="en-US" sz="1050" b="1" spc="600" kern="0" dirty="0">
+                <a:solidFill>
+                  <a:srgbClr val="8B8578"/>
                 </a:solidFill>
                 <a:latin typeface="Calibri" pitchFamily="34" charset="0"/>
                 <a:ea typeface="Calibri" pitchFamily="34" charset="-122"/>
@@ -6981,20 +7112,20 @@
               </a:rPr>
               <a:t>DISCOVERY CAMPAIGN · JAPAN</a:t>
             </a:r>
-            <a:endParaRPr lang="en-US" sz="1100" dirty="0"/>
-          </a:p>
-        </p:txBody>
-      </p:sp>
-      <p:sp>
-        <p:nvSpPr>
-          <p:cNvPr id="4" name="Text 2"/>
-          <p:cNvSpPr/>
-          <p:nvPr/>
-        </p:nvSpPr>
-        <p:spPr>
-          <a:xfrm>
-            <a:off x="10728655" y="256032"/>
-            <a:ext cx="1005840" cy="320040"/>
+            <a:endParaRPr lang="en-US" sz="1050" dirty="0"/>
+          </a:p>
+        </p:txBody>
+      </p:sp>
+      <p:sp>
+        <p:nvSpPr>
+          <p:cNvPr id="5" name="Text 3"/>
+          <p:cNvSpPr/>
+          <p:nvPr/>
+        </p:nvSpPr>
+        <p:spPr>
+          <a:xfrm>
+            <a:off x="10728655" y="292608"/>
+            <a:ext cx="1005840" cy="347472"/>
           </a:xfrm>
           <a:prstGeom prst="rect">
             <a:avLst/>
@@ -7010,62 +7141,62 @@
               <a:buNone/>
             </a:pPr>
             <a:r>
-              <a:rPr lang="en-US" sz="1100" b="1" dirty="0">
-                <a:solidFill>
-                  <a:srgbClr val="64748B"/>
-                </a:solidFill>
-                <a:latin typeface="Calibri" pitchFamily="34" charset="0"/>
-                <a:ea typeface="Calibri" pitchFamily="34" charset="-122"/>
-                <a:cs typeface="Calibri" pitchFamily="34" charset="-120"/>
-              </a:rPr>
-              <a:t>05 / 09</a:t>
-            </a:r>
-            <a:endParaRPr lang="en-US" sz="1100" dirty="0"/>
-          </a:p>
-        </p:txBody>
-      </p:sp>
-      <p:sp>
-        <p:nvSpPr>
-          <p:cNvPr id="5" name="Text 3"/>
-          <p:cNvSpPr/>
-          <p:nvPr/>
-        </p:nvSpPr>
-        <p:spPr>
-          <a:xfrm>
-            <a:off x="457200" y="594360"/>
-            <a:ext cx="11247120" cy="822960"/>
-          </a:xfrm>
-          <a:prstGeom prst="rect">
-            <a:avLst/>
-          </a:prstGeom>
-          <a:noFill/>
-          <a:ln/>
-        </p:spPr>
-        <p:txBody>
-          <a:bodyPr wrap="square" lIns="0" tIns="0" rIns="0" bIns="0" rtlCol="0" anchor="ctr"/>
-          <a:lstStyle/>
-          <a:p>
-            <a:pPr indent="0" marL="0">
-              <a:buNone/>
-            </a:pPr>
-            <a:r>
-              <a:rPr lang="en-US" sz="2800" b="1" dirty="0">
-                <a:solidFill>
-                  <a:srgbClr val="1E293B"/>
-                </a:solidFill>
-                <a:latin typeface="Cambria" pitchFamily="34" charset="0"/>
-                <a:ea typeface="Cambria" pitchFamily="34" charset="-122"/>
-                <a:cs typeface="Cambria" pitchFamily="34" charset="-120"/>
+              <a:rPr lang="en-US" sz="1050" b="1" spc="200" kern="0" dirty="0">
+                <a:solidFill>
+                  <a:srgbClr val="8B8578"/>
+                </a:solidFill>
+                <a:latin typeface="Calibri" pitchFamily="34" charset="0"/>
+                <a:ea typeface="Calibri" pitchFamily="34" charset="-122"/>
+                <a:cs typeface="Calibri" pitchFamily="34" charset="-120"/>
+              </a:rPr>
+              <a:t>05  ·  09</a:t>
+            </a:r>
+            <a:endParaRPr lang="en-US" sz="1050" dirty="0"/>
+          </a:p>
+        </p:txBody>
+      </p:sp>
+      <p:sp>
+        <p:nvSpPr>
+          <p:cNvPr id="6" name="Text 4"/>
+          <p:cNvSpPr/>
+          <p:nvPr/>
+        </p:nvSpPr>
+        <p:spPr>
+          <a:xfrm>
+            <a:off x="502920" y="713232"/>
+            <a:ext cx="11155680" cy="868680"/>
+          </a:xfrm>
+          <a:prstGeom prst="rect">
+            <a:avLst/>
+          </a:prstGeom>
+          <a:noFill/>
+          <a:ln/>
+        </p:spPr>
+        <p:txBody>
+          <a:bodyPr wrap="square" lIns="0" tIns="0" rIns="0" bIns="0" rtlCol="0" anchor="ctr"/>
+          <a:lstStyle/>
+          <a:p>
+            <a:pPr indent="0" marL="0">
+              <a:buNone/>
+            </a:pPr>
+            <a:r>
+              <a:rPr lang="en-US" sz="3600" b="1" dirty="0">
+                <a:solidFill>
+                  <a:srgbClr val="1A1F2E"/>
+                </a:solidFill>
+                <a:latin typeface="Palatino" pitchFamily="34" charset="0"/>
+                <a:ea typeface="Palatino" pitchFamily="34" charset="-122"/>
+                <a:cs typeface="Palatino" pitchFamily="34" charset="-120"/>
               </a:rPr>
               <a:t>BigRIPS: Opening the Neutron-Rich Frontier</a:t>
             </a:r>
-            <a:endParaRPr lang="en-US" sz="2800" dirty="0"/>
-          </a:p>
-        </p:txBody>
-      </p:sp>
-      <p:sp>
-        <p:nvSpPr>
-          <p:cNvPr id="6" name="Shape 4"/>
+            <a:endParaRPr lang="en-US" sz="3600" dirty="0"/>
+          </a:p>
+        </p:txBody>
+      </p:sp>
+      <p:sp>
+        <p:nvSpPr>
+          <p:cNvPr id="7" name="Shape 5"/>
           <p:cNvSpPr/>
           <p:nvPr/>
         </p:nvSpPr>
@@ -7074,22 +7205,24 @@
             <a:off x="457200" y="1554480"/>
             <a:ext cx="5029200" cy="3017520"/>
           </a:xfrm>
-          <a:prstGeom prst="rect">
-            <a:avLst/>
+          <a:prstGeom prst="roundRect">
+            <a:avLst>
+              <a:gd name="adj" fmla="val 2424"/>
+            </a:avLst>
           </a:prstGeom>
           <a:solidFill>
             <a:srgbClr val="FFFFFF"/>
           </a:solidFill>
-          <a:ln w="9525">
+          <a:ln w="6350">
             <a:solidFill>
-              <a:srgbClr val="E2E8F0"/>
+              <a:srgbClr val="E8DFD2"/>
             </a:solidFill>
             <a:prstDash val="solid"/>
           </a:ln>
           <a:effectLst>
-            <a:outerShdw sx="100000" sy="100000" kx="0" ky="0" algn="bl" rotWithShape="0" blurRad="127000" dist="25400" dir="5400000">
-              <a:srgbClr val="000000">
-                <a:alpha val="7000"/>
+            <a:outerShdw sx="100000" sy="100000" kx="0" ky="0" algn="bl" rotWithShape="0" blurRad="177800" dist="38100" dir="5400000">
+              <a:srgbClr val="1A1F2E">
+                <a:alpha val="8000"/>
               </a:srgbClr>
             </a:outerShdw>
           </a:effectLst>
@@ -7097,24 +7230,24 @@
       </p:sp>
       <p:sp>
         <p:nvSpPr>
-          <p:cNvPr id="7" name="Shape 5"/>
-          <p:cNvSpPr/>
-          <p:nvPr/>
-        </p:nvSpPr>
-        <p:spPr>
-          <a:xfrm>
-            <a:off x="457200" y="1554480"/>
-            <a:ext cx="73152" cy="3017520"/>
+          <p:cNvPr id="8" name="Shape 6"/>
+          <p:cNvSpPr/>
+          <p:nvPr/>
+        </p:nvSpPr>
+        <p:spPr>
+          <a:xfrm>
+            <a:off x="457200" y="1627632"/>
+            <a:ext cx="73152" cy="2871216"/>
           </a:xfrm>
           <a:prstGeom prst="rect">
             <a:avLst/>
           </a:prstGeom>
           <a:solidFill>
-            <a:srgbClr val="F59E0B"/>
+            <a:srgbClr val="E8A33D"/>
           </a:solidFill>
           <a:ln w="12700">
             <a:solidFill>
-              <a:srgbClr val="F59E0B"/>
+              <a:srgbClr val="E8A33D"/>
             </a:solidFill>
             <a:prstDash val="solid"/>
           </a:ln>
@@ -7122,7 +7255,7 @@
       </p:sp>
       <p:sp>
         <p:nvSpPr>
-          <p:cNvPr id="8" name="Text 6"/>
+          <p:cNvPr id="9" name="Text 7"/>
           <p:cNvSpPr/>
           <p:nvPr/>
         </p:nvSpPr>
@@ -7147,7 +7280,7 @@
             <a:r>
               <a:rPr lang="en-US" sz="1100" b="1" spc="400" kern="0" dirty="0">
                 <a:solidFill>
-                  <a:srgbClr val="64748B"/>
+                  <a:srgbClr val="8B8578"/>
                 </a:solidFill>
                 <a:latin typeface="Calibri" pitchFamily="34" charset="0"/>
                 <a:ea typeface="Calibri" pitchFamily="34" charset="-122"/>
@@ -7161,7 +7294,7 @@
       </p:sp>
       <p:sp>
         <p:nvSpPr>
-          <p:cNvPr id="9" name="Text 7"/>
+          <p:cNvPr id="10" name="Text 8"/>
           <p:cNvSpPr/>
           <p:nvPr/>
         </p:nvSpPr>
@@ -7186,11 +7319,11 @@
             <a:r>
               <a:rPr lang="en-US" sz="3600" b="1" baseline="30000" dirty="0">
                 <a:solidFill>
-                  <a:srgbClr val="075985"/>
-                </a:solidFill>
-                <a:latin typeface="Cambria" pitchFamily="34" charset="0"/>
-                <a:ea typeface="Cambria" pitchFamily="34" charset="-122"/>
-                <a:cs typeface="Cambria" pitchFamily="34" charset="-120"/>
+                  <a:srgbClr val="2D4A4C"/>
+                </a:solidFill>
+                <a:latin typeface="Palatino" pitchFamily="34" charset="0"/>
+                <a:ea typeface="Palatino" pitchFamily="34" charset="-122"/>
+                <a:cs typeface="Palatino" pitchFamily="34" charset="-120"/>
               </a:rPr>
               <a:t>125</a:t>
             </a:r>
@@ -7200,11 +7333,11 @@
             <a:r>
               <a:rPr lang="en-US" sz="5600" b="1" dirty="0">
                 <a:solidFill>
-                  <a:srgbClr val="075985"/>
-                </a:solidFill>
-                <a:latin typeface="Cambria" pitchFamily="34" charset="0"/>
-                <a:ea typeface="Cambria" pitchFamily="34" charset="-122"/>
-                <a:cs typeface="Cambria" pitchFamily="34" charset="-120"/>
+                  <a:srgbClr val="2D4A4C"/>
+                </a:solidFill>
+                <a:latin typeface="Palatino" pitchFamily="34" charset="0"/>
+                <a:ea typeface="Palatino" pitchFamily="34" charset="-122"/>
+                <a:cs typeface="Palatino" pitchFamily="34" charset="-120"/>
               </a:rPr>
               <a:t>Pd</a:t>
             </a:r>
@@ -7214,11 +7347,11 @@
             <a:r>
               <a:rPr lang="en-US" sz="2800" dirty="0">
                 <a:solidFill>
-                  <a:srgbClr val="64748B"/>
-                </a:solidFill>
-                <a:latin typeface="Cambria" pitchFamily="34" charset="0"/>
-                <a:ea typeface="Cambria" pitchFamily="34" charset="-122"/>
-                <a:cs typeface="Cambria" pitchFamily="34" charset="-120"/>
+                  <a:srgbClr val="8B8578"/>
+                </a:solidFill>
+                <a:latin typeface="Palatino" pitchFamily="34" charset="0"/>
+                <a:ea typeface="Palatino" pitchFamily="34" charset="-122"/>
+                <a:cs typeface="Palatino" pitchFamily="34" charset="-120"/>
               </a:rPr>
               <a:t>  &amp;  </a:t>
             </a:r>
@@ -7228,11 +7361,11 @@
             <a:r>
               <a:rPr lang="en-US" sz="3600" b="1" baseline="30000" dirty="0">
                 <a:solidFill>
-                  <a:srgbClr val="075985"/>
-                </a:solidFill>
-                <a:latin typeface="Cambria" pitchFamily="34" charset="0"/>
-                <a:ea typeface="Cambria" pitchFamily="34" charset="-122"/>
-                <a:cs typeface="Cambria" pitchFamily="34" charset="-120"/>
+                  <a:srgbClr val="2D4A4C"/>
+                </a:solidFill>
+                <a:latin typeface="Palatino" pitchFamily="34" charset="0"/>
+                <a:ea typeface="Palatino" pitchFamily="34" charset="-122"/>
+                <a:cs typeface="Palatino" pitchFamily="34" charset="-120"/>
               </a:rPr>
               <a:t>126</a:t>
             </a:r>
@@ -7242,11 +7375,11 @@
             <a:r>
               <a:rPr lang="en-US" sz="5600" b="1" dirty="0">
                 <a:solidFill>
-                  <a:srgbClr val="075985"/>
-                </a:solidFill>
-                <a:latin typeface="Cambria" pitchFamily="34" charset="0"/>
-                <a:ea typeface="Cambria" pitchFamily="34" charset="-122"/>
-                <a:cs typeface="Cambria" pitchFamily="34" charset="-120"/>
+                  <a:srgbClr val="2D4A4C"/>
+                </a:solidFill>
+                <a:latin typeface="Palatino" pitchFamily="34" charset="0"/>
+                <a:ea typeface="Palatino" pitchFamily="34" charset="-122"/>
+                <a:cs typeface="Palatino" pitchFamily="34" charset="-120"/>
               </a:rPr>
               <a:t>Pd</a:t>
             </a:r>
@@ -7256,7 +7389,7 @@
       </p:sp>
       <p:sp>
         <p:nvSpPr>
-          <p:cNvPr id="10" name="Text 8"/>
+          <p:cNvPr id="11" name="Text 9"/>
           <p:cNvSpPr/>
           <p:nvPr/>
         </p:nvSpPr>
@@ -7281,7 +7414,7 @@
             <a:r>
               <a:rPr lang="en-US" sz="1200" dirty="0">
                 <a:solidFill>
-                  <a:srgbClr val="1E293B"/>
+                  <a:srgbClr val="1A1F2E"/>
                 </a:solidFill>
                 <a:latin typeface="Calibri" pitchFamily="34" charset="0"/>
                 <a:ea typeface="Calibri" pitchFamily="34" charset="-122"/>
@@ -7295,7 +7428,7 @@
             <a:r>
               <a:rPr lang="en-US" sz="1200" baseline="30000" dirty="0">
                 <a:solidFill>
-                  <a:srgbClr val="1E293B"/>
+                  <a:srgbClr val="1A1F2E"/>
                 </a:solidFill>
                 <a:latin typeface="Calibri" pitchFamily="34" charset="0"/>
                 <a:ea typeface="Calibri" pitchFamily="34" charset="-122"/>
@@ -7309,7 +7442,7 @@
             <a:r>
               <a:rPr lang="en-US" sz="1200" dirty="0">
                 <a:solidFill>
-                  <a:srgbClr val="1E293B"/>
+                  <a:srgbClr val="1A1F2E"/>
                 </a:solidFill>
                 <a:latin typeface="Calibri" pitchFamily="34" charset="0"/>
                 <a:ea typeface="Calibri" pitchFamily="34" charset="-122"/>
@@ -7323,7 +7456,7 @@
       </p:sp>
       <p:sp>
         <p:nvSpPr>
-          <p:cNvPr id="11" name="Text 9"/>
+          <p:cNvPr id="12" name="Text 10"/>
           <p:cNvSpPr/>
           <p:nvPr/>
         </p:nvSpPr>
@@ -7348,7 +7481,7 @@
             <a:r>
               <a:rPr lang="en-US" sz="1300" b="1" spc="200" kern="0" dirty="0">
                 <a:solidFill>
-                  <a:srgbClr val="64748B"/>
+                  <a:srgbClr val="8B8578"/>
                 </a:solidFill>
                 <a:latin typeface="Calibri" pitchFamily="34" charset="0"/>
                 <a:ea typeface="Calibri" pitchFamily="34" charset="-122"/>
@@ -7362,7 +7495,7 @@
       </p:sp>
       <p:sp>
         <p:nvSpPr>
-          <p:cNvPr id="12" name="Shape 10"/>
+          <p:cNvPr id="13" name="Shape 11"/>
           <p:cNvSpPr/>
           <p:nvPr/>
         </p:nvSpPr>
@@ -7375,11 +7508,11 @@
             <a:avLst/>
           </a:prstGeom>
           <a:solidFill>
-            <a:srgbClr val="075985"/>
+            <a:srgbClr val="2D4A4C"/>
           </a:solidFill>
           <a:ln w="12700">
             <a:solidFill>
-              <a:srgbClr val="075985"/>
+              <a:srgbClr val="2D4A4C"/>
             </a:solidFill>
             <a:prstDash val="solid"/>
           </a:ln>
@@ -7387,7 +7520,7 @@
       </p:sp>
       <p:sp>
         <p:nvSpPr>
-          <p:cNvPr id="13" name="Text 11"/>
+          <p:cNvPr id="14" name="Text 12"/>
           <p:cNvSpPr/>
           <p:nvPr/>
         </p:nvSpPr>
@@ -7412,11 +7545,11 @@
             <a:r>
               <a:rPr lang="en-US" sz="1400" b="1" dirty="0">
                 <a:solidFill>
-                  <a:srgbClr val="F59E0B"/>
-                </a:solidFill>
-                <a:latin typeface="Cambria" pitchFamily="34" charset="0"/>
-                <a:ea typeface="Cambria" pitchFamily="34" charset="-122"/>
-                <a:cs typeface="Cambria" pitchFamily="34" charset="-120"/>
+                  <a:srgbClr val="E8A33D"/>
+                </a:solidFill>
+                <a:latin typeface="Palatino" pitchFamily="34" charset="0"/>
+                <a:ea typeface="Palatino" pitchFamily="34" charset="-122"/>
+                <a:cs typeface="Palatino" pitchFamily="34" charset="-120"/>
               </a:rPr>
               <a:t>2010</a:t>
             </a:r>
@@ -7426,7 +7559,7 @@
       </p:sp>
       <p:sp>
         <p:nvSpPr>
-          <p:cNvPr id="14" name="Text 12"/>
+          <p:cNvPr id="15" name="Text 13"/>
           <p:cNvSpPr/>
           <p:nvPr/>
         </p:nvSpPr>
@@ -7451,7 +7584,7 @@
             <a:r>
               <a:rPr lang="en-US" sz="1100" dirty="0">
                 <a:solidFill>
-                  <a:srgbClr val="1E293B"/>
+                  <a:srgbClr val="1A1F2E"/>
                 </a:solidFill>
                 <a:latin typeface="Calibri" pitchFamily="34" charset="0"/>
                 <a:ea typeface="Calibri" pitchFamily="34" charset="-122"/>
@@ -7465,7 +7598,7 @@
       </p:sp>
       <p:sp>
         <p:nvSpPr>
-          <p:cNvPr id="15" name="Shape 13"/>
+          <p:cNvPr id="16" name="Shape 14"/>
           <p:cNvSpPr/>
           <p:nvPr/>
         </p:nvSpPr>
@@ -7478,11 +7611,11 @@
             <a:avLst/>
           </a:prstGeom>
           <a:solidFill>
-            <a:srgbClr val="075985"/>
+            <a:srgbClr val="2D4A4C"/>
           </a:solidFill>
           <a:ln w="12700">
             <a:solidFill>
-              <a:srgbClr val="075985"/>
+              <a:srgbClr val="2D4A4C"/>
             </a:solidFill>
             <a:prstDash val="solid"/>
           </a:ln>
@@ -7490,7 +7623,7 @@
       </p:sp>
       <p:sp>
         <p:nvSpPr>
-          <p:cNvPr id="16" name="Text 14"/>
+          <p:cNvPr id="17" name="Text 15"/>
           <p:cNvSpPr/>
           <p:nvPr/>
         </p:nvSpPr>
@@ -7515,11 +7648,11 @@
             <a:r>
               <a:rPr lang="en-US" sz="1400" b="1" dirty="0">
                 <a:solidFill>
-                  <a:srgbClr val="F59E0B"/>
-                </a:solidFill>
-                <a:latin typeface="Cambria" pitchFamily="34" charset="0"/>
-                <a:ea typeface="Cambria" pitchFamily="34" charset="-122"/>
-                <a:cs typeface="Cambria" pitchFamily="34" charset="-120"/>
+                  <a:srgbClr val="E8A33D"/>
+                </a:solidFill>
+                <a:latin typeface="Palatino" pitchFamily="34" charset="0"/>
+                <a:ea typeface="Palatino" pitchFamily="34" charset="-122"/>
+                <a:cs typeface="Palatino" pitchFamily="34" charset="-120"/>
               </a:rPr>
               <a:t>2018</a:t>
             </a:r>
@@ -7529,7 +7662,7 @@
       </p:sp>
       <p:sp>
         <p:nvSpPr>
-          <p:cNvPr id="17" name="Text 15"/>
+          <p:cNvPr id="18" name="Text 16"/>
           <p:cNvSpPr/>
           <p:nvPr/>
         </p:nvSpPr>
@@ -7554,7 +7687,7 @@
             <a:r>
               <a:rPr lang="en-US" sz="1100" dirty="0">
                 <a:solidFill>
-                  <a:srgbClr val="1E293B"/>
+                  <a:srgbClr val="1A1F2E"/>
                 </a:solidFill>
                 <a:latin typeface="Calibri" pitchFamily="34" charset="0"/>
                 <a:ea typeface="Calibri" pitchFamily="34" charset="-122"/>
@@ -7568,7 +7701,7 @@
       </p:sp>
       <p:sp>
         <p:nvSpPr>
-          <p:cNvPr id="18" name="Shape 16"/>
+          <p:cNvPr id="19" name="Shape 17"/>
           <p:cNvSpPr/>
           <p:nvPr/>
         </p:nvSpPr>
@@ -7581,11 +7714,11 @@
             <a:avLst/>
           </a:prstGeom>
           <a:solidFill>
-            <a:srgbClr val="075985"/>
+            <a:srgbClr val="2D4A4C"/>
           </a:solidFill>
           <a:ln w="12700">
             <a:solidFill>
-              <a:srgbClr val="075985"/>
+              <a:srgbClr val="2D4A4C"/>
             </a:solidFill>
             <a:prstDash val="solid"/>
           </a:ln>
@@ -7593,7 +7726,7 @@
       </p:sp>
       <p:sp>
         <p:nvSpPr>
-          <p:cNvPr id="19" name="Text 17"/>
+          <p:cNvPr id="20" name="Text 18"/>
           <p:cNvSpPr/>
           <p:nvPr/>
         </p:nvSpPr>
@@ -7618,11 +7751,11 @@
             <a:r>
               <a:rPr lang="en-US" sz="1400" b="1" dirty="0">
                 <a:solidFill>
-                  <a:srgbClr val="F59E0B"/>
-                </a:solidFill>
-                <a:latin typeface="Cambria" pitchFamily="34" charset="0"/>
-                <a:ea typeface="Cambria" pitchFamily="34" charset="-122"/>
-                <a:cs typeface="Cambria" pitchFamily="34" charset="-120"/>
+                  <a:srgbClr val="E8A33D"/>
+                </a:solidFill>
+                <a:latin typeface="Palatino" pitchFamily="34" charset="0"/>
+                <a:ea typeface="Palatino" pitchFamily="34" charset="-122"/>
+                <a:cs typeface="Palatino" pitchFamily="34" charset="-120"/>
               </a:rPr>
               <a:t>2024</a:t>
             </a:r>
@@ -7632,7 +7765,7 @@
       </p:sp>
       <p:sp>
         <p:nvSpPr>
-          <p:cNvPr id="20" name="Text 18"/>
+          <p:cNvPr id="21" name="Text 19"/>
           <p:cNvSpPr/>
           <p:nvPr/>
         </p:nvSpPr>
@@ -7657,7 +7790,7 @@
             <a:r>
               <a:rPr lang="en-US" sz="1100" dirty="0">
                 <a:solidFill>
-                  <a:srgbClr val="1E293B"/>
+                  <a:srgbClr val="1A1F2E"/>
                 </a:solidFill>
                 <a:latin typeface="Calibri" pitchFamily="34" charset="0"/>
                 <a:ea typeface="Calibri" pitchFamily="34" charset="-122"/>
@@ -7671,7 +7804,7 @@
       </p:sp>
       <p:sp>
         <p:nvSpPr>
-          <p:cNvPr id="21" name="Shape 19"/>
+          <p:cNvPr id="22" name="Shape 20"/>
           <p:cNvSpPr/>
           <p:nvPr/>
         </p:nvSpPr>
@@ -7684,11 +7817,11 @@
             <a:avLst/>
           </a:prstGeom>
           <a:solidFill>
-            <a:srgbClr val="075985"/>
+            <a:srgbClr val="2D4A4C"/>
           </a:solidFill>
           <a:ln w="12700">
             <a:solidFill>
-              <a:srgbClr val="075985"/>
+              <a:srgbClr val="2D4A4C"/>
             </a:solidFill>
             <a:prstDash val="solid"/>
           </a:ln>
@@ -7696,7 +7829,7 @@
       </p:sp>
       <p:sp>
         <p:nvSpPr>
-          <p:cNvPr id="22" name="Text 20"/>
+          <p:cNvPr id="23" name="Text 21"/>
           <p:cNvSpPr/>
           <p:nvPr/>
         </p:nvSpPr>
@@ -7721,11 +7854,11 @@
             <a:r>
               <a:rPr lang="en-US" sz="1400" b="1" dirty="0">
                 <a:solidFill>
-                  <a:srgbClr val="F59E0B"/>
-                </a:solidFill>
-                <a:latin typeface="Cambria" pitchFamily="34" charset="0"/>
-                <a:ea typeface="Cambria" pitchFamily="34" charset="-122"/>
-                <a:cs typeface="Cambria" pitchFamily="34" charset="-120"/>
+                  <a:srgbClr val="E8A33D"/>
+                </a:solidFill>
+                <a:latin typeface="Palatino" pitchFamily="34" charset="0"/>
+                <a:ea typeface="Palatino" pitchFamily="34" charset="-122"/>
+                <a:cs typeface="Palatino" pitchFamily="34" charset="-120"/>
               </a:rPr>
               <a:t>2026</a:t>
             </a:r>
@@ -7735,7 +7868,7 @@
       </p:sp>
       <p:sp>
         <p:nvSpPr>
-          <p:cNvPr id="23" name="Text 21"/>
+          <p:cNvPr id="24" name="Text 22"/>
           <p:cNvSpPr/>
           <p:nvPr/>
         </p:nvSpPr>
@@ -7760,7 +7893,7 @@
             <a:r>
               <a:rPr lang="en-US" sz="1100" dirty="0">
                 <a:solidFill>
-                  <a:srgbClr val="1E293B"/>
+                  <a:srgbClr val="1A1F2E"/>
                 </a:solidFill>
                 <a:latin typeface="Calibri" pitchFamily="34" charset="0"/>
                 <a:ea typeface="Calibri" pitchFamily="34" charset="-122"/>
@@ -7774,7 +7907,7 @@
       </p:sp>
       <p:sp>
         <p:nvSpPr>
-          <p:cNvPr id="24" name="Shape 22"/>
+          <p:cNvPr id="25" name="Shape 23"/>
           <p:cNvSpPr/>
           <p:nvPr/>
         </p:nvSpPr>
@@ -7787,11 +7920,11 @@
             <a:avLst/>
           </a:prstGeom>
           <a:solidFill>
-            <a:srgbClr val="0A1929"/>
+            <a:srgbClr val="0B1426"/>
           </a:solidFill>
           <a:ln w="12700">
             <a:solidFill>
-              <a:srgbClr val="0A1929"/>
+              <a:srgbClr val="0B1426"/>
             </a:solidFill>
             <a:prstDash val="solid"/>
           </a:ln>
@@ -7799,7 +7932,7 @@
       </p:sp>
       <p:sp>
         <p:nvSpPr>
-          <p:cNvPr id="25" name="Text 23"/>
+          <p:cNvPr id="26" name="Text 24"/>
           <p:cNvSpPr/>
           <p:nvPr/>
         </p:nvSpPr>
@@ -7824,7 +7957,7 @@
             <a:r>
               <a:rPr lang="en-US" sz="1100" b="1" spc="400" kern="0" dirty="0">
                 <a:solidFill>
-                  <a:srgbClr val="F59E0B"/>
+                  <a:srgbClr val="E8A33D"/>
                 </a:solidFill>
                 <a:latin typeface="Calibri" pitchFamily="34" charset="0"/>
                 <a:ea typeface="Calibri" pitchFamily="34" charset="-122"/>
@@ -7838,7 +7971,7 @@
       </p:sp>
       <p:sp>
         <p:nvSpPr>
-          <p:cNvPr id="26" name="Text 24"/>
+          <p:cNvPr id="27" name="Text 25"/>
           <p:cNvSpPr/>
           <p:nvPr/>
         </p:nvSpPr>
@@ -7863,7 +7996,7 @@
             <a:r>
               <a:rPr lang="en-US" sz="1400" dirty="0">
                 <a:solidFill>
-                  <a:srgbClr val="F8FAFC"/>
+                  <a:srgbClr val="F5EFE6"/>
                 </a:solidFill>
                 <a:latin typeface="Calibri" pitchFamily="34" charset="0"/>
                 <a:ea typeface="Calibri" pitchFamily="34" charset="-122"/>
@@ -7877,7 +8010,7 @@
             <a:r>
               <a:rPr lang="en-US" sz="1400" baseline="30000" dirty="0">
                 <a:solidFill>
-                  <a:srgbClr val="F8FAFC"/>
+                  <a:srgbClr val="F5EFE6"/>
                 </a:solidFill>
                 <a:latin typeface="Calibri" pitchFamily="34" charset="0"/>
                 <a:ea typeface="Calibri" pitchFamily="34" charset="-122"/>
@@ -7891,7 +8024,7 @@
             <a:r>
               <a:rPr lang="en-US" sz="1400" dirty="0">
                 <a:solidFill>
-                  <a:srgbClr val="F8FAFC"/>
+                  <a:srgbClr val="F5EFE6"/>
                 </a:solidFill>
                 <a:latin typeface="Calibri" pitchFamily="34" charset="0"/>
                 <a:ea typeface="Calibri" pitchFamily="34" charset="-122"/>
@@ -7905,22 +8038,22 @@
       </p:sp>
       <p:sp>
         <p:nvSpPr>
-          <p:cNvPr id="27" name="Shape 25"/>
-          <p:cNvSpPr/>
-          <p:nvPr/>
-        </p:nvSpPr>
-        <p:spPr>
-          <a:xfrm>
-            <a:off x="457200" y="6446520"/>
-            <a:ext cx="11277295" cy="0"/>
+          <p:cNvPr id="28" name="Shape 26"/>
+          <p:cNvSpPr/>
+          <p:nvPr/>
+        </p:nvSpPr>
+        <p:spPr>
+          <a:xfrm>
+            <a:off x="502920" y="6400800"/>
+            <a:ext cx="11185855" cy="0"/>
           </a:xfrm>
           <a:prstGeom prst="line">
             <a:avLst/>
           </a:prstGeom>
           <a:noFill/>
-          <a:ln w="9525">
+          <a:ln w="6350">
             <a:solidFill>
-              <a:srgbClr val="CBD5E1"/>
+              <a:srgbClr val="D9D2C5"/>
             </a:solidFill>
             <a:prstDash val="solid"/>
           </a:ln>
@@ -7928,32 +8061,32 @@
       </p:sp>
       <p:sp>
         <p:nvSpPr>
-          <p:cNvPr id="28" name="Text 26"/>
-          <p:cNvSpPr/>
-          <p:nvPr/>
-        </p:nvSpPr>
-        <p:spPr>
-          <a:xfrm>
-            <a:off x="457200" y="6473952"/>
-            <a:ext cx="8351215" cy="292608"/>
-          </a:xfrm>
-          <a:prstGeom prst="rect">
-            <a:avLst/>
-          </a:prstGeom>
-          <a:noFill/>
-          <a:ln/>
-        </p:spPr>
-        <p:txBody>
-          <a:bodyPr wrap="square" lIns="0" tIns="0" rIns="0" bIns="0" rtlCol="0" anchor="ctr"/>
-          <a:lstStyle/>
-          <a:p>
-            <a:pPr indent="0" marL="0">
-              <a:buNone/>
-            </a:pPr>
-            <a:r>
-              <a:rPr lang="en-US" sz="900" i="1" dirty="0">
-                <a:solidFill>
-                  <a:srgbClr val="64748B"/>
+          <p:cNvPr id="29" name="Text 27"/>
+          <p:cNvSpPr/>
+          <p:nvPr/>
+        </p:nvSpPr>
+        <p:spPr>
+          <a:xfrm>
+            <a:off x="502920" y="6446520"/>
+            <a:ext cx="8259775" cy="292608"/>
+          </a:xfrm>
+          <a:prstGeom prst="rect">
+            <a:avLst/>
+          </a:prstGeom>
+          <a:noFill/>
+          <a:ln/>
+        </p:spPr>
+        <p:txBody>
+          <a:bodyPr wrap="square" lIns="0" tIns="0" rIns="0" bIns="0" rtlCol="0" anchor="ctr"/>
+          <a:lstStyle/>
+          <a:p>
+            <a:pPr indent="0" marL="0">
+              <a:buNone/>
+            </a:pPr>
+            <a:r>
+              <a:rPr lang="en-US" sz="850" i="1" dirty="0">
+                <a:solidFill>
+                  <a:srgbClr val="8B8578"/>
                 </a:solidFill>
                 <a:latin typeface="Calibri" pitchFamily="34" charset="0"/>
                 <a:ea typeface="Calibri" pitchFamily="34" charset="-122"/>
@@ -7961,19 +8094,19 @@
               </a:rPr>
               <a:t>T. Ohnishi et al., J. Phys. Soc. Jpn. 77, 083201 (2008); 79, 073201 (2010); JPSJ 87, 014203 (2018).</a:t>
             </a:r>
-            <a:endParaRPr lang="en-US" sz="900" dirty="0"/>
-          </a:p>
-        </p:txBody>
-      </p:sp>
-      <p:sp>
-        <p:nvSpPr>
-          <p:cNvPr id="29" name="Text 27"/>
-          <p:cNvSpPr/>
-          <p:nvPr/>
-        </p:nvSpPr>
-        <p:spPr>
-          <a:xfrm>
-            <a:off x="8808415" y="6473952"/>
+            <a:endParaRPr lang="en-US" sz="850" dirty="0"/>
+          </a:p>
+        </p:txBody>
+      </p:sp>
+      <p:sp>
+        <p:nvSpPr>
+          <p:cNvPr id="30" name="Text 28"/>
+          <p:cNvSpPr/>
+          <p:nvPr/>
+        </p:nvSpPr>
+        <p:spPr>
+          <a:xfrm>
+            <a:off x="8808415" y="6446520"/>
             <a:ext cx="2926080" cy="292608"/>
           </a:xfrm>
           <a:prstGeom prst="rect">
@@ -7990,17 +8123,17 @@
               <a:buNone/>
             </a:pPr>
             <a:r>
-              <a:rPr lang="en-US" sz="900" dirty="0">
-                <a:solidFill>
-                  <a:srgbClr val="64748B"/>
-                </a:solidFill>
-                <a:latin typeface="Calibri" pitchFamily="34" charset="0"/>
-                <a:ea typeface="Calibri" pitchFamily="34" charset="-122"/>
-                <a:cs typeface="Calibri" pitchFamily="34" charset="-120"/>
-              </a:rPr>
-              <a:t>In-Flight Fission · OrbitOS · 2026-04</a:t>
-            </a:r>
-            <a:endParaRPr lang="en-US" sz="900" dirty="0"/>
+              <a:rPr lang="en-US" sz="850" spc="100" kern="0" dirty="0">
+                <a:solidFill>
+                  <a:srgbClr val="8B8578"/>
+                </a:solidFill>
+                <a:latin typeface="Calibri" pitchFamily="34" charset="0"/>
+                <a:ea typeface="Calibri" pitchFamily="34" charset="-122"/>
+                <a:cs typeface="Calibri" pitchFamily="34" charset="-120"/>
+              </a:rPr>
+              <a:t>In-Flight Fission  ·  OrbitOS  ·  2026-04</a:t>
+            </a:r>
+            <a:endParaRPr lang="en-US" sz="850" dirty="0"/>
           </a:p>
         </p:txBody>
       </p:sp>
@@ -8018,7 +8151,7 @@
     <p:bg>
       <p:bgPr>
         <a:solidFill>
-          <a:srgbClr val="F8FAFC"/>
+          <a:srgbClr val="FAF7F2"/>
         </a:solidFill>
       </p:bgPr>
     </p:bg>
@@ -8045,17 +8178,17 @@
         <p:spPr>
           <a:xfrm>
             <a:off x="0" y="0"/>
-            <a:ext cx="12191695" cy="109728"/>
+            <a:ext cx="274320" cy="6858000"/>
           </a:xfrm>
           <a:prstGeom prst="rect">
             <a:avLst/>
           </a:prstGeom>
           <a:solidFill>
-            <a:srgbClr val="F59E0B"/>
+            <a:srgbClr val="E8A33D"/>
           </a:solidFill>
           <a:ln w="12700">
             <a:solidFill>
-              <a:srgbClr val="F59E0B"/>
+              <a:srgbClr val="E8A33D"/>
             </a:solidFill>
             <a:prstDash val="solid"/>
           </a:ln>
@@ -8063,32 +8196,57 @@
       </p:sp>
       <p:sp>
         <p:nvSpPr>
-          <p:cNvPr id="3" name="Text 1"/>
-          <p:cNvSpPr/>
-          <p:nvPr/>
-        </p:nvSpPr>
-        <p:spPr>
-          <a:xfrm>
-            <a:off x="457200" y="256032"/>
-            <a:ext cx="8229600" cy="320040"/>
-          </a:xfrm>
-          <a:prstGeom prst="rect">
-            <a:avLst/>
-          </a:prstGeom>
-          <a:noFill/>
-          <a:ln/>
-        </p:spPr>
-        <p:txBody>
-          <a:bodyPr wrap="square" lIns="0" tIns="0" rIns="0" bIns="0" rtlCol="0" anchor="ctr"/>
-          <a:lstStyle/>
-          <a:p>
-            <a:pPr indent="0" marL="0">
-              <a:buNone/>
-            </a:pPr>
-            <a:r>
-              <a:rPr lang="en-US" sz="1100" b="1" spc="400" kern="0" dirty="0">
-                <a:solidFill>
-                  <a:srgbClr val="64748B"/>
+          <p:cNvPr id="3" name="Shape 1"/>
+          <p:cNvSpPr/>
+          <p:nvPr/>
+        </p:nvSpPr>
+        <p:spPr>
+          <a:xfrm>
+            <a:off x="0" y="0"/>
+            <a:ext cx="12191695" cy="91440"/>
+          </a:xfrm>
+          <a:prstGeom prst="rect">
+            <a:avLst/>
+          </a:prstGeom>
+          <a:solidFill>
+            <a:srgbClr val="E8A33D"/>
+          </a:solidFill>
+          <a:ln w="12700">
+            <a:solidFill>
+              <a:srgbClr val="E8A33D"/>
+            </a:solidFill>
+            <a:prstDash val="solid"/>
+          </a:ln>
+        </p:spPr>
+      </p:sp>
+      <p:sp>
+        <p:nvSpPr>
+          <p:cNvPr id="4" name="Text 2"/>
+          <p:cNvSpPr/>
+          <p:nvPr/>
+        </p:nvSpPr>
+        <p:spPr>
+          <a:xfrm>
+            <a:off x="502920" y="292608"/>
+            <a:ext cx="8686800" cy="347472"/>
+          </a:xfrm>
+          <a:prstGeom prst="rect">
+            <a:avLst/>
+          </a:prstGeom>
+          <a:noFill/>
+          <a:ln/>
+        </p:spPr>
+        <p:txBody>
+          <a:bodyPr wrap="square" lIns="0" tIns="0" rIns="0" bIns="0" rtlCol="0" anchor="ctr"/>
+          <a:lstStyle/>
+          <a:p>
+            <a:pPr indent="0" marL="0">
+              <a:buNone/>
+            </a:pPr>
+            <a:r>
+              <a:rPr lang="en-US" sz="1050" b="1" spc="600" kern="0" dirty="0">
+                <a:solidFill>
+                  <a:srgbClr val="8B8578"/>
                 </a:solidFill>
                 <a:latin typeface="Calibri" pitchFamily="34" charset="0"/>
                 <a:ea typeface="Calibri" pitchFamily="34" charset="-122"/>
@@ -8096,20 +8254,20 @@
               </a:rPr>
               <a:t>DISCOVERY CAMPAIGN · GERMANY</a:t>
             </a:r>
-            <a:endParaRPr lang="en-US" sz="1100" dirty="0"/>
-          </a:p>
-        </p:txBody>
-      </p:sp>
-      <p:sp>
-        <p:nvSpPr>
-          <p:cNvPr id="4" name="Text 2"/>
-          <p:cNvSpPr/>
-          <p:nvPr/>
-        </p:nvSpPr>
-        <p:spPr>
-          <a:xfrm>
-            <a:off x="10728655" y="256032"/>
-            <a:ext cx="1005840" cy="320040"/>
+            <a:endParaRPr lang="en-US" sz="1050" dirty="0"/>
+          </a:p>
+        </p:txBody>
+      </p:sp>
+      <p:sp>
+        <p:nvSpPr>
+          <p:cNvPr id="5" name="Text 3"/>
+          <p:cNvSpPr/>
+          <p:nvPr/>
+        </p:nvSpPr>
+        <p:spPr>
+          <a:xfrm>
+            <a:off x="10728655" y="292608"/>
+            <a:ext cx="1005840" cy="347472"/>
           </a:xfrm>
           <a:prstGeom prst="rect">
             <a:avLst/>
@@ -8125,52 +8283,52 @@
               <a:buNone/>
             </a:pPr>
             <a:r>
-              <a:rPr lang="en-US" sz="1100" b="1" dirty="0">
-                <a:solidFill>
-                  <a:srgbClr val="64748B"/>
-                </a:solidFill>
-                <a:latin typeface="Calibri" pitchFamily="34" charset="0"/>
-                <a:ea typeface="Calibri" pitchFamily="34" charset="-122"/>
-                <a:cs typeface="Calibri" pitchFamily="34" charset="-120"/>
-              </a:rPr>
-              <a:t>06 / 09</a:t>
-            </a:r>
-            <a:endParaRPr lang="en-US" sz="1100" dirty="0"/>
-          </a:p>
-        </p:txBody>
-      </p:sp>
-      <p:sp>
-        <p:nvSpPr>
-          <p:cNvPr id="5" name="Text 3"/>
-          <p:cNvSpPr/>
-          <p:nvPr/>
-        </p:nvSpPr>
-        <p:spPr>
-          <a:xfrm>
-            <a:off x="457200" y="594360"/>
-            <a:ext cx="11247120" cy="822960"/>
-          </a:xfrm>
-          <a:prstGeom prst="rect">
-            <a:avLst/>
-          </a:prstGeom>
-          <a:noFill/>
-          <a:ln/>
-        </p:spPr>
-        <p:txBody>
-          <a:bodyPr wrap="square" lIns="0" tIns="0" rIns="0" bIns="0" rtlCol="0" anchor="ctr"/>
-          <a:lstStyle/>
-          <a:p>
-            <a:pPr indent="0" marL="0">
-              <a:buNone/>
-            </a:pPr>
-            <a:r>
-              <a:rPr lang="en-US" sz="2800" b="1" dirty="0">
-                <a:solidFill>
-                  <a:srgbClr val="1E293B"/>
-                </a:solidFill>
-                <a:latin typeface="Cambria" pitchFamily="34" charset="0"/>
-                <a:ea typeface="Cambria" pitchFamily="34" charset="-122"/>
-                <a:cs typeface="Cambria" pitchFamily="34" charset="-120"/>
+              <a:rPr lang="en-US" sz="1050" b="1" spc="200" kern="0" dirty="0">
+                <a:solidFill>
+                  <a:srgbClr val="8B8578"/>
+                </a:solidFill>
+                <a:latin typeface="Calibri" pitchFamily="34" charset="0"/>
+                <a:ea typeface="Calibri" pitchFamily="34" charset="-122"/>
+                <a:cs typeface="Calibri" pitchFamily="34" charset="-120"/>
+              </a:rPr>
+              <a:t>06  ·  09</a:t>
+            </a:r>
+            <a:endParaRPr lang="en-US" sz="1050" dirty="0"/>
+          </a:p>
+        </p:txBody>
+      </p:sp>
+      <p:sp>
+        <p:nvSpPr>
+          <p:cNvPr id="6" name="Text 4"/>
+          <p:cNvSpPr/>
+          <p:nvPr/>
+        </p:nvSpPr>
+        <p:spPr>
+          <a:xfrm>
+            <a:off x="502920" y="713232"/>
+            <a:ext cx="11155680" cy="868680"/>
+          </a:xfrm>
+          <a:prstGeom prst="rect">
+            <a:avLst/>
+          </a:prstGeom>
+          <a:noFill/>
+          <a:ln/>
+        </p:spPr>
+        <p:txBody>
+          <a:bodyPr wrap="square" lIns="0" tIns="0" rIns="0" bIns="0" rtlCol="0" anchor="ctr"/>
+          <a:lstStyle/>
+          <a:p>
+            <a:pPr indent="0" marL="0">
+              <a:buNone/>
+            </a:pPr>
+            <a:r>
+              <a:rPr lang="en-US" sz="3600" b="1" dirty="0">
+                <a:solidFill>
+                  <a:srgbClr val="1A1F2E"/>
+                </a:solidFill>
+                <a:latin typeface="Palatino" pitchFamily="34" charset="0"/>
+                <a:ea typeface="Palatino" pitchFamily="34" charset="-122"/>
+                <a:cs typeface="Palatino" pitchFamily="34" charset="-120"/>
               </a:rPr>
               <a:t>FRS at GSI: Fragmentation + Fission of 1 GeV/u </a:t>
             </a:r>
@@ -8178,13 +8336,13 @@
               <a:buNone/>
             </a:pPr>
             <a:r>
-              <a:rPr lang="en-US" sz="2800" b="1" baseline="30000" dirty="0">
-                <a:solidFill>
-                  <a:srgbClr val="1E293B"/>
-                </a:solidFill>
-                <a:latin typeface="Cambria" pitchFamily="34" charset="0"/>
-                <a:ea typeface="Cambria" pitchFamily="34" charset="-122"/>
-                <a:cs typeface="Cambria" pitchFamily="34" charset="-120"/>
+              <a:rPr lang="en-US" sz="3600" b="1" baseline="30000" dirty="0">
+                <a:solidFill>
+                  <a:srgbClr val="1A1F2E"/>
+                </a:solidFill>
+                <a:latin typeface="Palatino" pitchFamily="34" charset="0"/>
+                <a:ea typeface="Palatino" pitchFamily="34" charset="-122"/>
+                <a:cs typeface="Palatino" pitchFamily="34" charset="-120"/>
               </a:rPr>
               <a:t>238</a:t>
             </a:r>
@@ -8192,23 +8350,23 @@
               <a:buNone/>
             </a:pPr>
             <a:r>
-              <a:rPr lang="en-US" sz="2800" b="1" dirty="0">
-                <a:solidFill>
-                  <a:srgbClr val="1E293B"/>
-                </a:solidFill>
-                <a:latin typeface="Cambria" pitchFamily="34" charset="0"/>
-                <a:ea typeface="Cambria" pitchFamily="34" charset="-122"/>
-                <a:cs typeface="Cambria" pitchFamily="34" charset="-120"/>
+              <a:rPr lang="en-US" sz="3600" b="1" dirty="0">
+                <a:solidFill>
+                  <a:srgbClr val="1A1F2E"/>
+                </a:solidFill>
+                <a:latin typeface="Palatino" pitchFamily="34" charset="0"/>
+                <a:ea typeface="Palatino" pitchFamily="34" charset="-122"/>
+                <a:cs typeface="Palatino" pitchFamily="34" charset="-120"/>
               </a:rPr>
               <a:t>U</a:t>
             </a:r>
-            <a:endParaRPr lang="en-US" sz="2800" dirty="0"/>
-          </a:p>
-        </p:txBody>
-      </p:sp>
-      <p:sp>
-        <p:nvSpPr>
-          <p:cNvPr id="6" name="Shape 4"/>
+            <a:endParaRPr lang="en-US" sz="3600" dirty="0"/>
+          </a:p>
+        </p:txBody>
+      </p:sp>
+      <p:sp>
+        <p:nvSpPr>
+          <p:cNvPr id="7" name="Shape 5"/>
           <p:cNvSpPr/>
           <p:nvPr/>
         </p:nvSpPr>
@@ -8217,22 +8375,24 @@
             <a:off x="457200" y="1554480"/>
             <a:ext cx="5303520" cy="3931920"/>
           </a:xfrm>
-          <a:prstGeom prst="rect">
-            <a:avLst/>
+          <a:prstGeom prst="roundRect">
+            <a:avLst>
+              <a:gd name="adj" fmla="val 1860"/>
+            </a:avLst>
           </a:prstGeom>
           <a:solidFill>
             <a:srgbClr val="FFFFFF"/>
           </a:solidFill>
-          <a:ln w="9525">
+          <a:ln w="6350">
             <a:solidFill>
-              <a:srgbClr val="E2E8F0"/>
+              <a:srgbClr val="E8DFD2"/>
             </a:solidFill>
             <a:prstDash val="solid"/>
           </a:ln>
           <a:effectLst>
-            <a:outerShdw sx="100000" sy="100000" kx="0" ky="0" algn="bl" rotWithShape="0" blurRad="127000" dist="25400" dir="5400000">
-              <a:srgbClr val="000000">
-                <a:alpha val="7000"/>
+            <a:outerShdw sx="100000" sy="100000" kx="0" ky="0" algn="bl" rotWithShape="0" blurRad="177800" dist="38100" dir="5400000">
+              <a:srgbClr val="1A1F2E">
+                <a:alpha val="8000"/>
               </a:srgbClr>
             </a:outerShdw>
           </a:effectLst>
@@ -8240,24 +8400,24 @@
       </p:sp>
       <p:sp>
         <p:nvSpPr>
-          <p:cNvPr id="7" name="Shape 5"/>
-          <p:cNvSpPr/>
-          <p:nvPr/>
-        </p:nvSpPr>
-        <p:spPr>
-          <a:xfrm>
-            <a:off x="457200" y="1554480"/>
-            <a:ext cx="73152" cy="3931920"/>
+          <p:cNvPr id="8" name="Shape 6"/>
+          <p:cNvSpPr/>
+          <p:nvPr/>
+        </p:nvSpPr>
+        <p:spPr>
+          <a:xfrm>
+            <a:off x="457200" y="1627632"/>
+            <a:ext cx="73152" cy="3785616"/>
           </a:xfrm>
           <a:prstGeom prst="rect">
             <a:avLst/>
           </a:prstGeom>
           <a:solidFill>
-            <a:srgbClr val="075985"/>
+            <a:srgbClr val="2D4A4C"/>
           </a:solidFill>
           <a:ln w="12700">
             <a:solidFill>
-              <a:srgbClr val="075985"/>
+              <a:srgbClr val="2D4A4C"/>
             </a:solidFill>
             <a:prstDash val="solid"/>
           </a:ln>
@@ -8265,7 +8425,7 @@
       </p:sp>
       <p:sp>
         <p:nvSpPr>
-          <p:cNvPr id="8" name="Text 6"/>
+          <p:cNvPr id="9" name="Text 7"/>
           <p:cNvSpPr/>
           <p:nvPr/>
         </p:nvSpPr>
@@ -8290,7 +8450,7 @@
             <a:r>
               <a:rPr lang="en-US" sz="1100" b="1" spc="400" kern="0" dirty="0">
                 <a:solidFill>
-                  <a:srgbClr val="64748B"/>
+                  <a:srgbClr val="8B8578"/>
                 </a:solidFill>
                 <a:latin typeface="Calibri" pitchFamily="34" charset="0"/>
                 <a:ea typeface="Calibri" pitchFamily="34" charset="-122"/>
@@ -8304,7 +8464,7 @@
       </p:sp>
       <p:sp>
         <p:nvSpPr>
-          <p:cNvPr id="9" name="Text 7"/>
+          <p:cNvPr id="10" name="Text 8"/>
           <p:cNvSpPr/>
           <p:nvPr/>
         </p:nvSpPr>
@@ -8329,11 +8489,11 @@
             <a:r>
               <a:rPr lang="en-US" sz="11000" b="1" dirty="0">
                 <a:solidFill>
-                  <a:srgbClr val="075985"/>
-                </a:solidFill>
-                <a:latin typeface="Cambria" pitchFamily="34" charset="0"/>
-                <a:ea typeface="Cambria" pitchFamily="34" charset="-122"/>
-                <a:cs typeface="Cambria" pitchFamily="34" charset="-120"/>
+                  <a:srgbClr val="2D4A4C"/>
+                </a:solidFill>
+                <a:latin typeface="Palatino" pitchFamily="34" charset="0"/>
+                <a:ea typeface="Palatino" pitchFamily="34" charset="-122"/>
+                <a:cs typeface="Palatino" pitchFamily="34" charset="-120"/>
               </a:rPr>
               <a:t>60</a:t>
             </a:r>
@@ -8343,7 +8503,7 @@
       </p:sp>
       <p:sp>
         <p:nvSpPr>
-          <p:cNvPr id="10" name="Text 8"/>
+          <p:cNvPr id="11" name="Text 9"/>
           <p:cNvSpPr/>
           <p:nvPr/>
         </p:nvSpPr>
@@ -8368,7 +8528,7 @@
             <a:r>
               <a:rPr lang="en-US" sz="1600" b="1" dirty="0">
                 <a:solidFill>
-                  <a:srgbClr val="1E293B"/>
+                  <a:srgbClr val="1A1F2E"/>
                 </a:solidFill>
                 <a:latin typeface="Calibri" pitchFamily="34" charset="0"/>
                 <a:ea typeface="Calibri" pitchFamily="34" charset="-122"/>
@@ -8382,7 +8542,7 @@
       </p:sp>
       <p:sp>
         <p:nvSpPr>
-          <p:cNvPr id="11" name="Text 9"/>
+          <p:cNvPr id="12" name="Text 10"/>
           <p:cNvSpPr/>
           <p:nvPr/>
         </p:nvSpPr>
@@ -8407,7 +8567,7 @@
             <a:r>
               <a:rPr lang="en-US" sz="1200" dirty="0">
                 <a:solidFill>
-                  <a:srgbClr val="1E293B"/>
+                  <a:srgbClr val="1A1F2E"/>
                 </a:solidFill>
                 <a:latin typeface="Calibri" pitchFamily="34" charset="0"/>
                 <a:ea typeface="Calibri" pitchFamily="34" charset="-122"/>
@@ -8421,7 +8581,7 @@
             <a:r>
               <a:rPr lang="en-US" sz="1200" baseline="30000" dirty="0">
                 <a:solidFill>
-                  <a:srgbClr val="1E293B"/>
+                  <a:srgbClr val="1A1F2E"/>
                 </a:solidFill>
                 <a:latin typeface="Calibri" pitchFamily="34" charset="0"/>
                 <a:ea typeface="Calibri" pitchFamily="34" charset="-122"/>
@@ -8435,7 +8595,7 @@
             <a:r>
               <a:rPr lang="en-US" sz="1200" dirty="0">
                 <a:solidFill>
-                  <a:srgbClr val="1E293B"/>
+                  <a:srgbClr val="1A1F2E"/>
                 </a:solidFill>
                 <a:latin typeface="Calibri" pitchFamily="34" charset="0"/>
                 <a:ea typeface="Calibri" pitchFamily="34" charset="-122"/>
@@ -8449,7 +8609,7 @@
       </p:sp>
       <p:sp>
         <p:nvSpPr>
-          <p:cNvPr id="12" name="Shape 10"/>
+          <p:cNvPr id="13" name="Shape 11"/>
           <p:cNvSpPr/>
           <p:nvPr/>
         </p:nvSpPr>
@@ -8458,22 +8618,24 @@
             <a:off x="5989320" y="1554480"/>
             <a:ext cx="5760720" cy="1874520"/>
           </a:xfrm>
-          <a:prstGeom prst="rect">
-            <a:avLst/>
+          <a:prstGeom prst="roundRect">
+            <a:avLst>
+              <a:gd name="adj" fmla="val 3902"/>
+            </a:avLst>
           </a:prstGeom>
           <a:solidFill>
             <a:srgbClr val="FFFFFF"/>
           </a:solidFill>
-          <a:ln w="9525">
+          <a:ln w="6350">
             <a:solidFill>
-              <a:srgbClr val="E2E8F0"/>
+              <a:srgbClr val="E8DFD2"/>
             </a:solidFill>
             <a:prstDash val="solid"/>
           </a:ln>
           <a:effectLst>
-            <a:outerShdw sx="100000" sy="100000" kx="0" ky="0" algn="bl" rotWithShape="0" blurRad="127000" dist="25400" dir="5400000">
-              <a:srgbClr val="000000">
-                <a:alpha val="7000"/>
+            <a:outerShdw sx="100000" sy="100000" kx="0" ky="0" algn="bl" rotWithShape="0" blurRad="177800" dist="38100" dir="5400000">
+              <a:srgbClr val="1A1F2E">
+                <a:alpha val="8000"/>
               </a:srgbClr>
             </a:outerShdw>
           </a:effectLst>
@@ -8481,24 +8643,24 @@
       </p:sp>
       <p:sp>
         <p:nvSpPr>
-          <p:cNvPr id="13" name="Shape 11"/>
-          <p:cNvSpPr/>
-          <p:nvPr/>
-        </p:nvSpPr>
-        <p:spPr>
-          <a:xfrm>
-            <a:off x="5989320" y="1554480"/>
-            <a:ext cx="73152" cy="1874520"/>
+          <p:cNvPr id="14" name="Shape 12"/>
+          <p:cNvSpPr/>
+          <p:nvPr/>
+        </p:nvSpPr>
+        <p:spPr>
+          <a:xfrm>
+            <a:off x="5989320" y="1627632"/>
+            <a:ext cx="73152" cy="1728216"/>
           </a:xfrm>
           <a:prstGeom prst="rect">
             <a:avLst/>
           </a:prstGeom>
           <a:solidFill>
-            <a:srgbClr val="F59E0B"/>
+            <a:srgbClr val="E8A33D"/>
           </a:solidFill>
           <a:ln w="12700">
             <a:solidFill>
-              <a:srgbClr val="F59E0B"/>
+              <a:srgbClr val="E8A33D"/>
             </a:solidFill>
             <a:prstDash val="solid"/>
           </a:ln>
@@ -8506,7 +8668,7 @@
       </p:sp>
       <p:sp>
         <p:nvSpPr>
-          <p:cNvPr id="14" name="Text 12"/>
+          <p:cNvPr id="15" name="Text 13"/>
           <p:cNvSpPr/>
           <p:nvPr/>
         </p:nvSpPr>
@@ -8531,7 +8693,7 @@
             <a:r>
               <a:rPr lang="en-US" sz="1200" b="1" spc="200" kern="0" dirty="0">
                 <a:solidFill>
-                  <a:srgbClr val="64748B"/>
+                  <a:srgbClr val="8B8578"/>
                 </a:solidFill>
                 <a:latin typeface="Calibri" pitchFamily="34" charset="0"/>
                 <a:ea typeface="Calibri" pitchFamily="34" charset="-122"/>
@@ -8545,7 +8707,7 @@
       </p:sp>
       <p:sp>
         <p:nvSpPr>
-          <p:cNvPr id="15" name="Text 13"/>
+          <p:cNvPr id="16" name="Text 14"/>
           <p:cNvSpPr/>
           <p:nvPr/>
         </p:nvSpPr>
@@ -8570,7 +8732,7 @@
             <a:r>
               <a:rPr lang="en-US" sz="1200" b="1" dirty="0">
                 <a:solidFill>
-                  <a:srgbClr val="B45309"/>
+                  <a:srgbClr val="B87333"/>
                 </a:solidFill>
                 <a:latin typeface="Calibri" pitchFamily="34" charset="0"/>
                 <a:ea typeface="Calibri" pitchFamily="34" charset="-122"/>
@@ -8584,7 +8746,7 @@
             <a:r>
               <a:rPr lang="en-US" sz="1200" dirty="0">
                 <a:solidFill>
-                  <a:srgbClr val="1E293B"/>
+                  <a:srgbClr val="1A1F2E"/>
                 </a:solidFill>
                 <a:latin typeface="Calibri" pitchFamily="34" charset="0"/>
                 <a:ea typeface="Calibri" pitchFamily="34" charset="-122"/>
@@ -8601,7 +8763,7 @@
             <a:r>
               <a:rPr lang="en-US" sz="1200" b="1" dirty="0">
                 <a:solidFill>
-                  <a:srgbClr val="075985"/>
+                  <a:srgbClr val="2D4A4C"/>
                 </a:solidFill>
                 <a:latin typeface="Calibri" pitchFamily="34" charset="0"/>
                 <a:ea typeface="Calibri" pitchFamily="34" charset="-122"/>
@@ -8615,7 +8777,7 @@
             <a:r>
               <a:rPr lang="en-US" sz="1200" dirty="0">
                 <a:solidFill>
-                  <a:srgbClr val="1E293B"/>
+                  <a:srgbClr val="1A1F2E"/>
                 </a:solidFill>
                 <a:latin typeface="Calibri" pitchFamily="34" charset="0"/>
                 <a:ea typeface="Calibri" pitchFamily="34" charset="-122"/>
@@ -8629,7 +8791,7 @@
       </p:sp>
       <p:sp>
         <p:nvSpPr>
-          <p:cNvPr id="16" name="Shape 14"/>
+          <p:cNvPr id="17" name="Shape 15"/>
           <p:cNvSpPr/>
           <p:nvPr/>
         </p:nvSpPr>
@@ -8638,22 +8800,24 @@
             <a:off x="5989320" y="3611880"/>
             <a:ext cx="5760720" cy="1874520"/>
           </a:xfrm>
-          <a:prstGeom prst="rect">
-            <a:avLst/>
+          <a:prstGeom prst="roundRect">
+            <a:avLst>
+              <a:gd name="adj" fmla="val 3902"/>
+            </a:avLst>
           </a:prstGeom>
           <a:solidFill>
             <a:srgbClr val="FFFFFF"/>
           </a:solidFill>
-          <a:ln w="9525">
+          <a:ln w="6350">
             <a:solidFill>
-              <a:srgbClr val="E2E8F0"/>
+              <a:srgbClr val="E8DFD2"/>
             </a:solidFill>
             <a:prstDash val="solid"/>
           </a:ln>
           <a:effectLst>
-            <a:outerShdw sx="100000" sy="100000" kx="0" ky="0" algn="bl" rotWithShape="0" blurRad="127000" dist="25400" dir="5400000">
-              <a:srgbClr val="000000">
-                <a:alpha val="7000"/>
+            <a:outerShdw sx="100000" sy="100000" kx="0" ky="0" algn="bl" rotWithShape="0" blurRad="177800" dist="38100" dir="5400000">
+              <a:srgbClr val="1A1F2E">
+                <a:alpha val="8000"/>
               </a:srgbClr>
             </a:outerShdw>
           </a:effectLst>
@@ -8661,24 +8825,24 @@
       </p:sp>
       <p:sp>
         <p:nvSpPr>
-          <p:cNvPr id="17" name="Shape 15"/>
-          <p:cNvSpPr/>
-          <p:nvPr/>
-        </p:nvSpPr>
-        <p:spPr>
-          <a:xfrm>
-            <a:off x="5989320" y="3611880"/>
-            <a:ext cx="73152" cy="1874520"/>
+          <p:cNvPr id="18" name="Shape 16"/>
+          <p:cNvSpPr/>
+          <p:nvPr/>
+        </p:nvSpPr>
+        <p:spPr>
+          <a:xfrm>
+            <a:off x="5989320" y="3685032"/>
+            <a:ext cx="73152" cy="1728216"/>
           </a:xfrm>
           <a:prstGeom prst="rect">
             <a:avLst/>
           </a:prstGeom>
           <a:solidFill>
-            <a:srgbClr val="B91C1C"/>
+            <a:srgbClr val="7A2E2E"/>
           </a:solidFill>
           <a:ln w="12700">
             <a:solidFill>
-              <a:srgbClr val="B91C1C"/>
+              <a:srgbClr val="7A2E2E"/>
             </a:solidFill>
             <a:prstDash val="solid"/>
           </a:ln>
@@ -8686,7 +8850,7 @@
       </p:sp>
       <p:sp>
         <p:nvSpPr>
-          <p:cNvPr id="18" name="Text 16"/>
+          <p:cNvPr id="19" name="Text 17"/>
           <p:cNvSpPr/>
           <p:nvPr/>
         </p:nvSpPr>
@@ -8711,7 +8875,7 @@
             <a:r>
               <a:rPr lang="en-US" sz="1100" b="1" spc="400" kern="0" dirty="0">
                 <a:solidFill>
-                  <a:srgbClr val="B91C1C"/>
+                  <a:srgbClr val="7A2E2E"/>
                 </a:solidFill>
                 <a:latin typeface="Calibri" pitchFamily="34" charset="0"/>
                 <a:ea typeface="Calibri" pitchFamily="34" charset="-122"/>
@@ -8725,7 +8889,7 @@
       </p:sp>
       <p:sp>
         <p:nvSpPr>
-          <p:cNvPr id="19" name="Text 17"/>
+          <p:cNvPr id="20" name="Text 18"/>
           <p:cNvSpPr/>
           <p:nvPr/>
         </p:nvSpPr>
@@ -8750,7 +8914,7 @@
             <a:r>
               <a:rPr lang="en-US" sz="1200" dirty="0">
                 <a:solidFill>
-                  <a:srgbClr val="1E293B"/>
+                  <a:srgbClr val="1A1F2E"/>
                 </a:solidFill>
                 <a:latin typeface="Calibri" pitchFamily="34" charset="0"/>
                 <a:ea typeface="Calibri" pitchFamily="34" charset="-122"/>
@@ -8764,7 +8928,7 @@
       </p:sp>
       <p:sp>
         <p:nvSpPr>
-          <p:cNvPr id="20" name="Text 18"/>
+          <p:cNvPr id="21" name="Text 19"/>
           <p:cNvSpPr/>
           <p:nvPr/>
         </p:nvSpPr>
@@ -8789,7 +8953,7 @@
             <a:r>
               <a:rPr lang="en-US" sz="1200" i="1" dirty="0">
                 <a:solidFill>
-                  <a:srgbClr val="64748B"/>
+                  <a:srgbClr val="8B8578"/>
                 </a:solidFill>
                 <a:latin typeface="Calibri" pitchFamily="34" charset="0"/>
                 <a:ea typeface="Calibri" pitchFamily="34" charset="-122"/>
@@ -8803,22 +8967,22 @@
       </p:sp>
       <p:sp>
         <p:nvSpPr>
-          <p:cNvPr id="21" name="Shape 19"/>
-          <p:cNvSpPr/>
-          <p:nvPr/>
-        </p:nvSpPr>
-        <p:spPr>
-          <a:xfrm>
-            <a:off x="457200" y="6446520"/>
-            <a:ext cx="11277295" cy="0"/>
+          <p:cNvPr id="22" name="Shape 20"/>
+          <p:cNvSpPr/>
+          <p:nvPr/>
+        </p:nvSpPr>
+        <p:spPr>
+          <a:xfrm>
+            <a:off x="502920" y="6400800"/>
+            <a:ext cx="11185855" cy="0"/>
           </a:xfrm>
           <a:prstGeom prst="line">
             <a:avLst/>
           </a:prstGeom>
           <a:noFill/>
-          <a:ln w="9525">
+          <a:ln w="6350">
             <a:solidFill>
-              <a:srgbClr val="CBD5E1"/>
+              <a:srgbClr val="D9D2C5"/>
             </a:solidFill>
             <a:prstDash val="solid"/>
           </a:ln>
@@ -8826,32 +8990,32 @@
       </p:sp>
       <p:sp>
         <p:nvSpPr>
-          <p:cNvPr id="22" name="Text 20"/>
-          <p:cNvSpPr/>
-          <p:nvPr/>
-        </p:nvSpPr>
-        <p:spPr>
-          <a:xfrm>
-            <a:off x="457200" y="6473952"/>
-            <a:ext cx="8351215" cy="292608"/>
-          </a:xfrm>
-          <a:prstGeom prst="rect">
-            <a:avLst/>
-          </a:prstGeom>
-          <a:noFill/>
-          <a:ln/>
-        </p:spPr>
-        <p:txBody>
-          <a:bodyPr wrap="square" lIns="0" tIns="0" rIns="0" bIns="0" rtlCol="0" anchor="ctr"/>
-          <a:lstStyle/>
-          <a:p>
-            <a:pPr indent="0" marL="0">
-              <a:buNone/>
-            </a:pPr>
-            <a:r>
-              <a:rPr lang="en-US" sz="900" i="1" dirty="0">
-                <a:solidFill>
-                  <a:srgbClr val="64748B"/>
+          <p:cNvPr id="23" name="Text 21"/>
+          <p:cNvSpPr/>
+          <p:nvPr/>
+        </p:nvSpPr>
+        <p:spPr>
+          <a:xfrm>
+            <a:off x="502920" y="6446520"/>
+            <a:ext cx="8259775" cy="292608"/>
+          </a:xfrm>
+          <a:prstGeom prst="rect">
+            <a:avLst/>
+          </a:prstGeom>
+          <a:noFill/>
+          <a:ln/>
+        </p:spPr>
+        <p:txBody>
+          <a:bodyPr wrap="square" lIns="0" tIns="0" rIns="0" bIns="0" rtlCol="0" anchor="ctr"/>
+          <a:lstStyle/>
+          <a:p>
+            <a:pPr indent="0" marL="0">
+              <a:buNone/>
+            </a:pPr>
+            <a:r>
+              <a:rPr lang="en-US" sz="850" i="1" dirty="0">
+                <a:solidFill>
+                  <a:srgbClr val="8B8578"/>
                 </a:solidFill>
                 <a:latin typeface="Calibri" pitchFamily="34" charset="0"/>
                 <a:ea typeface="Calibri" pitchFamily="34" charset="-122"/>
@@ -8859,19 +9023,19 @@
               </a:rPr>
               <a:t>W. Kurcewicz et al., Phys. Lett. B 717, 371 (2012) / arXiv:1112.0521; GSI/FAIR press release, 14 May 2025.</a:t>
             </a:r>
-            <a:endParaRPr lang="en-US" sz="900" dirty="0"/>
-          </a:p>
-        </p:txBody>
-      </p:sp>
-      <p:sp>
-        <p:nvSpPr>
-          <p:cNvPr id="23" name="Text 21"/>
-          <p:cNvSpPr/>
-          <p:nvPr/>
-        </p:nvSpPr>
-        <p:spPr>
-          <a:xfrm>
-            <a:off x="8808415" y="6473952"/>
+            <a:endParaRPr lang="en-US" sz="850" dirty="0"/>
+          </a:p>
+        </p:txBody>
+      </p:sp>
+      <p:sp>
+        <p:nvSpPr>
+          <p:cNvPr id="24" name="Text 22"/>
+          <p:cNvSpPr/>
+          <p:nvPr/>
+        </p:nvSpPr>
+        <p:spPr>
+          <a:xfrm>
+            <a:off x="8808415" y="6446520"/>
             <a:ext cx="2926080" cy="292608"/>
           </a:xfrm>
           <a:prstGeom prst="rect">
@@ -8888,17 +9052,17 @@
               <a:buNone/>
             </a:pPr>
             <a:r>
-              <a:rPr lang="en-US" sz="900" dirty="0">
-                <a:solidFill>
-                  <a:srgbClr val="64748B"/>
-                </a:solidFill>
-                <a:latin typeface="Calibri" pitchFamily="34" charset="0"/>
-                <a:ea typeface="Calibri" pitchFamily="34" charset="-122"/>
-                <a:cs typeface="Calibri" pitchFamily="34" charset="-120"/>
-              </a:rPr>
-              <a:t>In-Flight Fission · OrbitOS · 2026-04</a:t>
-            </a:r>
-            <a:endParaRPr lang="en-US" sz="900" dirty="0"/>
+              <a:rPr lang="en-US" sz="850" spc="100" kern="0" dirty="0">
+                <a:solidFill>
+                  <a:srgbClr val="8B8578"/>
+                </a:solidFill>
+                <a:latin typeface="Calibri" pitchFamily="34" charset="0"/>
+                <a:ea typeface="Calibri" pitchFamily="34" charset="-122"/>
+                <a:cs typeface="Calibri" pitchFamily="34" charset="-120"/>
+              </a:rPr>
+              <a:t>In-Flight Fission  ·  OrbitOS  ·  2026-04</a:t>
+            </a:r>
+            <a:endParaRPr lang="en-US" sz="850" dirty="0"/>
           </a:p>
         </p:txBody>
       </p:sp>
@@ -8916,7 +9080,7 @@
     <p:bg>
       <p:bgPr>
         <a:solidFill>
-          <a:srgbClr val="F8FAFC"/>
+          <a:srgbClr val="FAF7F2"/>
         </a:solidFill>
       </p:bgPr>
     </p:bg>
@@ -8943,17 +9107,17 @@
         <p:spPr>
           <a:xfrm>
             <a:off x="0" y="0"/>
-            <a:ext cx="12191695" cy="109728"/>
+            <a:ext cx="274320" cy="6858000"/>
           </a:xfrm>
           <a:prstGeom prst="rect">
             <a:avLst/>
           </a:prstGeom>
           <a:solidFill>
-            <a:srgbClr val="F59E0B"/>
+            <a:srgbClr val="E8A33D"/>
           </a:solidFill>
           <a:ln w="12700">
             <a:solidFill>
-              <a:srgbClr val="F59E0B"/>
+              <a:srgbClr val="E8A33D"/>
             </a:solidFill>
             <a:prstDash val="solid"/>
           </a:ln>
@@ -8961,32 +9125,57 @@
       </p:sp>
       <p:sp>
         <p:nvSpPr>
-          <p:cNvPr id="3" name="Text 1"/>
-          <p:cNvSpPr/>
-          <p:nvPr/>
-        </p:nvSpPr>
-        <p:spPr>
-          <a:xfrm>
-            <a:off x="457200" y="256032"/>
-            <a:ext cx="8229600" cy="320040"/>
-          </a:xfrm>
-          <a:prstGeom prst="rect">
-            <a:avLst/>
-          </a:prstGeom>
-          <a:noFill/>
-          <a:ln/>
-        </p:spPr>
-        <p:txBody>
-          <a:bodyPr wrap="square" lIns="0" tIns="0" rIns="0" bIns="0" rtlCol="0" anchor="ctr"/>
-          <a:lstStyle/>
-          <a:p>
-            <a:pPr indent="0" marL="0">
-              <a:buNone/>
-            </a:pPr>
-            <a:r>
-              <a:rPr lang="en-US" sz="1100" b="1" spc="400" kern="0" dirty="0">
-                <a:solidFill>
-                  <a:srgbClr val="64748B"/>
+          <p:cNvPr id="3" name="Shape 1"/>
+          <p:cNvSpPr/>
+          <p:nvPr/>
+        </p:nvSpPr>
+        <p:spPr>
+          <a:xfrm>
+            <a:off x="0" y="0"/>
+            <a:ext cx="12191695" cy="91440"/>
+          </a:xfrm>
+          <a:prstGeom prst="rect">
+            <a:avLst/>
+          </a:prstGeom>
+          <a:solidFill>
+            <a:srgbClr val="E8A33D"/>
+          </a:solidFill>
+          <a:ln w="12700">
+            <a:solidFill>
+              <a:srgbClr val="E8A33D"/>
+            </a:solidFill>
+            <a:prstDash val="solid"/>
+          </a:ln>
+        </p:spPr>
+      </p:sp>
+      <p:sp>
+        <p:nvSpPr>
+          <p:cNvPr id="4" name="Text 2"/>
+          <p:cNvSpPr/>
+          <p:nvPr/>
+        </p:nvSpPr>
+        <p:spPr>
+          <a:xfrm>
+            <a:off x="502920" y="292608"/>
+            <a:ext cx="8686800" cy="347472"/>
+          </a:xfrm>
+          <a:prstGeom prst="rect">
+            <a:avLst/>
+          </a:prstGeom>
+          <a:noFill/>
+          <a:ln/>
+        </p:spPr>
+        <p:txBody>
+          <a:bodyPr wrap="square" lIns="0" tIns="0" rIns="0" bIns="0" rtlCol="0" anchor="ctr"/>
+          <a:lstStyle/>
+          <a:p>
+            <a:pPr indent="0" marL="0">
+              <a:buNone/>
+            </a:pPr>
+            <a:r>
+              <a:rPr lang="en-US" sz="1050" b="1" spc="600" kern="0" dirty="0">
+                <a:solidFill>
+                  <a:srgbClr val="8B8578"/>
                 </a:solidFill>
                 <a:latin typeface="Calibri" pitchFamily="34" charset="0"/>
                 <a:ea typeface="Calibri" pitchFamily="34" charset="-122"/>
@@ -8994,20 +9183,20 @@
               </a:rPr>
               <a:t>2026 FRONTIERS</a:t>
             </a:r>
-            <a:endParaRPr lang="en-US" sz="1100" dirty="0"/>
-          </a:p>
-        </p:txBody>
-      </p:sp>
-      <p:sp>
-        <p:nvSpPr>
-          <p:cNvPr id="4" name="Text 2"/>
-          <p:cNvSpPr/>
-          <p:nvPr/>
-        </p:nvSpPr>
-        <p:spPr>
-          <a:xfrm>
-            <a:off x="10728655" y="256032"/>
-            <a:ext cx="1005840" cy="320040"/>
+            <a:endParaRPr lang="en-US" sz="1050" dirty="0"/>
+          </a:p>
+        </p:txBody>
+      </p:sp>
+      <p:sp>
+        <p:nvSpPr>
+          <p:cNvPr id="5" name="Text 3"/>
+          <p:cNvSpPr/>
+          <p:nvPr/>
+        </p:nvSpPr>
+        <p:spPr>
+          <a:xfrm>
+            <a:off x="10728655" y="292608"/>
+            <a:ext cx="1005840" cy="347472"/>
           </a:xfrm>
           <a:prstGeom prst="rect">
             <a:avLst/>
@@ -9023,62 +9212,62 @@
               <a:buNone/>
             </a:pPr>
             <a:r>
-              <a:rPr lang="en-US" sz="1100" b="1" dirty="0">
-                <a:solidFill>
-                  <a:srgbClr val="64748B"/>
-                </a:solidFill>
-                <a:latin typeface="Calibri" pitchFamily="34" charset="0"/>
-                <a:ea typeface="Calibri" pitchFamily="34" charset="-122"/>
-                <a:cs typeface="Calibri" pitchFamily="34" charset="-120"/>
-              </a:rPr>
-              <a:t>07 / 09</a:t>
-            </a:r>
-            <a:endParaRPr lang="en-US" sz="1100" dirty="0"/>
-          </a:p>
-        </p:txBody>
-      </p:sp>
-      <p:sp>
-        <p:nvSpPr>
-          <p:cNvPr id="5" name="Text 3"/>
-          <p:cNvSpPr/>
-          <p:nvPr/>
-        </p:nvSpPr>
-        <p:spPr>
-          <a:xfrm>
-            <a:off x="457200" y="594360"/>
-            <a:ext cx="11247120" cy="822960"/>
-          </a:xfrm>
-          <a:prstGeom prst="rect">
-            <a:avLst/>
-          </a:prstGeom>
-          <a:noFill/>
-          <a:ln/>
-        </p:spPr>
-        <p:txBody>
-          <a:bodyPr wrap="square" lIns="0" tIns="0" rIns="0" bIns="0" rtlCol="0" anchor="ctr"/>
-          <a:lstStyle/>
-          <a:p>
-            <a:pPr indent="0" marL="0">
-              <a:buNone/>
-            </a:pPr>
-            <a:r>
-              <a:rPr lang="en-US" sz="2800" b="1" dirty="0">
-                <a:solidFill>
-                  <a:srgbClr val="1E293B"/>
-                </a:solidFill>
-                <a:latin typeface="Cambria" pitchFamily="34" charset="0"/>
-                <a:ea typeface="Cambria" pitchFamily="34" charset="-122"/>
-                <a:cs typeface="Cambria" pitchFamily="34" charset="-120"/>
-              </a:rPr>
-              <a:t>Two New 2026 RIBF Results on the In-Flight Fission Frontier</a:t>
-            </a:r>
-            <a:endParaRPr lang="en-US" sz="2800" dirty="0"/>
-          </a:p>
-        </p:txBody>
-      </p:sp>
-      <p:sp>
-        <p:nvSpPr>
-          <p:cNvPr id="6" name="Shape 4"/>
+              <a:rPr lang="en-US" sz="1050" b="1" spc="200" kern="0" dirty="0">
+                <a:solidFill>
+                  <a:srgbClr val="8B8578"/>
+                </a:solidFill>
+                <a:latin typeface="Calibri" pitchFamily="34" charset="0"/>
+                <a:ea typeface="Calibri" pitchFamily="34" charset="-122"/>
+                <a:cs typeface="Calibri" pitchFamily="34" charset="-120"/>
+              </a:rPr>
+              <a:t>07  ·  09</a:t>
+            </a:r>
+            <a:endParaRPr lang="en-US" sz="1050" dirty="0"/>
+          </a:p>
+        </p:txBody>
+      </p:sp>
+      <p:sp>
+        <p:nvSpPr>
+          <p:cNvPr id="6" name="Text 4"/>
+          <p:cNvSpPr/>
+          <p:nvPr/>
+        </p:nvSpPr>
+        <p:spPr>
+          <a:xfrm>
+            <a:off x="502920" y="713232"/>
+            <a:ext cx="11155680" cy="868680"/>
+          </a:xfrm>
+          <a:prstGeom prst="rect">
+            <a:avLst/>
+          </a:prstGeom>
+          <a:noFill/>
+          <a:ln/>
+        </p:spPr>
+        <p:txBody>
+          <a:bodyPr wrap="square" lIns="0" tIns="0" rIns="0" bIns="0" rtlCol="0" anchor="ctr"/>
+          <a:lstStyle/>
+          <a:p>
+            <a:pPr indent="0" marL="0">
+              <a:buNone/>
+            </a:pPr>
+            <a:r>
+              <a:rPr lang="en-US" sz="3600" b="1" dirty="0">
+                <a:solidFill>
+                  <a:srgbClr val="1A1F2E"/>
+                </a:solidFill>
+                <a:latin typeface="Palatino" pitchFamily="34" charset="0"/>
+                <a:ea typeface="Palatino" pitchFamily="34" charset="-122"/>
+                <a:cs typeface="Palatino" pitchFamily="34" charset="-120"/>
+              </a:rPr>
+              <a:t>Two 2026 Results on the Fission Frontier</a:t>
+            </a:r>
+            <a:endParaRPr lang="en-US" sz="3600" dirty="0"/>
+          </a:p>
+        </p:txBody>
+      </p:sp>
+      <p:sp>
+        <p:nvSpPr>
+          <p:cNvPr id="7" name="Shape 5"/>
           <p:cNvSpPr/>
           <p:nvPr/>
         </p:nvSpPr>
@@ -9087,22 +9276,24 @@
             <a:off x="457200" y="1554480"/>
             <a:ext cx="5669280" cy="4526280"/>
           </a:xfrm>
-          <a:prstGeom prst="rect">
-            <a:avLst/>
+          <a:prstGeom prst="roundRect">
+            <a:avLst>
+              <a:gd name="adj" fmla="val 1616"/>
+            </a:avLst>
           </a:prstGeom>
           <a:solidFill>
             <a:srgbClr val="FFFFFF"/>
           </a:solidFill>
-          <a:ln w="9525">
+          <a:ln w="6350">
             <a:solidFill>
-              <a:srgbClr val="E2E8F0"/>
+              <a:srgbClr val="E8DFD2"/>
             </a:solidFill>
             <a:prstDash val="solid"/>
           </a:ln>
           <a:effectLst>
-            <a:outerShdw sx="100000" sy="100000" kx="0" ky="0" algn="bl" rotWithShape="0" blurRad="127000" dist="25400" dir="5400000">
-              <a:srgbClr val="000000">
-                <a:alpha val="7000"/>
+            <a:outerShdw sx="100000" sy="100000" kx="0" ky="0" algn="bl" rotWithShape="0" blurRad="177800" dist="38100" dir="5400000">
+              <a:srgbClr val="1A1F2E">
+                <a:alpha val="8000"/>
               </a:srgbClr>
             </a:outerShdw>
           </a:effectLst>
@@ -9110,24 +9301,24 @@
       </p:sp>
       <p:sp>
         <p:nvSpPr>
-          <p:cNvPr id="7" name="Shape 5"/>
-          <p:cNvSpPr/>
-          <p:nvPr/>
-        </p:nvSpPr>
-        <p:spPr>
-          <a:xfrm>
-            <a:off x="457200" y="1554480"/>
-            <a:ext cx="73152" cy="4526280"/>
+          <p:cNvPr id="8" name="Shape 6"/>
+          <p:cNvSpPr/>
+          <p:nvPr/>
+        </p:nvSpPr>
+        <p:spPr>
+          <a:xfrm>
+            <a:off x="457200" y="1627632"/>
+            <a:ext cx="73152" cy="4379976"/>
           </a:xfrm>
           <a:prstGeom prst="rect">
             <a:avLst/>
           </a:prstGeom>
           <a:solidFill>
-            <a:srgbClr val="F59E0B"/>
+            <a:srgbClr val="E8A33D"/>
           </a:solidFill>
           <a:ln w="12700">
             <a:solidFill>
-              <a:srgbClr val="F59E0B"/>
+              <a:srgbClr val="E8A33D"/>
             </a:solidFill>
             <a:prstDash val="solid"/>
           </a:ln>
@@ -9135,7 +9326,7 @@
       </p:sp>
       <p:sp>
         <p:nvSpPr>
-          <p:cNvPr id="8" name="Text 6"/>
+          <p:cNvPr id="9" name="Text 7"/>
           <p:cNvSpPr/>
           <p:nvPr/>
         </p:nvSpPr>
@@ -9160,7 +9351,7 @@
             <a:r>
               <a:rPr lang="en-US" sz="1100" b="1" spc="300" kern="0" dirty="0">
                 <a:solidFill>
-                  <a:srgbClr val="64748B"/>
+                  <a:srgbClr val="8B8578"/>
                 </a:solidFill>
                 <a:latin typeface="Calibri" pitchFamily="34" charset="0"/>
                 <a:ea typeface="Calibri" pitchFamily="34" charset="-122"/>
@@ -9174,7 +9365,7 @@
       </p:sp>
       <p:sp>
         <p:nvSpPr>
-          <p:cNvPr id="9" name="Text 7"/>
+          <p:cNvPr id="10" name="Text 8"/>
           <p:cNvSpPr/>
           <p:nvPr/>
         </p:nvSpPr>
@@ -9199,11 +9390,11 @@
             <a:r>
               <a:rPr lang="en-US" sz="2200" b="1" dirty="0">
                 <a:solidFill>
-                  <a:srgbClr val="075985"/>
-                </a:solidFill>
-                <a:latin typeface="Cambria" pitchFamily="34" charset="0"/>
-                <a:ea typeface="Cambria" pitchFamily="34" charset="-122"/>
-                <a:cs typeface="Cambria" pitchFamily="34" charset="-120"/>
+                  <a:srgbClr val="2D4A4C"/>
+                </a:solidFill>
+                <a:latin typeface="Palatino" pitchFamily="34" charset="0"/>
+                <a:ea typeface="Palatino" pitchFamily="34" charset="-122"/>
+                <a:cs typeface="Palatino" pitchFamily="34" charset="-120"/>
               </a:rPr>
               <a:t>Seven new neutron-rich isotopes</a:t>
             </a:r>
@@ -9213,7 +9404,7 @@
       </p:sp>
       <p:sp>
         <p:nvSpPr>
-          <p:cNvPr id="10" name="Text 8"/>
+          <p:cNvPr id="11" name="Text 9"/>
           <p:cNvSpPr/>
           <p:nvPr/>
         </p:nvSpPr>
@@ -9238,7 +9429,7 @@
             <a:r>
               <a:rPr lang="en-US" sz="1200" dirty="0">
                 <a:solidFill>
-                  <a:srgbClr val="1E293B"/>
+                  <a:srgbClr val="1A1F2E"/>
                 </a:solidFill>
                 <a:latin typeface="Calibri" pitchFamily="34" charset="0"/>
                 <a:ea typeface="Calibri" pitchFamily="34" charset="-122"/>
@@ -9252,7 +9443,7 @@
             <a:r>
               <a:rPr lang="en-US" sz="1200" baseline="30000" dirty="0">
                 <a:solidFill>
-                  <a:srgbClr val="1E293B"/>
+                  <a:srgbClr val="1A1F2E"/>
                 </a:solidFill>
                 <a:latin typeface="Calibri" pitchFamily="34" charset="0"/>
                 <a:ea typeface="Calibri" pitchFamily="34" charset="-122"/>
@@ -9266,7 +9457,7 @@
             <a:r>
               <a:rPr lang="en-US" sz="1200" dirty="0">
                 <a:solidFill>
-                  <a:srgbClr val="1E293B"/>
+                  <a:srgbClr val="1A1F2E"/>
                 </a:solidFill>
                 <a:latin typeface="Calibri" pitchFamily="34" charset="0"/>
                 <a:ea typeface="Calibri" pitchFamily="34" charset="-122"/>
@@ -9280,7 +9471,7 @@
       </p:sp>
       <p:sp>
         <p:nvSpPr>
-          <p:cNvPr id="11" name="Shape 9"/>
+          <p:cNvPr id="12" name="Shape 10"/>
           <p:cNvSpPr/>
           <p:nvPr/>
         </p:nvSpPr>
@@ -9293,11 +9484,11 @@
             <a:avLst/>
           </a:prstGeom>
           <a:solidFill>
-            <a:srgbClr val="0A1929"/>
+            <a:srgbClr val="0B1426"/>
           </a:solidFill>
           <a:ln w="12700">
             <a:solidFill>
-              <a:srgbClr val="F59E0B"/>
+              <a:srgbClr val="E8A33D"/>
             </a:solidFill>
             <a:prstDash val="solid"/>
           </a:ln>
@@ -9305,7 +9496,7 @@
       </p:sp>
       <p:sp>
         <p:nvSpPr>
-          <p:cNvPr id="12" name="Text 10"/>
+          <p:cNvPr id="13" name="Text 11"/>
           <p:cNvSpPr/>
           <p:nvPr/>
         </p:nvSpPr>
@@ -9330,11 +9521,11 @@
             <a:r>
               <a:rPr lang="en-US" sz="1300" b="1" baseline="30000" dirty="0">
                 <a:solidFill>
-                  <a:srgbClr val="F59E0B"/>
-                </a:solidFill>
-                <a:latin typeface="Cambria" pitchFamily="34" charset="0"/>
-                <a:ea typeface="Cambria" pitchFamily="34" charset="-122"/>
-                <a:cs typeface="Cambria" pitchFamily="34" charset="-120"/>
+                  <a:srgbClr val="E8A33D"/>
+                </a:solidFill>
+                <a:latin typeface="Palatino" pitchFamily="34" charset="0"/>
+                <a:ea typeface="Palatino" pitchFamily="34" charset="-122"/>
+                <a:cs typeface="Palatino" pitchFamily="34" charset="-120"/>
               </a:rPr>
               <a:t>152</a:t>
             </a:r>
@@ -9344,11 +9535,11 @@
             <a:r>
               <a:rPr lang="en-US" sz="2600" b="1" dirty="0">
                 <a:solidFill>
-                  <a:srgbClr val="F8FAFC"/>
-                </a:solidFill>
-                <a:latin typeface="Cambria" pitchFamily="34" charset="0"/>
-                <a:ea typeface="Cambria" pitchFamily="34" charset="-122"/>
-                <a:cs typeface="Cambria" pitchFamily="34" charset="-120"/>
+                  <a:srgbClr val="F5EFE6"/>
+                </a:solidFill>
+                <a:latin typeface="Palatino" pitchFamily="34" charset="0"/>
+                <a:ea typeface="Palatino" pitchFamily="34" charset="-122"/>
+                <a:cs typeface="Palatino" pitchFamily="34" charset="-120"/>
               </a:rPr>
               <a:t>Cs</a:t>
             </a:r>
@@ -9358,7 +9549,7 @@
       </p:sp>
       <p:sp>
         <p:nvSpPr>
-          <p:cNvPr id="13" name="Shape 11"/>
+          <p:cNvPr id="14" name="Shape 12"/>
           <p:cNvSpPr/>
           <p:nvPr/>
         </p:nvSpPr>
@@ -9371,11 +9562,11 @@
             <a:avLst/>
           </a:prstGeom>
           <a:solidFill>
-            <a:srgbClr val="0A1929"/>
+            <a:srgbClr val="0B1426"/>
           </a:solidFill>
           <a:ln w="12700">
             <a:solidFill>
-              <a:srgbClr val="F59E0B"/>
+              <a:srgbClr val="E8A33D"/>
             </a:solidFill>
             <a:prstDash val="solid"/>
           </a:ln>
@@ -9383,7 +9574,7 @@
       </p:sp>
       <p:sp>
         <p:nvSpPr>
-          <p:cNvPr id="14" name="Text 12"/>
+          <p:cNvPr id="15" name="Text 13"/>
           <p:cNvSpPr/>
           <p:nvPr/>
         </p:nvSpPr>
@@ -9408,11 +9599,11 @@
             <a:r>
               <a:rPr lang="en-US" sz="1300" b="1" baseline="30000" dirty="0">
                 <a:solidFill>
-                  <a:srgbClr val="F59E0B"/>
-                </a:solidFill>
-                <a:latin typeface="Cambria" pitchFamily="34" charset="0"/>
-                <a:ea typeface="Cambria" pitchFamily="34" charset="-122"/>
-                <a:cs typeface="Cambria" pitchFamily="34" charset="-120"/>
+                  <a:srgbClr val="E8A33D"/>
+                </a:solidFill>
+                <a:latin typeface="Palatino" pitchFamily="34" charset="0"/>
+                <a:ea typeface="Palatino" pitchFamily="34" charset="-122"/>
+                <a:cs typeface="Palatino" pitchFamily="34" charset="-120"/>
               </a:rPr>
               <a:t>155</a:t>
             </a:r>
@@ -9422,11 +9613,11 @@
             <a:r>
               <a:rPr lang="en-US" sz="2600" b="1" dirty="0">
                 <a:solidFill>
-                  <a:srgbClr val="F8FAFC"/>
-                </a:solidFill>
-                <a:latin typeface="Cambria" pitchFamily="34" charset="0"/>
-                <a:ea typeface="Cambria" pitchFamily="34" charset="-122"/>
-                <a:cs typeface="Cambria" pitchFamily="34" charset="-120"/>
+                  <a:srgbClr val="F5EFE6"/>
+                </a:solidFill>
+                <a:latin typeface="Palatino" pitchFamily="34" charset="0"/>
+                <a:ea typeface="Palatino" pitchFamily="34" charset="-122"/>
+                <a:cs typeface="Palatino" pitchFamily="34" charset="-120"/>
               </a:rPr>
               <a:t>Ba</a:t>
             </a:r>
@@ -9436,7 +9627,7 @@
       </p:sp>
       <p:sp>
         <p:nvSpPr>
-          <p:cNvPr id="15" name="Shape 13"/>
+          <p:cNvPr id="16" name="Shape 14"/>
           <p:cNvSpPr/>
           <p:nvPr/>
         </p:nvSpPr>
@@ -9449,11 +9640,11 @@
             <a:avLst/>
           </a:prstGeom>
           <a:solidFill>
-            <a:srgbClr val="0A1929"/>
+            <a:srgbClr val="0B1426"/>
           </a:solidFill>
           <a:ln w="12700">
             <a:solidFill>
-              <a:srgbClr val="F59E0B"/>
+              <a:srgbClr val="E8A33D"/>
             </a:solidFill>
             <a:prstDash val="solid"/>
           </a:ln>
@@ -9461,7 +9652,7 @@
       </p:sp>
       <p:sp>
         <p:nvSpPr>
-          <p:cNvPr id="16" name="Text 14"/>
+          <p:cNvPr id="17" name="Text 15"/>
           <p:cNvSpPr/>
           <p:nvPr/>
         </p:nvSpPr>
@@ -9486,11 +9677,11 @@
             <a:r>
               <a:rPr lang="en-US" sz="1300" b="1" baseline="30000" dirty="0">
                 <a:solidFill>
-                  <a:srgbClr val="F59E0B"/>
-                </a:solidFill>
-                <a:latin typeface="Cambria" pitchFamily="34" charset="0"/>
-                <a:ea typeface="Cambria" pitchFamily="34" charset="-122"/>
-                <a:cs typeface="Cambria" pitchFamily="34" charset="-120"/>
+                  <a:srgbClr val="E8A33D"/>
+                </a:solidFill>
+                <a:latin typeface="Palatino" pitchFamily="34" charset="0"/>
+                <a:ea typeface="Palatino" pitchFamily="34" charset="-122"/>
+                <a:cs typeface="Palatino" pitchFamily="34" charset="-120"/>
               </a:rPr>
               <a:t>158</a:t>
             </a:r>
@@ -9500,11 +9691,11 @@
             <a:r>
               <a:rPr lang="en-US" sz="2600" b="1" dirty="0">
                 <a:solidFill>
-                  <a:srgbClr val="F8FAFC"/>
-                </a:solidFill>
-                <a:latin typeface="Cambria" pitchFamily="34" charset="0"/>
-                <a:ea typeface="Cambria" pitchFamily="34" charset="-122"/>
-                <a:cs typeface="Cambria" pitchFamily="34" charset="-120"/>
+                  <a:srgbClr val="F5EFE6"/>
+                </a:solidFill>
+                <a:latin typeface="Palatino" pitchFamily="34" charset="0"/>
+                <a:ea typeface="Palatino" pitchFamily="34" charset="-122"/>
+                <a:cs typeface="Palatino" pitchFamily="34" charset="-120"/>
               </a:rPr>
               <a:t>La</a:t>
             </a:r>
@@ -9514,7 +9705,7 @@
       </p:sp>
       <p:sp>
         <p:nvSpPr>
-          <p:cNvPr id="17" name="Shape 15"/>
+          <p:cNvPr id="18" name="Shape 16"/>
           <p:cNvSpPr/>
           <p:nvPr/>
         </p:nvSpPr>
@@ -9527,11 +9718,11 @@
             <a:avLst/>
           </a:prstGeom>
           <a:solidFill>
-            <a:srgbClr val="0A1929"/>
+            <a:srgbClr val="0B1426"/>
           </a:solidFill>
           <a:ln w="12700">
             <a:solidFill>
-              <a:srgbClr val="F59E0B"/>
+              <a:srgbClr val="E8A33D"/>
             </a:solidFill>
             <a:prstDash val="solid"/>
           </a:ln>
@@ -9539,7 +9730,7 @@
       </p:sp>
       <p:sp>
         <p:nvSpPr>
-          <p:cNvPr id="18" name="Text 16"/>
+          <p:cNvPr id="19" name="Text 17"/>
           <p:cNvSpPr/>
           <p:nvPr/>
         </p:nvSpPr>
@@ -9564,11 +9755,11 @@
             <a:r>
               <a:rPr lang="en-US" sz="1300" b="1" baseline="30000" dirty="0">
                 <a:solidFill>
-                  <a:srgbClr val="F59E0B"/>
-                </a:solidFill>
-                <a:latin typeface="Cambria" pitchFamily="34" charset="0"/>
-                <a:ea typeface="Cambria" pitchFamily="34" charset="-122"/>
-                <a:cs typeface="Cambria" pitchFamily="34" charset="-120"/>
+                  <a:srgbClr val="E8A33D"/>
+                </a:solidFill>
+                <a:latin typeface="Palatino" pitchFamily="34" charset="0"/>
+                <a:ea typeface="Palatino" pitchFamily="34" charset="-122"/>
+                <a:cs typeface="Palatino" pitchFamily="34" charset="-120"/>
               </a:rPr>
               <a:t>159</a:t>
             </a:r>
@@ -9578,11 +9769,11 @@
             <a:r>
               <a:rPr lang="en-US" sz="2600" b="1" dirty="0">
                 <a:solidFill>
-                  <a:srgbClr val="F8FAFC"/>
-                </a:solidFill>
-                <a:latin typeface="Cambria" pitchFamily="34" charset="0"/>
-                <a:ea typeface="Cambria" pitchFamily="34" charset="-122"/>
-                <a:cs typeface="Cambria" pitchFamily="34" charset="-120"/>
+                  <a:srgbClr val="F5EFE6"/>
+                </a:solidFill>
+                <a:latin typeface="Palatino" pitchFamily="34" charset="0"/>
+                <a:ea typeface="Palatino" pitchFamily="34" charset="-122"/>
+                <a:cs typeface="Palatino" pitchFamily="34" charset="-120"/>
               </a:rPr>
               <a:t>Ce</a:t>
             </a:r>
@@ -9592,24 +9783,24 @@
       </p:sp>
       <p:sp>
         <p:nvSpPr>
-          <p:cNvPr id="19" name="Shape 17"/>
-          <p:cNvSpPr/>
-          <p:nvPr/>
-        </p:nvSpPr>
-        <p:spPr>
-          <a:xfrm>
-            <a:off x="685800" y="4041648"/>
+          <p:cNvPr id="20" name="Shape 18"/>
+          <p:cNvSpPr/>
+          <p:nvPr/>
+        </p:nvSpPr>
+        <p:spPr>
+          <a:xfrm>
+            <a:off x="1357884" y="4041648"/>
             <a:ext cx="1234440" cy="731520"/>
           </a:xfrm>
           <a:prstGeom prst="rect">
             <a:avLst/>
           </a:prstGeom>
           <a:solidFill>
-            <a:srgbClr val="0A1929"/>
+            <a:srgbClr val="0B1426"/>
           </a:solidFill>
           <a:ln w="12700">
             <a:solidFill>
-              <a:srgbClr val="F59E0B"/>
+              <a:srgbClr val="E8A33D"/>
             </a:solidFill>
             <a:prstDash val="solid"/>
           </a:ln>
@@ -9617,13 +9808,13 @@
       </p:sp>
       <p:sp>
         <p:nvSpPr>
-          <p:cNvPr id="20" name="Text 18"/>
-          <p:cNvSpPr/>
-          <p:nvPr/>
-        </p:nvSpPr>
-        <p:spPr>
-          <a:xfrm>
-            <a:off x="685800" y="4041648"/>
+          <p:cNvPr id="21" name="Text 19"/>
+          <p:cNvSpPr/>
+          <p:nvPr/>
+        </p:nvSpPr>
+        <p:spPr>
+          <a:xfrm>
+            <a:off x="1357884" y="4041648"/>
             <a:ext cx="1234440" cy="731520"/>
           </a:xfrm>
           <a:prstGeom prst="rect">
@@ -9642,11 +9833,11 @@
             <a:r>
               <a:rPr lang="en-US" sz="1300" b="1" baseline="30000" dirty="0">
                 <a:solidFill>
-                  <a:srgbClr val="F59E0B"/>
-                </a:solidFill>
-                <a:latin typeface="Cambria" pitchFamily="34" charset="0"/>
-                <a:ea typeface="Cambria" pitchFamily="34" charset="-122"/>
-                <a:cs typeface="Cambria" pitchFamily="34" charset="-120"/>
+                  <a:srgbClr val="E8A33D"/>
+                </a:solidFill>
+                <a:latin typeface="Palatino" pitchFamily="34" charset="0"/>
+                <a:ea typeface="Palatino" pitchFamily="34" charset="-122"/>
+                <a:cs typeface="Palatino" pitchFamily="34" charset="-120"/>
               </a:rPr>
               <a:t>160</a:t>
             </a:r>
@@ -9656,11 +9847,11 @@
             <a:r>
               <a:rPr lang="en-US" sz="2600" b="1" dirty="0">
                 <a:solidFill>
-                  <a:srgbClr val="F8FAFC"/>
-                </a:solidFill>
-                <a:latin typeface="Cambria" pitchFamily="34" charset="0"/>
-                <a:ea typeface="Cambria" pitchFamily="34" charset="-122"/>
-                <a:cs typeface="Cambria" pitchFamily="34" charset="-120"/>
+                  <a:srgbClr val="F5EFE6"/>
+                </a:solidFill>
+                <a:latin typeface="Palatino" pitchFamily="34" charset="0"/>
+                <a:ea typeface="Palatino" pitchFamily="34" charset="-122"/>
+                <a:cs typeface="Palatino" pitchFamily="34" charset="-120"/>
               </a:rPr>
               <a:t>Ce</a:t>
             </a:r>
@@ -9670,24 +9861,24 @@
       </p:sp>
       <p:sp>
         <p:nvSpPr>
-          <p:cNvPr id="21" name="Shape 19"/>
-          <p:cNvSpPr/>
-          <p:nvPr/>
-        </p:nvSpPr>
-        <p:spPr>
-          <a:xfrm>
-            <a:off x="2029968" y="4041648"/>
+          <p:cNvPr id="22" name="Shape 20"/>
+          <p:cNvSpPr/>
+          <p:nvPr/>
+        </p:nvSpPr>
+        <p:spPr>
+          <a:xfrm>
+            <a:off x="2702052" y="4041648"/>
             <a:ext cx="1234440" cy="731520"/>
           </a:xfrm>
           <a:prstGeom prst="rect">
             <a:avLst/>
           </a:prstGeom>
           <a:solidFill>
-            <a:srgbClr val="0A1929"/>
+            <a:srgbClr val="0B1426"/>
           </a:solidFill>
           <a:ln w="12700">
             <a:solidFill>
-              <a:srgbClr val="F59E0B"/>
+              <a:srgbClr val="E8A33D"/>
             </a:solidFill>
             <a:prstDash val="solid"/>
           </a:ln>
@@ -9695,13 +9886,13 @@
       </p:sp>
       <p:sp>
         <p:nvSpPr>
-          <p:cNvPr id="22" name="Text 20"/>
-          <p:cNvSpPr/>
-          <p:nvPr/>
-        </p:nvSpPr>
-        <p:spPr>
-          <a:xfrm>
-            <a:off x="2029968" y="4041648"/>
+          <p:cNvPr id="23" name="Text 21"/>
+          <p:cNvSpPr/>
+          <p:nvPr/>
+        </p:nvSpPr>
+        <p:spPr>
+          <a:xfrm>
+            <a:off x="2702052" y="4041648"/>
             <a:ext cx="1234440" cy="731520"/>
           </a:xfrm>
           <a:prstGeom prst="rect">
@@ -9720,11 +9911,11 @@
             <a:r>
               <a:rPr lang="en-US" sz="1300" b="1" baseline="30000" dirty="0">
                 <a:solidFill>
-                  <a:srgbClr val="F59E0B"/>
-                </a:solidFill>
-                <a:latin typeface="Cambria" pitchFamily="34" charset="0"/>
-                <a:ea typeface="Cambria" pitchFamily="34" charset="-122"/>
-                <a:cs typeface="Cambria" pitchFamily="34" charset="-120"/>
+                  <a:srgbClr val="E8A33D"/>
+                </a:solidFill>
+                <a:latin typeface="Palatino" pitchFamily="34" charset="0"/>
+                <a:ea typeface="Palatino" pitchFamily="34" charset="-122"/>
+                <a:cs typeface="Palatino" pitchFamily="34" charset="-120"/>
               </a:rPr>
               <a:t>173</a:t>
             </a:r>
@@ -9734,11 +9925,11 @@
             <a:r>
               <a:rPr lang="en-US" sz="2600" b="1" dirty="0">
                 <a:solidFill>
-                  <a:srgbClr val="F8FAFC"/>
-                </a:solidFill>
-                <a:latin typeface="Cambria" pitchFamily="34" charset="0"/>
-                <a:ea typeface="Cambria" pitchFamily="34" charset="-122"/>
-                <a:cs typeface="Cambria" pitchFamily="34" charset="-120"/>
+                  <a:srgbClr val="F5EFE6"/>
+                </a:solidFill>
+                <a:latin typeface="Palatino" pitchFamily="34" charset="0"/>
+                <a:ea typeface="Palatino" pitchFamily="34" charset="-122"/>
+                <a:cs typeface="Palatino" pitchFamily="34" charset="-120"/>
               </a:rPr>
               <a:t>Gd</a:t>
             </a:r>
@@ -9748,24 +9939,24 @@
       </p:sp>
       <p:sp>
         <p:nvSpPr>
-          <p:cNvPr id="23" name="Shape 21"/>
-          <p:cNvSpPr/>
-          <p:nvPr/>
-        </p:nvSpPr>
-        <p:spPr>
-          <a:xfrm>
-            <a:off x="3374136" y="4041648"/>
+          <p:cNvPr id="24" name="Shape 22"/>
+          <p:cNvSpPr/>
+          <p:nvPr/>
+        </p:nvSpPr>
+        <p:spPr>
+          <a:xfrm>
+            <a:off x="4046220" y="4041648"/>
             <a:ext cx="1234440" cy="731520"/>
           </a:xfrm>
           <a:prstGeom prst="rect">
             <a:avLst/>
           </a:prstGeom>
           <a:solidFill>
-            <a:srgbClr val="0A1929"/>
+            <a:srgbClr val="0B1426"/>
           </a:solidFill>
           <a:ln w="12700">
             <a:solidFill>
-              <a:srgbClr val="F59E0B"/>
+              <a:srgbClr val="E8A33D"/>
             </a:solidFill>
             <a:prstDash val="solid"/>
           </a:ln>
@@ -9773,13 +9964,13 @@
       </p:sp>
       <p:sp>
         <p:nvSpPr>
-          <p:cNvPr id="24" name="Text 22"/>
-          <p:cNvSpPr/>
-          <p:nvPr/>
-        </p:nvSpPr>
-        <p:spPr>
-          <a:xfrm>
-            <a:off x="3374136" y="4041648"/>
+          <p:cNvPr id="25" name="Text 23"/>
+          <p:cNvSpPr/>
+          <p:nvPr/>
+        </p:nvSpPr>
+        <p:spPr>
+          <a:xfrm>
+            <a:off x="4046220" y="4041648"/>
             <a:ext cx="1234440" cy="731520"/>
           </a:xfrm>
           <a:prstGeom prst="rect">
@@ -9798,11 +9989,11 @@
             <a:r>
               <a:rPr lang="en-US" sz="1300" b="1" baseline="30000" dirty="0">
                 <a:solidFill>
-                  <a:srgbClr val="F59E0B"/>
-                </a:solidFill>
-                <a:latin typeface="Cambria" pitchFamily="34" charset="0"/>
-                <a:ea typeface="Cambria" pitchFamily="34" charset="-122"/>
-                <a:cs typeface="Cambria" pitchFamily="34" charset="-120"/>
+                  <a:srgbClr val="E8A33D"/>
+                </a:solidFill>
+                <a:latin typeface="Palatino" pitchFamily="34" charset="0"/>
+                <a:ea typeface="Palatino" pitchFamily="34" charset="-122"/>
+                <a:cs typeface="Palatino" pitchFamily="34" charset="-120"/>
               </a:rPr>
               <a:t>175</a:t>
             </a:r>
@@ -9812,11 +10003,11 @@
             <a:r>
               <a:rPr lang="en-US" sz="2600" b="1" dirty="0">
                 <a:solidFill>
-                  <a:srgbClr val="F8FAFC"/>
-                </a:solidFill>
-                <a:latin typeface="Cambria" pitchFamily="34" charset="0"/>
-                <a:ea typeface="Cambria" pitchFamily="34" charset="-122"/>
-                <a:cs typeface="Cambria" pitchFamily="34" charset="-120"/>
+                  <a:srgbClr val="F5EFE6"/>
+                </a:solidFill>
+                <a:latin typeface="Palatino" pitchFamily="34" charset="0"/>
+                <a:ea typeface="Palatino" pitchFamily="34" charset="-122"/>
+                <a:cs typeface="Palatino" pitchFamily="34" charset="-120"/>
               </a:rPr>
               <a:t>Tb</a:t>
             </a:r>
@@ -9826,7 +10017,7 @@
       </p:sp>
       <p:sp>
         <p:nvSpPr>
-          <p:cNvPr id="25" name="Text 23"/>
+          <p:cNvPr id="26" name="Text 24"/>
           <p:cNvSpPr/>
           <p:nvPr/>
         </p:nvSpPr>
@@ -9851,7 +10042,7 @@
             <a:r>
               <a:rPr lang="en-US" sz="1100" i="1" dirty="0">
                 <a:solidFill>
-                  <a:srgbClr val="1E293B"/>
+                  <a:srgbClr val="1A1F2E"/>
                 </a:solidFill>
                 <a:latin typeface="Calibri" pitchFamily="34" charset="0"/>
                 <a:ea typeface="Calibri" pitchFamily="34" charset="-122"/>
@@ -9865,7 +10056,7 @@
       </p:sp>
       <p:sp>
         <p:nvSpPr>
-          <p:cNvPr id="26" name="Shape 24"/>
+          <p:cNvPr id="27" name="Shape 25"/>
           <p:cNvSpPr/>
           <p:nvPr/>
         </p:nvSpPr>
@@ -9874,22 +10065,24 @@
             <a:off x="6309360" y="1554480"/>
             <a:ext cx="5440680" cy="4526280"/>
           </a:xfrm>
-          <a:prstGeom prst="rect">
-            <a:avLst/>
+          <a:prstGeom prst="roundRect">
+            <a:avLst>
+              <a:gd name="adj" fmla="val 1616"/>
+            </a:avLst>
           </a:prstGeom>
           <a:solidFill>
             <a:srgbClr val="FFFFFF"/>
           </a:solidFill>
-          <a:ln w="9525">
+          <a:ln w="6350">
             <a:solidFill>
-              <a:srgbClr val="E2E8F0"/>
+              <a:srgbClr val="E8DFD2"/>
             </a:solidFill>
             <a:prstDash val="solid"/>
           </a:ln>
           <a:effectLst>
-            <a:outerShdw sx="100000" sy="100000" kx="0" ky="0" algn="bl" rotWithShape="0" blurRad="127000" dist="25400" dir="5400000">
-              <a:srgbClr val="000000">
-                <a:alpha val="7000"/>
+            <a:outerShdw sx="100000" sy="100000" kx="0" ky="0" algn="bl" rotWithShape="0" blurRad="177800" dist="38100" dir="5400000">
+              <a:srgbClr val="1A1F2E">
+                <a:alpha val="8000"/>
               </a:srgbClr>
             </a:outerShdw>
           </a:effectLst>
@@ -9897,24 +10090,24 @@
       </p:sp>
       <p:sp>
         <p:nvSpPr>
-          <p:cNvPr id="27" name="Shape 25"/>
-          <p:cNvSpPr/>
-          <p:nvPr/>
-        </p:nvSpPr>
-        <p:spPr>
-          <a:xfrm>
-            <a:off x="6309360" y="1554480"/>
-            <a:ext cx="73152" cy="4526280"/>
+          <p:cNvPr id="28" name="Shape 26"/>
+          <p:cNvSpPr/>
+          <p:nvPr/>
+        </p:nvSpPr>
+        <p:spPr>
+          <a:xfrm>
+            <a:off x="6309360" y="1627632"/>
+            <a:ext cx="73152" cy="4379976"/>
           </a:xfrm>
           <a:prstGeom prst="rect">
             <a:avLst/>
           </a:prstGeom>
           <a:solidFill>
-            <a:srgbClr val="0891B2"/>
+            <a:srgbClr val="4A7C7E"/>
           </a:solidFill>
           <a:ln w="12700">
             <a:solidFill>
-              <a:srgbClr val="0891B2"/>
+              <a:srgbClr val="4A7C7E"/>
             </a:solidFill>
             <a:prstDash val="solid"/>
           </a:ln>
@@ -9922,7 +10115,7 @@
       </p:sp>
       <p:sp>
         <p:nvSpPr>
-          <p:cNvPr id="28" name="Text 26"/>
+          <p:cNvPr id="29" name="Text 27"/>
           <p:cNvSpPr/>
           <p:nvPr/>
         </p:nvSpPr>
@@ -9947,7 +10140,7 @@
             <a:r>
               <a:rPr lang="en-US" sz="1100" b="1" spc="300" kern="0" dirty="0">
                 <a:solidFill>
-                  <a:srgbClr val="64748B"/>
+                  <a:srgbClr val="8B8578"/>
                 </a:solidFill>
                 <a:latin typeface="Calibri" pitchFamily="34" charset="0"/>
                 <a:ea typeface="Calibri" pitchFamily="34" charset="-122"/>
@@ -9961,7 +10154,7 @@
       </p:sp>
       <p:sp>
         <p:nvSpPr>
-          <p:cNvPr id="29" name="Text 27"/>
+          <p:cNvPr id="30" name="Text 28"/>
           <p:cNvSpPr/>
           <p:nvPr/>
         </p:nvSpPr>
@@ -9986,11 +10179,11 @@
             <a:r>
               <a:rPr lang="en-US" sz="1900" b="1" dirty="0">
                 <a:solidFill>
-                  <a:srgbClr val="075985"/>
-                </a:solidFill>
-                <a:latin typeface="Cambria" pitchFamily="34" charset="0"/>
-                <a:ea typeface="Cambria" pitchFamily="34" charset="-122"/>
-                <a:cs typeface="Cambria" pitchFamily="34" charset="-120"/>
+                  <a:srgbClr val="2D4A4C"/>
+                </a:solidFill>
+                <a:latin typeface="Palatino" pitchFamily="34" charset="0"/>
+                <a:ea typeface="Palatino" pitchFamily="34" charset="-122"/>
+                <a:cs typeface="Palatino" pitchFamily="34" charset="-120"/>
               </a:rPr>
               <a:t>Exploration of neutron-rich isotopes around N = 50</a:t>
             </a:r>
@@ -10000,14 +10193,14 @@
       </p:sp>
       <p:sp>
         <p:nvSpPr>
-          <p:cNvPr id="30" name="Text 28"/>
+          <p:cNvPr id="31" name="Text 29"/>
           <p:cNvSpPr/>
           <p:nvPr/>
         </p:nvSpPr>
         <p:spPr>
           <a:xfrm>
             <a:off x="6537960" y="2926080"/>
-            <a:ext cx="5029200" cy="3063240"/>
+            <a:ext cx="5029200" cy="2103120"/>
           </a:xfrm>
           <a:prstGeom prst="rect">
             <a:avLst/>
@@ -10028,7 +10221,7 @@
             <a:r>
               <a:rPr lang="en-US" sz="1200" dirty="0">
                 <a:solidFill>
-                  <a:srgbClr val="1E293B"/>
+                  <a:srgbClr val="1A1F2E"/>
                 </a:solidFill>
                 <a:latin typeface="Calibri" pitchFamily="34" charset="0"/>
                 <a:ea typeface="Calibri" pitchFamily="34" charset="-122"/>
@@ -10045,7 +10238,7 @@
             <a:r>
               <a:rPr lang="en-US" sz="1200" b="1" baseline="30000" dirty="0">
                 <a:solidFill>
-                  <a:srgbClr val="1E293B"/>
+                  <a:srgbClr val="1A1F2E"/>
                 </a:solidFill>
                 <a:latin typeface="Calibri" pitchFamily="34" charset="0"/>
                 <a:ea typeface="Calibri" pitchFamily="34" charset="-122"/>
@@ -10062,7 +10255,7 @@
             <a:r>
               <a:rPr lang="en-US" sz="1200" b="1" dirty="0">
                 <a:solidFill>
-                  <a:srgbClr val="1E293B"/>
+                  <a:srgbClr val="1A1F2E"/>
                 </a:solidFill>
                 <a:latin typeface="Calibri" pitchFamily="34" charset="0"/>
                 <a:ea typeface="Calibri" pitchFamily="34" charset="-122"/>
@@ -10079,7 +10272,7 @@
             <a:r>
               <a:rPr lang="en-US" sz="1200" dirty="0">
                 <a:solidFill>
-                  <a:srgbClr val="1E293B"/>
+                  <a:srgbClr val="1A1F2E"/>
                 </a:solidFill>
                 <a:latin typeface="Calibri" pitchFamily="34" charset="0"/>
                 <a:ea typeface="Calibri" pitchFamily="34" charset="-122"/>
@@ -10099,7 +10292,7 @@
             <a:r>
               <a:rPr lang="en-US" sz="1200" dirty="0">
                 <a:solidFill>
-                  <a:srgbClr val="1E293B"/>
+                  <a:srgbClr val="1A1F2E"/>
                 </a:solidFill>
                 <a:latin typeface="Calibri" pitchFamily="34" charset="0"/>
                 <a:ea typeface="Calibri" pitchFamily="34" charset="-122"/>
@@ -10119,7 +10312,7 @@
             <a:r>
               <a:rPr lang="en-US" sz="1200" dirty="0">
                 <a:solidFill>
-                  <a:srgbClr val="1E293B"/>
+                  <a:srgbClr val="1A1F2E"/>
                 </a:solidFill>
                 <a:latin typeface="Calibri" pitchFamily="34" charset="0"/>
                 <a:ea typeface="Calibri" pitchFamily="34" charset="-122"/>
@@ -10136,7 +10329,7 @@
             <a:r>
               <a:rPr lang="en-US" sz="1200" baseline="30000" dirty="0">
                 <a:solidFill>
-                  <a:srgbClr val="1E293B"/>
+                  <a:srgbClr val="1A1F2E"/>
                 </a:solidFill>
                 <a:latin typeface="Calibri" pitchFamily="34" charset="0"/>
                 <a:ea typeface="Calibri" pitchFamily="34" charset="-122"/>
@@ -10153,7 +10346,7 @@
             <a:r>
               <a:rPr lang="en-US" sz="1200" dirty="0">
                 <a:solidFill>
-                  <a:srgbClr val="1E293B"/>
+                  <a:srgbClr val="1A1F2E"/>
                 </a:solidFill>
                 <a:latin typeface="Calibri" pitchFamily="34" charset="0"/>
                 <a:ea typeface="Calibri" pitchFamily="34" charset="-122"/>
@@ -10173,7 +10366,7 @@
             <a:r>
               <a:rPr lang="en-US" sz="1200" dirty="0">
                 <a:solidFill>
-                  <a:srgbClr val="1E293B"/>
+                  <a:srgbClr val="1A1F2E"/>
                 </a:solidFill>
                 <a:latin typeface="Calibri" pitchFamily="34" charset="0"/>
                 <a:ea typeface="Calibri" pitchFamily="34" charset="-122"/>
@@ -10193,7 +10386,7 @@
             <a:r>
               <a:rPr lang="en-US" sz="1200" dirty="0">
                 <a:solidFill>
-                  <a:srgbClr val="1E293B"/>
+                  <a:srgbClr val="1A1F2E"/>
                 </a:solidFill>
                 <a:latin typeface="Calibri" pitchFamily="34" charset="0"/>
                 <a:ea typeface="Calibri" pitchFamily="34" charset="-122"/>
@@ -10207,22 +10400,61 @@
       </p:sp>
       <p:sp>
         <p:nvSpPr>
-          <p:cNvPr id="31" name="Shape 29"/>
-          <p:cNvSpPr/>
-          <p:nvPr/>
-        </p:nvSpPr>
-        <p:spPr>
-          <a:xfrm>
-            <a:off x="457200" y="6446520"/>
-            <a:ext cx="11277295" cy="0"/>
+          <p:cNvPr id="32" name="Text 30"/>
+          <p:cNvSpPr/>
+          <p:nvPr/>
+        </p:nvSpPr>
+        <p:spPr>
+          <a:xfrm>
+            <a:off x="6537960" y="5212080"/>
+            <a:ext cx="5029200" cy="640080"/>
+          </a:xfrm>
+          <a:prstGeom prst="rect">
+            <a:avLst/>
+          </a:prstGeom>
+          <a:noFill/>
+          <a:ln/>
+        </p:spPr>
+        <p:txBody>
+          <a:bodyPr wrap="square" lIns="0" tIns="0" rIns="0" bIns="0" rtlCol="0" anchor="ctr"/>
+          <a:lstStyle/>
+          <a:p>
+            <a:pPr indent="0" marL="0">
+              <a:buNone/>
+            </a:pPr>
+            <a:r>
+              <a:rPr lang="en-US" sz="1100" i="1" dirty="0">
+                <a:solidFill>
+                  <a:srgbClr val="1A1F2E"/>
+                </a:solidFill>
+                <a:latin typeface="Calibri" pitchFamily="34" charset="0"/>
+                <a:ea typeface="Calibri" pitchFamily="34" charset="-122"/>
+                <a:cs typeface="Calibri" pitchFamily="34" charset="-120"/>
+              </a:rPr>
+              <a:t>Probes shell evolution near the most neutron-rich doubly-magic nucleus accessible today.</a:t>
+            </a:r>
+            <a:endParaRPr lang="en-US" sz="1100" dirty="0"/>
+          </a:p>
+        </p:txBody>
+      </p:sp>
+      <p:sp>
+        <p:nvSpPr>
+          <p:cNvPr id="33" name="Shape 31"/>
+          <p:cNvSpPr/>
+          <p:nvPr/>
+        </p:nvSpPr>
+        <p:spPr>
+          <a:xfrm>
+            <a:off x="502920" y="6400800"/>
+            <a:ext cx="11185855" cy="0"/>
           </a:xfrm>
           <a:prstGeom prst="line">
             <a:avLst/>
           </a:prstGeom>
           <a:noFill/>
-          <a:ln w="9525">
+          <a:ln w="6350">
             <a:solidFill>
-              <a:srgbClr val="CBD5E1"/>
+              <a:srgbClr val="D9D2C5"/>
             </a:solidFill>
             <a:prstDash val="solid"/>
           </a:ln>
@@ -10230,32 +10462,32 @@
       </p:sp>
       <p:sp>
         <p:nvSpPr>
-          <p:cNvPr id="32" name="Text 30"/>
-          <p:cNvSpPr/>
-          <p:nvPr/>
-        </p:nvSpPr>
-        <p:spPr>
-          <a:xfrm>
-            <a:off x="457200" y="6473952"/>
-            <a:ext cx="8351215" cy="292608"/>
-          </a:xfrm>
-          <a:prstGeom prst="rect">
-            <a:avLst/>
-          </a:prstGeom>
-          <a:noFill/>
-          <a:ln/>
-        </p:spPr>
-        <p:txBody>
-          <a:bodyPr wrap="square" lIns="0" tIns="0" rIns="0" bIns="0" rtlCol="0" anchor="ctr"/>
-          <a:lstStyle/>
-          <a:p>
-            <a:pPr indent="0" marL="0">
-              <a:buNone/>
-            </a:pPr>
-            <a:r>
-              <a:rPr lang="en-US" sz="900" i="1" dirty="0">
-                <a:solidFill>
-                  <a:srgbClr val="64748B"/>
+          <p:cNvPr id="34" name="Text 32"/>
+          <p:cNvSpPr/>
+          <p:nvPr/>
+        </p:nvSpPr>
+        <p:spPr>
+          <a:xfrm>
+            <a:off x="502920" y="6446520"/>
+            <a:ext cx="8259775" cy="292608"/>
+          </a:xfrm>
+          <a:prstGeom prst="rect">
+            <a:avLst/>
+          </a:prstGeom>
+          <a:noFill/>
+          <a:ln/>
+        </p:spPr>
+        <p:txBody>
+          <a:bodyPr wrap="square" lIns="0" tIns="0" rIns="0" bIns="0" rtlCol="0" anchor="ctr"/>
+          <a:lstStyle/>
+          <a:p>
+            <a:pPr indent="0" marL="0">
+              <a:buNone/>
+            </a:pPr>
+            <a:r>
+              <a:rPr lang="en-US" sz="850" i="1" dirty="0">
+                <a:solidFill>
+                  <a:srgbClr val="8B8578"/>
                 </a:solidFill>
                 <a:latin typeface="Calibri" pitchFamily="34" charset="0"/>
                 <a:ea typeface="Calibri" pitchFamily="34" charset="-122"/>
@@ -10263,19 +10495,19 @@
               </a:rPr>
               <a:t>Y. Shimizu et al., J. Phys. Soc. Jpn. 95, 024202 (2026); BigRIPS Team, PTEP 2026, 033D06 (2026).</a:t>
             </a:r>
-            <a:endParaRPr lang="en-US" sz="900" dirty="0"/>
-          </a:p>
-        </p:txBody>
-      </p:sp>
-      <p:sp>
-        <p:nvSpPr>
-          <p:cNvPr id="33" name="Text 31"/>
-          <p:cNvSpPr/>
-          <p:nvPr/>
-        </p:nvSpPr>
-        <p:spPr>
-          <a:xfrm>
-            <a:off x="8808415" y="6473952"/>
+            <a:endParaRPr lang="en-US" sz="850" dirty="0"/>
+          </a:p>
+        </p:txBody>
+      </p:sp>
+      <p:sp>
+        <p:nvSpPr>
+          <p:cNvPr id="35" name="Text 33"/>
+          <p:cNvSpPr/>
+          <p:nvPr/>
+        </p:nvSpPr>
+        <p:spPr>
+          <a:xfrm>
+            <a:off x="8808415" y="6446520"/>
             <a:ext cx="2926080" cy="292608"/>
           </a:xfrm>
           <a:prstGeom prst="rect">
@@ -10292,17 +10524,17 @@
               <a:buNone/>
             </a:pPr>
             <a:r>
-              <a:rPr lang="en-US" sz="900" dirty="0">
-                <a:solidFill>
-                  <a:srgbClr val="64748B"/>
-                </a:solidFill>
-                <a:latin typeface="Calibri" pitchFamily="34" charset="0"/>
-                <a:ea typeface="Calibri" pitchFamily="34" charset="-122"/>
-                <a:cs typeface="Calibri" pitchFamily="34" charset="-120"/>
-              </a:rPr>
-              <a:t>In-Flight Fission · OrbitOS · 2026-04</a:t>
-            </a:r>
-            <a:endParaRPr lang="en-US" sz="900" dirty="0"/>
+              <a:rPr lang="en-US" sz="850" spc="100" kern="0" dirty="0">
+                <a:solidFill>
+                  <a:srgbClr val="8B8578"/>
+                </a:solidFill>
+                <a:latin typeface="Calibri" pitchFamily="34" charset="0"/>
+                <a:ea typeface="Calibri" pitchFamily="34" charset="-122"/>
+                <a:cs typeface="Calibri" pitchFamily="34" charset="-120"/>
+              </a:rPr>
+              <a:t>In-Flight Fission  ·  OrbitOS  ·  2026-04</a:t>
+            </a:r>
+            <a:endParaRPr lang="en-US" sz="850" dirty="0"/>
           </a:p>
         </p:txBody>
       </p:sp>
@@ -10320,7 +10552,7 @@
     <p:bg>
       <p:bgPr>
         <a:solidFill>
-          <a:srgbClr val="F8FAFC"/>
+          <a:srgbClr val="FAF7F2"/>
         </a:solidFill>
       </p:bgPr>
     </p:bg>
@@ -10347,17 +10579,17 @@
         <p:spPr>
           <a:xfrm>
             <a:off x="0" y="0"/>
-            <a:ext cx="12191695" cy="109728"/>
+            <a:ext cx="274320" cy="6858000"/>
           </a:xfrm>
           <a:prstGeom prst="rect">
             <a:avLst/>
           </a:prstGeom>
           <a:solidFill>
-            <a:srgbClr val="F59E0B"/>
+            <a:srgbClr val="E8A33D"/>
           </a:solidFill>
           <a:ln w="12700">
             <a:solidFill>
-              <a:srgbClr val="F59E0B"/>
+              <a:srgbClr val="E8A33D"/>
             </a:solidFill>
             <a:prstDash val="solid"/>
           </a:ln>
@@ -10365,32 +10597,57 @@
       </p:sp>
       <p:sp>
         <p:nvSpPr>
-          <p:cNvPr id="3" name="Text 1"/>
-          <p:cNvSpPr/>
-          <p:nvPr/>
-        </p:nvSpPr>
-        <p:spPr>
-          <a:xfrm>
-            <a:off x="457200" y="256032"/>
-            <a:ext cx="8229600" cy="320040"/>
-          </a:xfrm>
-          <a:prstGeom prst="rect">
-            <a:avLst/>
-          </a:prstGeom>
-          <a:noFill/>
-          <a:ln/>
-        </p:spPr>
-        <p:txBody>
-          <a:bodyPr wrap="square" lIns="0" tIns="0" rIns="0" bIns="0" rtlCol="0" anchor="ctr"/>
-          <a:lstStyle/>
-          <a:p>
-            <a:pPr indent="0" marL="0">
-              <a:buNone/>
-            </a:pPr>
-            <a:r>
-              <a:rPr lang="en-US" sz="1100" b="1" spc="400" kern="0" dirty="0">
-                <a:solidFill>
-                  <a:srgbClr val="64748B"/>
+          <p:cNvPr id="3" name="Shape 1"/>
+          <p:cNvSpPr/>
+          <p:nvPr/>
+        </p:nvSpPr>
+        <p:spPr>
+          <a:xfrm>
+            <a:off x="0" y="0"/>
+            <a:ext cx="12191695" cy="91440"/>
+          </a:xfrm>
+          <a:prstGeom prst="rect">
+            <a:avLst/>
+          </a:prstGeom>
+          <a:solidFill>
+            <a:srgbClr val="E8A33D"/>
+          </a:solidFill>
+          <a:ln w="12700">
+            <a:solidFill>
+              <a:srgbClr val="E8A33D"/>
+            </a:solidFill>
+            <a:prstDash val="solid"/>
+          </a:ln>
+        </p:spPr>
+      </p:sp>
+      <p:sp>
+        <p:nvSpPr>
+          <p:cNvPr id="4" name="Text 2"/>
+          <p:cNvSpPr/>
+          <p:nvPr/>
+        </p:nvSpPr>
+        <p:spPr>
+          <a:xfrm>
+            <a:off x="502920" y="292608"/>
+            <a:ext cx="8686800" cy="347472"/>
+          </a:xfrm>
+          <a:prstGeom prst="rect">
+            <a:avLst/>
+          </a:prstGeom>
+          <a:noFill/>
+          <a:ln/>
+        </p:spPr>
+        <p:txBody>
+          <a:bodyPr wrap="square" lIns="0" tIns="0" rIns="0" bIns="0" rtlCol="0" anchor="ctr"/>
+          <a:lstStyle/>
+          <a:p>
+            <a:pPr indent="0" marL="0">
+              <a:buNone/>
+            </a:pPr>
+            <a:r>
+              <a:rPr lang="en-US" sz="1050" b="1" spc="600" kern="0" dirty="0">
+                <a:solidFill>
+                  <a:srgbClr val="8B8578"/>
                 </a:solidFill>
                 <a:latin typeface="Calibri" pitchFamily="34" charset="0"/>
                 <a:ea typeface="Calibri" pitchFamily="34" charset="-122"/>
@@ -10398,20 +10655,20 @@
               </a:rPr>
               <a:t>SCIENCE OUTPUT</a:t>
             </a:r>
-            <a:endParaRPr lang="en-US" sz="1100" dirty="0"/>
-          </a:p>
-        </p:txBody>
-      </p:sp>
-      <p:sp>
-        <p:nvSpPr>
-          <p:cNvPr id="4" name="Text 2"/>
-          <p:cNvSpPr/>
-          <p:nvPr/>
-        </p:nvSpPr>
-        <p:spPr>
-          <a:xfrm>
-            <a:off x="10728655" y="256032"/>
-            <a:ext cx="1005840" cy="320040"/>
+            <a:endParaRPr lang="en-US" sz="1050" dirty="0"/>
+          </a:p>
+        </p:txBody>
+      </p:sp>
+      <p:sp>
+        <p:nvSpPr>
+          <p:cNvPr id="5" name="Text 3"/>
+          <p:cNvSpPr/>
+          <p:nvPr/>
+        </p:nvSpPr>
+        <p:spPr>
+          <a:xfrm>
+            <a:off x="10728655" y="292608"/>
+            <a:ext cx="1005840" cy="347472"/>
           </a:xfrm>
           <a:prstGeom prst="rect">
             <a:avLst/>
@@ -10427,62 +10684,62 @@
               <a:buNone/>
             </a:pPr>
             <a:r>
-              <a:rPr lang="en-US" sz="1100" b="1" dirty="0">
-                <a:solidFill>
-                  <a:srgbClr val="64748B"/>
-                </a:solidFill>
-                <a:latin typeface="Calibri" pitchFamily="34" charset="0"/>
-                <a:ea typeface="Calibri" pitchFamily="34" charset="-122"/>
-                <a:cs typeface="Calibri" pitchFamily="34" charset="-120"/>
-              </a:rPr>
-              <a:t>08 / 09</a:t>
-            </a:r>
-            <a:endParaRPr lang="en-US" sz="1100" dirty="0"/>
-          </a:p>
-        </p:txBody>
-      </p:sp>
-      <p:sp>
-        <p:nvSpPr>
-          <p:cNvPr id="5" name="Text 3"/>
-          <p:cNvSpPr/>
-          <p:nvPr/>
-        </p:nvSpPr>
-        <p:spPr>
-          <a:xfrm>
-            <a:off x="457200" y="594360"/>
-            <a:ext cx="11247120" cy="822960"/>
-          </a:xfrm>
-          <a:prstGeom prst="rect">
-            <a:avLst/>
-          </a:prstGeom>
-          <a:noFill/>
-          <a:ln/>
-        </p:spPr>
-        <p:txBody>
-          <a:bodyPr wrap="square" lIns="0" tIns="0" rIns="0" bIns="0" rtlCol="0" anchor="ctr"/>
-          <a:lstStyle/>
-          <a:p>
-            <a:pPr indent="0" marL="0">
-              <a:buNone/>
-            </a:pPr>
-            <a:r>
-              <a:rPr lang="en-US" sz="2800" b="1" dirty="0">
-                <a:solidFill>
-                  <a:srgbClr val="1E293B"/>
-                </a:solidFill>
-                <a:latin typeface="Cambria" pitchFamily="34" charset="0"/>
-                <a:ea typeface="Cambria" pitchFamily="34" charset="-122"/>
-                <a:cs typeface="Cambria" pitchFamily="34" charset="-120"/>
+              <a:rPr lang="en-US" sz="1050" b="1" spc="200" kern="0" dirty="0">
+                <a:solidFill>
+                  <a:srgbClr val="8B8578"/>
+                </a:solidFill>
+                <a:latin typeface="Calibri" pitchFamily="34" charset="0"/>
+                <a:ea typeface="Calibri" pitchFamily="34" charset="-122"/>
+                <a:cs typeface="Calibri" pitchFamily="34" charset="-120"/>
+              </a:rPr>
+              <a:t>08  ·  09</a:t>
+            </a:r>
+            <a:endParaRPr lang="en-US" sz="1050" dirty="0"/>
+          </a:p>
+        </p:txBody>
+      </p:sp>
+      <p:sp>
+        <p:nvSpPr>
+          <p:cNvPr id="6" name="Text 4"/>
+          <p:cNvSpPr/>
+          <p:nvPr/>
+        </p:nvSpPr>
+        <p:spPr>
+          <a:xfrm>
+            <a:off x="502920" y="713232"/>
+            <a:ext cx="11155680" cy="868680"/>
+          </a:xfrm>
+          <a:prstGeom prst="rect">
+            <a:avLst/>
+          </a:prstGeom>
+          <a:noFill/>
+          <a:ln/>
+        </p:spPr>
+        <p:txBody>
+          <a:bodyPr wrap="square" lIns="0" tIns="0" rIns="0" bIns="0" rtlCol="0" anchor="ctr"/>
+          <a:lstStyle/>
+          <a:p>
+            <a:pPr indent="0" marL="0">
+              <a:buNone/>
+            </a:pPr>
+            <a:r>
+              <a:rPr lang="en-US" sz="3600" b="1" dirty="0">
+                <a:solidFill>
+                  <a:srgbClr val="1A1F2E"/>
+                </a:solidFill>
+                <a:latin typeface="Palatino" pitchFamily="34" charset="0"/>
+                <a:ea typeface="Palatino" pitchFamily="34" charset="-122"/>
+                <a:cs typeface="Palatino" pitchFamily="34" charset="-120"/>
               </a:rPr>
               <a:t>What In-Flight Fission Delivers Beyond Discovery</a:t>
             </a:r>
-            <a:endParaRPr lang="en-US" sz="2800" dirty="0"/>
-          </a:p>
-        </p:txBody>
-      </p:sp>
-      <p:sp>
-        <p:nvSpPr>
-          <p:cNvPr id="6" name="Shape 4"/>
+            <a:endParaRPr lang="en-US" sz="3600" dirty="0"/>
+          </a:p>
+        </p:txBody>
+      </p:sp>
+      <p:sp>
+        <p:nvSpPr>
+          <p:cNvPr id="7" name="Shape 5"/>
           <p:cNvSpPr/>
           <p:nvPr/>
         </p:nvSpPr>
@@ -10499,7 +10756,7 @@
           </a:solidFill>
           <a:ln w="9525">
             <a:solidFill>
-              <a:srgbClr val="E2E8F0"/>
+              <a:srgbClr val="E8DFD2"/>
             </a:solidFill>
             <a:prstDash val="solid"/>
           </a:ln>
@@ -10514,7 +10771,7 @@
       </p:sp>
       <p:sp>
         <p:nvSpPr>
-          <p:cNvPr id="7" name="Shape 5"/>
+          <p:cNvPr id="8" name="Shape 6"/>
           <p:cNvSpPr/>
           <p:nvPr/>
         </p:nvSpPr>
@@ -10527,11 +10784,11 @@
             <a:avLst/>
           </a:prstGeom>
           <a:solidFill>
-            <a:srgbClr val="F59E0B"/>
+            <a:srgbClr val="E8A33D"/>
           </a:solidFill>
           <a:ln w="12700">
             <a:solidFill>
-              <a:srgbClr val="F59E0B"/>
+              <a:srgbClr val="E8A33D"/>
             </a:solidFill>
             <a:prstDash val="solid"/>
           </a:ln>
@@ -10539,7 +10796,7 @@
       </p:sp>
       <p:sp>
         <p:nvSpPr>
-          <p:cNvPr id="8" name="Text 6"/>
+          <p:cNvPr id="9" name="Text 7"/>
           <p:cNvSpPr/>
           <p:nvPr/>
         </p:nvSpPr>
@@ -10564,11 +10821,11 @@
             <a:r>
               <a:rPr lang="en-US" sz="1800" b="1" dirty="0">
                 <a:solidFill>
-                  <a:srgbClr val="F8FAFC"/>
-                </a:solidFill>
-                <a:latin typeface="Cambria" pitchFamily="34" charset="0"/>
-                <a:ea typeface="Cambria" pitchFamily="34" charset="-122"/>
-                <a:cs typeface="Cambria" pitchFamily="34" charset="-120"/>
+                  <a:srgbClr val="F5EFE6"/>
+                </a:solidFill>
+                <a:latin typeface="Palatino" pitchFamily="34" charset="0"/>
+                <a:ea typeface="Palatino" pitchFamily="34" charset="-122"/>
+                <a:cs typeface="Palatino" pitchFamily="34" charset="-120"/>
               </a:rPr>
               <a:t>β-decay half-lives</a:t>
             </a:r>
@@ -10578,7 +10835,7 @@
       </p:sp>
       <p:sp>
         <p:nvSpPr>
-          <p:cNvPr id="9" name="Text 7"/>
+          <p:cNvPr id="10" name="Text 8"/>
           <p:cNvSpPr/>
           <p:nvPr/>
         </p:nvSpPr>
@@ -10603,7 +10860,7 @@
             <a:r>
               <a:rPr lang="en-US" sz="1300" dirty="0">
                 <a:solidFill>
-                  <a:srgbClr val="1E293B"/>
+                  <a:srgbClr val="1A1F2E"/>
                 </a:solidFill>
                 <a:latin typeface="Calibri" pitchFamily="34" charset="0"/>
                 <a:ea typeface="Calibri" pitchFamily="34" charset="-122"/>
@@ -10617,7 +10874,7 @@
       </p:sp>
       <p:sp>
         <p:nvSpPr>
-          <p:cNvPr id="10" name="Shape 8"/>
+          <p:cNvPr id="11" name="Shape 9"/>
           <p:cNvSpPr/>
           <p:nvPr/>
         </p:nvSpPr>
@@ -10630,13 +10887,13 @@
             <a:avLst/>
           </a:prstGeom>
           <a:solidFill>
-            <a:srgbClr val="F59E0B">
+            <a:srgbClr val="E8A33D">
               <a:alpha val="15000"/>
             </a:srgbClr>
           </a:solidFill>
           <a:ln w="6350">
             <a:solidFill>
-              <a:srgbClr val="F59E0B"/>
+              <a:srgbClr val="E8A33D"/>
             </a:solidFill>
             <a:prstDash val="solid"/>
           </a:ln>
@@ -10644,7 +10901,7 @@
       </p:sp>
       <p:sp>
         <p:nvSpPr>
-          <p:cNvPr id="11" name="Text 9"/>
+          <p:cNvPr id="12" name="Text 10"/>
           <p:cNvSpPr/>
           <p:nvPr/>
         </p:nvSpPr>
@@ -10669,7 +10926,7 @@
             <a:r>
               <a:rPr lang="en-US" sz="1000" b="1" spc="300" kern="0" dirty="0">
                 <a:solidFill>
-                  <a:srgbClr val="F59E0B"/>
+                  <a:srgbClr val="E8A33D"/>
                 </a:solidFill>
                 <a:latin typeface="Calibri" pitchFamily="34" charset="0"/>
                 <a:ea typeface="Calibri" pitchFamily="34" charset="-122"/>
@@ -10683,7 +10940,7 @@
       </p:sp>
       <p:sp>
         <p:nvSpPr>
-          <p:cNvPr id="12" name="Shape 10"/>
+          <p:cNvPr id="13" name="Shape 11"/>
           <p:cNvSpPr/>
           <p:nvPr/>
         </p:nvSpPr>
@@ -10700,7 +10957,7 @@
           </a:solidFill>
           <a:ln w="9525">
             <a:solidFill>
-              <a:srgbClr val="E2E8F0"/>
+              <a:srgbClr val="E8DFD2"/>
             </a:solidFill>
             <a:prstDash val="solid"/>
           </a:ln>
@@ -10715,7 +10972,7 @@
       </p:sp>
       <p:sp>
         <p:nvSpPr>
-          <p:cNvPr id="13" name="Shape 11"/>
+          <p:cNvPr id="14" name="Shape 12"/>
           <p:cNvSpPr/>
           <p:nvPr/>
         </p:nvSpPr>
@@ -10728,11 +10985,11 @@
             <a:avLst/>
           </a:prstGeom>
           <a:solidFill>
-            <a:srgbClr val="0891B2"/>
+            <a:srgbClr val="4A7C7E"/>
           </a:solidFill>
           <a:ln w="12700">
             <a:solidFill>
-              <a:srgbClr val="0891B2"/>
+              <a:srgbClr val="4A7C7E"/>
             </a:solidFill>
             <a:prstDash val="solid"/>
           </a:ln>
@@ -10740,7 +10997,7 @@
       </p:sp>
       <p:sp>
         <p:nvSpPr>
-          <p:cNvPr id="14" name="Text 12"/>
+          <p:cNvPr id="15" name="Text 13"/>
           <p:cNvSpPr/>
           <p:nvPr/>
         </p:nvSpPr>
@@ -10765,11 +11022,11 @@
             <a:r>
               <a:rPr lang="en-US" sz="1800" b="1" dirty="0">
                 <a:solidFill>
-                  <a:srgbClr val="F8FAFC"/>
-                </a:solidFill>
-                <a:latin typeface="Cambria" pitchFamily="34" charset="0"/>
-                <a:ea typeface="Cambria" pitchFamily="34" charset="-122"/>
-                <a:cs typeface="Cambria" pitchFamily="34" charset="-120"/>
+                  <a:srgbClr val="F5EFE6"/>
+                </a:solidFill>
+                <a:latin typeface="Palatino" pitchFamily="34" charset="0"/>
+                <a:ea typeface="Palatino" pitchFamily="34" charset="-122"/>
+                <a:cs typeface="Palatino" pitchFamily="34" charset="-120"/>
               </a:rPr>
               <a:t>Mass measurements</a:t>
             </a:r>
@@ -10779,7 +11036,7 @@
       </p:sp>
       <p:sp>
         <p:nvSpPr>
-          <p:cNvPr id="15" name="Text 13"/>
+          <p:cNvPr id="16" name="Text 14"/>
           <p:cNvSpPr/>
           <p:nvPr/>
         </p:nvSpPr>
@@ -10804,7 +11061,7 @@
             <a:r>
               <a:rPr lang="en-US" sz="1300" dirty="0">
                 <a:solidFill>
-                  <a:srgbClr val="1E293B"/>
+                  <a:srgbClr val="1A1F2E"/>
                 </a:solidFill>
                 <a:latin typeface="Calibri" pitchFamily="34" charset="0"/>
                 <a:ea typeface="Calibri" pitchFamily="34" charset="-122"/>
@@ -10818,7 +11075,7 @@
       </p:sp>
       <p:sp>
         <p:nvSpPr>
-          <p:cNvPr id="16" name="Shape 14"/>
+          <p:cNvPr id="17" name="Shape 15"/>
           <p:cNvSpPr/>
           <p:nvPr/>
         </p:nvSpPr>
@@ -10831,13 +11088,13 @@
             <a:avLst/>
           </a:prstGeom>
           <a:solidFill>
-            <a:srgbClr val="0891B2">
+            <a:srgbClr val="4A7C7E">
               <a:alpha val="15000"/>
             </a:srgbClr>
           </a:solidFill>
           <a:ln w="6350">
             <a:solidFill>
-              <a:srgbClr val="0891B2"/>
+              <a:srgbClr val="4A7C7E"/>
             </a:solidFill>
             <a:prstDash val="solid"/>
           </a:ln>
@@ -10845,7 +11102,7 @@
       </p:sp>
       <p:sp>
         <p:nvSpPr>
-          <p:cNvPr id="17" name="Text 15"/>
+          <p:cNvPr id="18" name="Text 16"/>
           <p:cNvSpPr/>
           <p:nvPr/>
         </p:nvSpPr>
@@ -10870,7 +11127,7 @@
             <a:r>
               <a:rPr lang="en-US" sz="1000" b="1" spc="300" kern="0" dirty="0">
                 <a:solidFill>
-                  <a:srgbClr val="0891B2"/>
+                  <a:srgbClr val="4A7C7E"/>
                 </a:solidFill>
                 <a:latin typeface="Calibri" pitchFamily="34" charset="0"/>
                 <a:ea typeface="Calibri" pitchFamily="34" charset="-122"/>
@@ -10884,7 +11141,7 @@
       </p:sp>
       <p:sp>
         <p:nvSpPr>
-          <p:cNvPr id="18" name="Shape 16"/>
+          <p:cNvPr id="19" name="Shape 17"/>
           <p:cNvSpPr/>
           <p:nvPr/>
         </p:nvSpPr>
@@ -10901,7 +11158,7 @@
           </a:solidFill>
           <a:ln w="9525">
             <a:solidFill>
-              <a:srgbClr val="E2E8F0"/>
+              <a:srgbClr val="E8DFD2"/>
             </a:solidFill>
             <a:prstDash val="solid"/>
           </a:ln>
@@ -10916,7 +11173,7 @@
       </p:sp>
       <p:sp>
         <p:nvSpPr>
-          <p:cNvPr id="19" name="Shape 17"/>
+          <p:cNvPr id="20" name="Shape 18"/>
           <p:cNvSpPr/>
           <p:nvPr/>
         </p:nvSpPr>
@@ -10929,11 +11186,11 @@
             <a:avLst/>
           </a:prstGeom>
           <a:solidFill>
-            <a:srgbClr val="B91C1C"/>
+            <a:srgbClr val="7A2E2E"/>
           </a:solidFill>
           <a:ln w="12700">
             <a:solidFill>
-              <a:srgbClr val="B91C1C"/>
+              <a:srgbClr val="7A2E2E"/>
             </a:solidFill>
             <a:prstDash val="solid"/>
           </a:ln>
@@ -10941,7 +11198,7 @@
       </p:sp>
       <p:sp>
         <p:nvSpPr>
-          <p:cNvPr id="20" name="Text 18"/>
+          <p:cNvPr id="21" name="Text 19"/>
           <p:cNvSpPr/>
           <p:nvPr/>
         </p:nvSpPr>
@@ -10966,11 +11223,11 @@
             <a:r>
               <a:rPr lang="en-US" sz="1800" b="1" dirty="0">
                 <a:solidFill>
-                  <a:srgbClr val="F8FAFC"/>
-                </a:solidFill>
-                <a:latin typeface="Cambria" pitchFamily="34" charset="0"/>
-                <a:ea typeface="Cambria" pitchFamily="34" charset="-122"/>
-                <a:cs typeface="Cambria" pitchFamily="34" charset="-120"/>
+                  <a:srgbClr val="F5EFE6"/>
+                </a:solidFill>
+                <a:latin typeface="Palatino" pitchFamily="34" charset="0"/>
+                <a:ea typeface="Palatino" pitchFamily="34" charset="-122"/>
+                <a:cs typeface="Palatino" pitchFamily="34" charset="-120"/>
               </a:rPr>
               <a:t>Fission dynamics</a:t>
             </a:r>
@@ -10980,7 +11237,7 @@
       </p:sp>
       <p:sp>
         <p:nvSpPr>
-          <p:cNvPr id="21" name="Text 19"/>
+          <p:cNvPr id="22" name="Text 20"/>
           <p:cNvSpPr/>
           <p:nvPr/>
         </p:nvSpPr>
@@ -11005,7 +11262,7 @@
             <a:r>
               <a:rPr lang="en-US" sz="1300" dirty="0">
                 <a:solidFill>
-                  <a:srgbClr val="1E293B"/>
+                  <a:srgbClr val="1A1F2E"/>
                 </a:solidFill>
                 <a:latin typeface="Calibri" pitchFamily="34" charset="0"/>
                 <a:ea typeface="Calibri" pitchFamily="34" charset="-122"/>
@@ -11019,7 +11276,7 @@
       </p:sp>
       <p:sp>
         <p:nvSpPr>
-          <p:cNvPr id="22" name="Shape 20"/>
+          <p:cNvPr id="23" name="Shape 21"/>
           <p:cNvSpPr/>
           <p:nvPr/>
         </p:nvSpPr>
@@ -11032,13 +11289,13 @@
             <a:avLst/>
           </a:prstGeom>
           <a:solidFill>
-            <a:srgbClr val="B91C1C">
+            <a:srgbClr val="7A2E2E">
               <a:alpha val="15000"/>
             </a:srgbClr>
           </a:solidFill>
           <a:ln w="6350">
             <a:solidFill>
-              <a:srgbClr val="B91C1C"/>
+              <a:srgbClr val="7A2E2E"/>
             </a:solidFill>
             <a:prstDash val="solid"/>
           </a:ln>
@@ -11046,7 +11303,7 @@
       </p:sp>
       <p:sp>
         <p:nvSpPr>
-          <p:cNvPr id="23" name="Text 21"/>
+          <p:cNvPr id="24" name="Text 22"/>
           <p:cNvSpPr/>
           <p:nvPr/>
         </p:nvSpPr>
@@ -11071,13 +11328,13 @@
             <a:r>
               <a:rPr lang="en-US" sz="1000" b="1" spc="300" kern="0" dirty="0">
                 <a:solidFill>
-                  <a:srgbClr val="B91C1C"/>
-                </a:solidFill>
-                <a:latin typeface="Calibri" pitchFamily="34" charset="0"/>
-                <a:ea typeface="Calibri" pitchFamily="34" charset="-122"/>
-                <a:cs typeface="Calibri" pitchFamily="34" charset="-120"/>
-              </a:rPr>
-              <a:t>FISSION &amp; SPECTROSCOPY</a:t>
+                  <a:srgbClr val="7A2E2E"/>
+                </a:solidFill>
+                <a:latin typeface="Calibri" pitchFamily="34" charset="0"/>
+                <a:ea typeface="Calibri" pitchFamily="34" charset="-122"/>
+                <a:cs typeface="Calibri" pitchFamily="34" charset="-120"/>
+              </a:rPr>
+              <a:t>FISSION DYNAMICS</a:t>
             </a:r>
             <a:endParaRPr lang="en-US" sz="1000" dirty="0"/>
           </a:p>
@@ -11085,7 +11342,7 @@
       </p:sp>
       <p:sp>
         <p:nvSpPr>
-          <p:cNvPr id="24" name="Text 22"/>
+          <p:cNvPr id="25" name="Text 23"/>
           <p:cNvSpPr/>
           <p:nvPr/>
         </p:nvSpPr>
@@ -11110,7 +11367,7 @@
             <a:r>
               <a:rPr lang="en-US" sz="1000" i="1" dirty="0">
                 <a:solidFill>
-                  <a:srgbClr val="64748B"/>
+                  <a:srgbClr val="8B8578"/>
                 </a:solidFill>
                 <a:latin typeface="Calibri" pitchFamily="34" charset="0"/>
                 <a:ea typeface="Calibri" pitchFamily="34" charset="-122"/>
@@ -11124,22 +11381,22 @@
       </p:sp>
       <p:sp>
         <p:nvSpPr>
-          <p:cNvPr id="25" name="Shape 23"/>
-          <p:cNvSpPr/>
-          <p:nvPr/>
-        </p:nvSpPr>
-        <p:spPr>
-          <a:xfrm>
-            <a:off x="457200" y="6446520"/>
-            <a:ext cx="11277295" cy="0"/>
+          <p:cNvPr id="26" name="Shape 24"/>
+          <p:cNvSpPr/>
+          <p:nvPr/>
+        </p:nvSpPr>
+        <p:spPr>
+          <a:xfrm>
+            <a:off x="502920" y="6400800"/>
+            <a:ext cx="11185855" cy="0"/>
           </a:xfrm>
           <a:prstGeom prst="line">
             <a:avLst/>
           </a:prstGeom>
           <a:noFill/>
-          <a:ln w="9525">
+          <a:ln w="6350">
             <a:solidFill>
-              <a:srgbClr val="CBD5E1"/>
+              <a:srgbClr val="D9D2C5"/>
             </a:solidFill>
             <a:prstDash val="solid"/>
           </a:ln>
@@ -11147,32 +11404,32 @@
       </p:sp>
       <p:sp>
         <p:nvSpPr>
-          <p:cNvPr id="26" name="Text 24"/>
-          <p:cNvSpPr/>
-          <p:nvPr/>
-        </p:nvSpPr>
-        <p:spPr>
-          <a:xfrm>
-            <a:off x="457200" y="6473952"/>
-            <a:ext cx="8351215" cy="292608"/>
-          </a:xfrm>
-          <a:prstGeom prst="rect">
-            <a:avLst/>
-          </a:prstGeom>
-          <a:noFill/>
-          <a:ln/>
-        </p:spPr>
-        <p:txBody>
-          <a:bodyPr wrap="square" lIns="0" tIns="0" rIns="0" bIns="0" rtlCol="0" anchor="ctr"/>
-          <a:lstStyle/>
-          <a:p>
-            <a:pPr indent="0" marL="0">
-              <a:buNone/>
-            </a:pPr>
-            <a:r>
-              <a:rPr lang="en-US" sz="900" i="1" dirty="0">
-                <a:solidFill>
-                  <a:srgbClr val="64748B"/>
+          <p:cNvPr id="27" name="Text 25"/>
+          <p:cNvSpPr/>
+          <p:nvPr/>
+        </p:nvSpPr>
+        <p:spPr>
+          <a:xfrm>
+            <a:off x="502920" y="6446520"/>
+            <a:ext cx="8259775" cy="292608"/>
+          </a:xfrm>
+          <a:prstGeom prst="rect">
+            <a:avLst/>
+          </a:prstGeom>
+          <a:noFill/>
+          <a:ln/>
+        </p:spPr>
+        <p:txBody>
+          <a:bodyPr wrap="square" lIns="0" tIns="0" rIns="0" bIns="0" rtlCol="0" anchor="ctr"/>
+          <a:lstStyle/>
+          <a:p>
+            <a:pPr indent="0" marL="0">
+              <a:buNone/>
+            </a:pPr>
+            <a:r>
+              <a:rPr lang="en-US" sz="850" i="1" dirty="0">
+                <a:solidFill>
+                  <a:srgbClr val="8B8578"/>
                 </a:solidFill>
                 <a:latin typeface="Calibri" pitchFamily="34" charset="0"/>
                 <a:ea typeface="Calibri" pitchFamily="34" charset="-122"/>
@@ -11180,19 +11437,19 @@
               </a:rPr>
               <a:t>S. Nishimura et al., Phys. Rev. Lett. 106, 052502 (2011); Rare-RI Ring: Y. Yamaguchi et al., NIM B 317 (2013).</a:t>
             </a:r>
-            <a:endParaRPr lang="en-US" sz="900" dirty="0"/>
-          </a:p>
-        </p:txBody>
-      </p:sp>
-      <p:sp>
-        <p:nvSpPr>
-          <p:cNvPr id="27" name="Text 25"/>
-          <p:cNvSpPr/>
-          <p:nvPr/>
-        </p:nvSpPr>
-        <p:spPr>
-          <a:xfrm>
-            <a:off x="8808415" y="6473952"/>
+            <a:endParaRPr lang="en-US" sz="850" dirty="0"/>
+          </a:p>
+        </p:txBody>
+      </p:sp>
+      <p:sp>
+        <p:nvSpPr>
+          <p:cNvPr id="28" name="Text 26"/>
+          <p:cNvSpPr/>
+          <p:nvPr/>
+        </p:nvSpPr>
+        <p:spPr>
+          <a:xfrm>
+            <a:off x="8808415" y="6446520"/>
             <a:ext cx="2926080" cy="292608"/>
           </a:xfrm>
           <a:prstGeom prst="rect">
@@ -11209,17 +11466,17 @@
               <a:buNone/>
             </a:pPr>
             <a:r>
-              <a:rPr lang="en-US" sz="900" dirty="0">
-                <a:solidFill>
-                  <a:srgbClr val="64748B"/>
-                </a:solidFill>
-                <a:latin typeface="Calibri" pitchFamily="34" charset="0"/>
-                <a:ea typeface="Calibri" pitchFamily="34" charset="-122"/>
-                <a:cs typeface="Calibri" pitchFamily="34" charset="-120"/>
-              </a:rPr>
-              <a:t>In-Flight Fission · OrbitOS · 2026-04</a:t>
-            </a:r>
-            <a:endParaRPr lang="en-US" sz="900" dirty="0"/>
+              <a:rPr lang="en-US" sz="850" spc="100" kern="0" dirty="0">
+                <a:solidFill>
+                  <a:srgbClr val="8B8578"/>
+                </a:solidFill>
+                <a:latin typeface="Calibri" pitchFamily="34" charset="0"/>
+                <a:ea typeface="Calibri" pitchFamily="34" charset="-122"/>
+                <a:cs typeface="Calibri" pitchFamily="34" charset="-120"/>
+              </a:rPr>
+              <a:t>In-Flight Fission  ·  OrbitOS  ·  2026-04</a:t>
+            </a:r>
+            <a:endParaRPr lang="en-US" sz="850" dirty="0"/>
           </a:p>
         </p:txBody>
       </p:sp>
@@ -11237,7 +11494,7 @@
     <p:bg>
       <p:bgPr>
         <a:solidFill>
-          <a:srgbClr val="0A1929"/>
+          <a:srgbClr val="0B1426"/>
         </a:solidFill>
       </p:bgPr>
     </p:bg>
@@ -11264,17 +11521,17 @@
         <p:spPr>
           <a:xfrm>
             <a:off x="0" y="0"/>
-            <a:ext cx="12191695" cy="109728"/>
+            <a:ext cx="274320" cy="6858000"/>
           </a:xfrm>
           <a:prstGeom prst="rect">
             <a:avLst/>
           </a:prstGeom>
           <a:solidFill>
-            <a:srgbClr val="F59E0B"/>
+            <a:srgbClr val="E8A33D"/>
           </a:solidFill>
           <a:ln w="12700">
             <a:solidFill>
-              <a:srgbClr val="F59E0B"/>
+              <a:srgbClr val="E8A33D"/>
             </a:solidFill>
             <a:prstDash val="solid"/>
           </a:ln>
@@ -11282,141 +11539,24 @@
       </p:sp>
       <p:sp>
         <p:nvSpPr>
-          <p:cNvPr id="3" name="Text 1"/>
-          <p:cNvSpPr/>
-          <p:nvPr/>
-        </p:nvSpPr>
-        <p:spPr>
-          <a:xfrm>
-            <a:off x="548640" y="320040"/>
-            <a:ext cx="9144000" cy="320040"/>
-          </a:xfrm>
-          <a:prstGeom prst="rect">
-            <a:avLst/>
-          </a:prstGeom>
-          <a:noFill/>
-          <a:ln/>
-        </p:spPr>
-        <p:txBody>
-          <a:bodyPr wrap="square" lIns="0" tIns="0" rIns="0" bIns="0" rtlCol="0" anchor="ctr"/>
-          <a:lstStyle/>
-          <a:p>
-            <a:pPr indent="0" marL="0">
-              <a:buNone/>
-            </a:pPr>
-            <a:r>
-              <a:rPr lang="en-US" sz="1200" b="1" spc="500" kern="0" dirty="0">
-                <a:solidFill>
-                  <a:srgbClr val="F59E0B"/>
-                </a:solidFill>
-                <a:latin typeface="Calibri" pitchFamily="34" charset="0"/>
-                <a:ea typeface="Calibri" pitchFamily="34" charset="-122"/>
-                <a:cs typeface="Calibri" pitchFamily="34" charset="-120"/>
-              </a:rPr>
-              <a:t>SUMMARY &amp; OUTLOOK</a:t>
-            </a:r>
-            <a:endParaRPr lang="en-US" sz="1200" dirty="0"/>
-          </a:p>
-        </p:txBody>
-      </p:sp>
-      <p:sp>
-        <p:nvSpPr>
-          <p:cNvPr id="4" name="Text 2"/>
-          <p:cNvSpPr/>
-          <p:nvPr/>
-        </p:nvSpPr>
-        <p:spPr>
-          <a:xfrm>
-            <a:off x="10728655" y="320040"/>
-            <a:ext cx="1005840" cy="320040"/>
-          </a:xfrm>
-          <a:prstGeom prst="rect">
-            <a:avLst/>
-          </a:prstGeom>
-          <a:noFill/>
-          <a:ln/>
-        </p:spPr>
-        <p:txBody>
-          <a:bodyPr wrap="square" lIns="0" tIns="0" rIns="0" bIns="0" rtlCol="0" anchor="ctr"/>
-          <a:lstStyle/>
-          <a:p>
-            <a:pPr algn="r" indent="0" marL="0">
-              <a:buNone/>
-            </a:pPr>
-            <a:r>
-              <a:rPr lang="en-US" sz="1100" b="1" dirty="0">
-                <a:solidFill>
-                  <a:srgbClr val="64748B"/>
-                </a:solidFill>
-                <a:latin typeface="Calibri" pitchFamily="34" charset="0"/>
-                <a:ea typeface="Calibri" pitchFamily="34" charset="-122"/>
-                <a:cs typeface="Calibri" pitchFamily="34" charset="-120"/>
-              </a:rPr>
-              <a:t>09 / 09</a:t>
-            </a:r>
-            <a:endParaRPr lang="en-US" sz="1100" dirty="0"/>
-          </a:p>
-        </p:txBody>
-      </p:sp>
-      <p:sp>
-        <p:nvSpPr>
-          <p:cNvPr id="5" name="Text 3"/>
-          <p:cNvSpPr/>
-          <p:nvPr/>
-        </p:nvSpPr>
-        <p:spPr>
-          <a:xfrm>
-            <a:off x="548640" y="731520"/>
-            <a:ext cx="11094415" cy="822960"/>
-          </a:xfrm>
-          <a:prstGeom prst="rect">
-            <a:avLst/>
-          </a:prstGeom>
-          <a:noFill/>
-          <a:ln/>
-        </p:spPr>
-        <p:txBody>
-          <a:bodyPr wrap="square" lIns="0" tIns="0" rIns="0" bIns="0" rtlCol="0" anchor="ctr"/>
-          <a:lstStyle/>
-          <a:p>
-            <a:pPr indent="0" marL="0">
-              <a:buNone/>
-            </a:pPr>
-            <a:r>
-              <a:rPr lang="en-US" sz="3000" b="1" dirty="0">
-                <a:solidFill>
-                  <a:srgbClr val="F8FAFC"/>
-                </a:solidFill>
-                <a:latin typeface="Cambria" pitchFamily="34" charset="0"/>
-                <a:ea typeface="Cambria" pitchFamily="34" charset="-122"/>
-                <a:cs typeface="Cambria" pitchFamily="34" charset="-120"/>
-              </a:rPr>
-              <a:t>In-Flight Fission: Where We Are, Where We’re Going</a:t>
-            </a:r>
-            <a:endParaRPr lang="en-US" sz="3000" dirty="0"/>
-          </a:p>
-        </p:txBody>
-      </p:sp>
-      <p:sp>
-        <p:nvSpPr>
-          <p:cNvPr id="6" name="Shape 4"/>
-          <p:cNvSpPr/>
-          <p:nvPr/>
-        </p:nvSpPr>
-        <p:spPr>
-          <a:xfrm>
-            <a:off x="548640" y="1920240"/>
-            <a:ext cx="54864" cy="3840480"/>
+          <p:cNvPr id="3" name="Shape 1"/>
+          <p:cNvSpPr/>
+          <p:nvPr/>
+        </p:nvSpPr>
+        <p:spPr>
+          <a:xfrm>
+            <a:off x="0" y="0"/>
+            <a:ext cx="12191695" cy="91440"/>
           </a:xfrm>
           <a:prstGeom prst="rect">
             <a:avLst/>
           </a:prstGeom>
           <a:solidFill>
-            <a:srgbClr val="F59E0B"/>
+            <a:srgbClr val="E8A33D"/>
           </a:solidFill>
           <a:ln w="12700">
             <a:solidFill>
-              <a:srgbClr val="F59E0B"/>
+              <a:srgbClr val="E8A33D"/>
             </a:solidFill>
             <a:prstDash val="solid"/>
           </a:ln>
@@ -11424,14 +11564,131 @@
       </p:sp>
       <p:sp>
         <p:nvSpPr>
+          <p:cNvPr id="4" name="Text 2"/>
+          <p:cNvSpPr/>
+          <p:nvPr/>
+        </p:nvSpPr>
+        <p:spPr>
+          <a:xfrm>
+            <a:off x="502920" y="292608"/>
+            <a:ext cx="9144000" cy="347472"/>
+          </a:xfrm>
+          <a:prstGeom prst="rect">
+            <a:avLst/>
+          </a:prstGeom>
+          <a:noFill/>
+          <a:ln/>
+        </p:spPr>
+        <p:txBody>
+          <a:bodyPr wrap="square" lIns="0" tIns="0" rIns="0" bIns="0" rtlCol="0" anchor="ctr"/>
+          <a:lstStyle/>
+          <a:p>
+            <a:pPr indent="0" marL="0">
+              <a:buNone/>
+            </a:pPr>
+            <a:r>
+              <a:rPr lang="en-US" sz="1050" b="1" spc="600" kern="0" dirty="0">
+                <a:solidFill>
+                  <a:srgbClr val="E8A33D"/>
+                </a:solidFill>
+                <a:latin typeface="Calibri" pitchFamily="34" charset="0"/>
+                <a:ea typeface="Calibri" pitchFamily="34" charset="-122"/>
+                <a:cs typeface="Calibri" pitchFamily="34" charset="-120"/>
+              </a:rPr>
+              <a:t>SUMMARY  ·  OUTLOOK</a:t>
+            </a:r>
+            <a:endParaRPr lang="en-US" sz="1050" dirty="0"/>
+          </a:p>
+        </p:txBody>
+      </p:sp>
+      <p:sp>
+        <p:nvSpPr>
+          <p:cNvPr id="5" name="Text 3"/>
+          <p:cNvSpPr/>
+          <p:nvPr/>
+        </p:nvSpPr>
+        <p:spPr>
+          <a:xfrm>
+            <a:off x="10728655" y="292608"/>
+            <a:ext cx="1005840" cy="347472"/>
+          </a:xfrm>
+          <a:prstGeom prst="rect">
+            <a:avLst/>
+          </a:prstGeom>
+          <a:noFill/>
+          <a:ln/>
+        </p:spPr>
+        <p:txBody>
+          <a:bodyPr wrap="square" lIns="0" tIns="0" rIns="0" bIns="0" rtlCol="0" anchor="ctr"/>
+          <a:lstStyle/>
+          <a:p>
+            <a:pPr algn="r" indent="0" marL="0">
+              <a:buNone/>
+            </a:pPr>
+            <a:r>
+              <a:rPr lang="en-US" sz="1050" b="1" spc="200" kern="0" dirty="0">
+                <a:solidFill>
+                  <a:srgbClr val="AFA89A"/>
+                </a:solidFill>
+                <a:latin typeface="Calibri" pitchFamily="34" charset="0"/>
+                <a:ea typeface="Calibri" pitchFamily="34" charset="-122"/>
+                <a:cs typeface="Calibri" pitchFamily="34" charset="-120"/>
+              </a:rPr>
+              <a:t>09  ·  09</a:t>
+            </a:r>
+            <a:endParaRPr lang="en-US" sz="1050" dirty="0"/>
+          </a:p>
+        </p:txBody>
+      </p:sp>
+      <p:sp>
+        <p:nvSpPr>
+          <p:cNvPr id="6" name="Text 4"/>
+          <p:cNvSpPr/>
+          <p:nvPr/>
+        </p:nvSpPr>
+        <p:spPr>
+          <a:xfrm>
+            <a:off x="502920" y="713232"/>
+            <a:ext cx="11185855" cy="868680"/>
+          </a:xfrm>
+          <a:prstGeom prst="rect">
+            <a:avLst/>
+          </a:prstGeom>
+          <a:noFill/>
+          <a:ln/>
+        </p:spPr>
+        <p:txBody>
+          <a:bodyPr wrap="square" lIns="0" tIns="0" rIns="0" bIns="0" rtlCol="0" anchor="ctr"/>
+          <a:lstStyle/>
+          <a:p>
+            <a:pPr indent="0" marL="0">
+              <a:buNone/>
+            </a:pPr>
+            <a:r>
+              <a:rPr lang="en-US" sz="3400" b="1" dirty="0">
+                <a:solidFill>
+                  <a:srgbClr val="F5EFE6"/>
+                </a:solidFill>
+                <a:latin typeface="Palatino" pitchFamily="34" charset="0"/>
+                <a:ea typeface="Palatino" pitchFamily="34" charset="-122"/>
+                <a:cs typeface="Palatino" pitchFamily="34" charset="-120"/>
+              </a:rPr>
+              <a:t>In-Flight Fission: Where We Are, Where We’re Going</a:t>
+            </a:r>
+            <a:endParaRPr lang="en-US" sz="3400" dirty="0"/>
+          </a:p>
+        </p:txBody>
+      </p:sp>
+      <p:sp>
+        <p:nvSpPr>
           <p:cNvPr id="7" name="Text 5"/>
           <p:cNvSpPr/>
           <p:nvPr/>
         </p:nvSpPr>
         <p:spPr>
           <a:xfrm>
-            <a:off x="731520" y="1920240"/>
-            <a:ext cx="5212080" cy="320040"/>
+            <a:off x="548640" y="1920240"/>
+            <a:ext cx="5394960" cy="320040"/>
           </a:xfrm>
           <a:prstGeom prst="rect">
             <a:avLst/>
@@ -11449,7 +11706,7 @@
             <a:r>
               <a:rPr lang="en-US" sz="1100" b="1" spc="400" kern="0" dirty="0">
                 <a:solidFill>
-                  <a:srgbClr val="F59E0B"/>
+                  <a:srgbClr val="E8A33D"/>
                 </a:solidFill>
                 <a:latin typeface="Calibri" pitchFamily="34" charset="0"/>
                 <a:ea typeface="Calibri" pitchFamily="34" charset="-122"/>
@@ -11469,8 +11726,8 @@
         </p:nvSpPr>
         <p:spPr>
           <a:xfrm>
-            <a:off x="731520" y="2331720"/>
-            <a:ext cx="5212080" cy="3474720"/>
+            <a:off x="548640" y="2331720"/>
+            <a:ext cx="5394960" cy="3474720"/>
           </a:xfrm>
           <a:prstGeom prst="rect">
             <a:avLst/>
@@ -11492,47 +11749,13 @@
             <a:r>
               <a:rPr lang="en-US" sz="1400" dirty="0">
                 <a:solidFill>
-                  <a:srgbClr val="F8FAFC"/>
-                </a:solidFill>
-                <a:latin typeface="Calibri" pitchFamily="34" charset="0"/>
-                <a:ea typeface="Calibri" pitchFamily="34" charset="-122"/>
-                <a:cs typeface="Calibri" pitchFamily="34" charset="-120"/>
-              </a:rPr>
-              <a:t>In-flight fission of </a:t>
-            </a:r>
-            <a:pPr indent="0" marL="0">
-              <a:spcAft>
-                <a:spcPts val="600"/>
-              </a:spcAft>
-              <a:buNone/>
-            </a:pPr>
-            <a:r>
-              <a:rPr lang="en-US" sz="1400" baseline="30000" dirty="0">
-                <a:solidFill>
-                  <a:srgbClr val="F8FAFC"/>
-                </a:solidFill>
-                <a:latin typeface="Calibri" pitchFamily="34" charset="0"/>
-                <a:ea typeface="Calibri" pitchFamily="34" charset="-122"/>
-                <a:cs typeface="Calibri" pitchFamily="34" charset="-120"/>
-              </a:rPr>
-              <a:t>238</a:t>
-            </a:r>
-            <a:pPr indent="0" marL="0">
-              <a:spcAft>
-                <a:spcPts val="600"/>
-              </a:spcAft>
-              <a:buNone/>
-            </a:pPr>
-            <a:r>
-              <a:rPr lang="en-US" sz="1400" dirty="0">
-                <a:solidFill>
-                  <a:srgbClr val="F8FAFC"/>
-                </a:solidFill>
-                <a:latin typeface="Calibri" pitchFamily="34" charset="0"/>
-                <a:ea typeface="Calibri" pitchFamily="34" charset="-122"/>
-                <a:cs typeface="Calibri" pitchFamily="34" charset="-120"/>
-              </a:rPr>
-              <a:t>U is the dominant route to mid-mass neutron-rich exotica.</a:t>
+                  <a:srgbClr val="F5EFE6"/>
+                </a:solidFill>
+                <a:latin typeface="Calibri" pitchFamily="34" charset="0"/>
+                <a:ea typeface="Calibri" pitchFamily="34" charset="-122"/>
+                <a:cs typeface="Calibri" pitchFamily="34" charset="-120"/>
+              </a:rPr>
+              <a:t>In-flight fission of ²³⁸U is the dominant route to mid-mass neutron-rich exotica.</a:t>
             </a:r>
             <a:endParaRPr lang="en-US" sz="1400" dirty="0"/>
           </a:p>
@@ -11547,7 +11770,7 @@
             <a:r>
               <a:rPr lang="en-US" sz="1400" dirty="0">
                 <a:solidFill>
-                  <a:srgbClr val="F8FAFC"/>
+                  <a:srgbClr val="F5EFE6"/>
                 </a:solidFill>
                 <a:latin typeface="Calibri" pitchFamily="34" charset="0"/>
                 <a:ea typeface="Calibri" pitchFamily="34" charset="-122"/>
@@ -11568,7 +11791,7 @@
             <a:r>
               <a:rPr lang="en-US" sz="1400" dirty="0">
                 <a:solidFill>
-                  <a:srgbClr val="F8FAFC"/>
+                  <a:srgbClr val="F5EFE6"/>
                 </a:solidFill>
                 <a:latin typeface="Calibri" pitchFamily="34" charset="0"/>
                 <a:ea typeface="Calibri" pitchFamily="34" charset="-122"/>
@@ -11589,7 +11812,7 @@
             <a:r>
               <a:rPr lang="en-US" sz="1400" dirty="0">
                 <a:solidFill>
-                  <a:srgbClr val="F8FAFC"/>
+                  <a:srgbClr val="F5EFE6"/>
                 </a:solidFill>
                 <a:latin typeface="Calibri" pitchFamily="34" charset="0"/>
                 <a:ea typeface="Calibri" pitchFamily="34" charset="-122"/>
@@ -11609,18 +11832,18 @@
         </p:nvSpPr>
         <p:spPr>
           <a:xfrm>
-            <a:off x="6309360" y="1920240"/>
-            <a:ext cx="54864" cy="3840480"/>
+            <a:off x="6126480" y="1920240"/>
+            <a:ext cx="54864" cy="4206240"/>
           </a:xfrm>
           <a:prstGeom prst="rect">
             <a:avLst/>
           </a:prstGeom>
           <a:solidFill>
-            <a:srgbClr val="0891B2"/>
+            <a:srgbClr val="4A7C7E"/>
           </a:solidFill>
           <a:ln w="12700">
             <a:solidFill>
-              <a:srgbClr val="0891B2"/>
+              <a:srgbClr val="4A7C7E"/>
             </a:solidFill>
             <a:prstDash val="solid"/>
           </a:ln>
@@ -11634,7 +11857,7 @@
         </p:nvSpPr>
         <p:spPr>
           <a:xfrm>
-            <a:off x="6492240" y="1920240"/>
+            <a:off x="6309360" y="1920240"/>
             <a:ext cx="5212080" cy="320040"/>
           </a:xfrm>
           <a:prstGeom prst="rect">
@@ -11653,13 +11876,13 @@
             <a:r>
               <a:rPr lang="en-US" sz="1100" b="1" spc="400" kern="0" dirty="0">
                 <a:solidFill>
-                  <a:srgbClr val="0891B2"/>
-                </a:solidFill>
-                <a:latin typeface="Calibri" pitchFamily="34" charset="0"/>
-                <a:ea typeface="Calibri" pitchFamily="34" charset="-122"/>
-                <a:cs typeface="Calibri" pitchFamily="34" charset="-120"/>
-              </a:rPr>
-              <a:t>OUTLOOK (2026 → )</a:t>
+                  <a:srgbClr val="4A7C7E"/>
+                </a:solidFill>
+                <a:latin typeface="Calibri" pitchFamily="34" charset="0"/>
+                <a:ea typeface="Calibri" pitchFamily="34" charset="-122"/>
+                <a:cs typeface="Calibri" pitchFamily="34" charset="-120"/>
+              </a:rPr>
+              <a:t>OUTLOOK  ·  2026 →</a:t>
             </a:r>
             <a:endParaRPr lang="en-US" sz="1100" dirty="0"/>
           </a:p>
@@ -11673,7 +11896,7 @@
         </p:nvSpPr>
         <p:spPr>
           <a:xfrm>
-            <a:off x="6492240" y="2331720"/>
+            <a:off x="6309360" y="2331720"/>
             <a:ext cx="5212080" cy="3474720"/>
           </a:xfrm>
           <a:prstGeom prst="rect">
@@ -11696,7 +11919,7 @@
             <a:r>
               <a:rPr lang="en-US" sz="1400" dirty="0">
                 <a:solidFill>
-                  <a:srgbClr val="F8FAFC"/>
+                  <a:srgbClr val="F5EFE6"/>
                 </a:solidFill>
                 <a:latin typeface="Calibri" pitchFamily="34" charset="0"/>
                 <a:ea typeface="Calibri" pitchFamily="34" charset="-122"/>
@@ -11717,7 +11940,7 @@
             <a:r>
               <a:rPr lang="en-US" sz="1400" dirty="0">
                 <a:solidFill>
-                  <a:srgbClr val="F8FAFC"/>
+                  <a:srgbClr val="F5EFE6"/>
                 </a:solidFill>
                 <a:latin typeface="Calibri" pitchFamily="34" charset="0"/>
                 <a:ea typeface="Calibri" pitchFamily="34" charset="-122"/>
@@ -11738,7 +11961,7 @@
             <a:r>
               <a:rPr lang="en-US" sz="1400" dirty="0">
                 <a:solidFill>
-                  <a:srgbClr val="F8FAFC"/>
+                  <a:srgbClr val="F5EFE6"/>
                 </a:solidFill>
                 <a:latin typeface="Calibri" pitchFamily="34" charset="0"/>
                 <a:ea typeface="Calibri" pitchFamily="34" charset="-122"/>
@@ -11759,7 +11982,7 @@
             <a:r>
               <a:rPr lang="en-US" sz="1400" dirty="0">
                 <a:solidFill>
-                  <a:srgbClr val="F8FAFC"/>
+                  <a:srgbClr val="F5EFE6"/>
                 </a:solidFill>
                 <a:latin typeface="Calibri" pitchFamily="34" charset="0"/>
                 <a:ea typeface="Calibri" pitchFamily="34" charset="-122"/>
